--- a/presentation/ACOD310_midterm_deck.pptx
+++ b/presentation/ACOD310_midterm_deck.pptx
@@ -5,24 +5,24 @@
     <p:sldMasterId id="2147483648" r:id="rId1"/>
   </p:sldMasterIdLst>
   <p:notesMasterIdLst>
-    <p:notesMasterId r:id="rId5"/>
+    <p:notesMasterId r:id="rId12"/>
   </p:notesMasterIdLst>
   <p:sldIdLst>
-    <p:sldId id="256" r:id="rId4"/>
+    <p:sldId id="256" r:id="rId2"/>
     <p:sldId id="257" r:id="rId3"/>
-    <p:sldId id="258" r:id="rId2"/>
-    <p:sldId id="259" r:id="rId13"/>
-    <p:sldId id="260" r:id="rId14"/>
-    <p:sldId id="261" r:id="rId15"/>
-    <p:sldId id="262" r:id="rId16"/>
-    <p:sldId id="263" r:id="rId17"/>
-    <p:sldId id="264" r:id="rId18"/>
-    <p:sldId id="265" r:id="rId19"/>
+    <p:sldId id="258" r:id="rId4"/>
+    <p:sldId id="259" r:id="rId5"/>
+    <p:sldId id="260" r:id="rId6"/>
+    <p:sldId id="261" r:id="rId7"/>
+    <p:sldId id="262" r:id="rId8"/>
+    <p:sldId id="263" r:id="rId9"/>
+    <p:sldId id="264" r:id="rId10"/>
+    <p:sldId id="265" r:id="rId11"/>
   </p:sldIdLst>
   <p:sldSz cx="12192000" cy="6858000"/>
   <p:notesSz cx="6858000" cy="9144000"/>
   <p:custDataLst>
-    <p:tags r:id="rId6"/>
+    <p:tags r:id="rId13"/>
   </p:custDataLst>
   <p:defaultTextStyle>
     <a:defPPr>
@@ -1813,7 +1813,7 @@
           <a:p>
             <a:fld id="{4D1C357D-6657-A347-80CC-500B94D76027}" type="datetimeFigureOut">
               <a:rPr lang="en-AE" smtClean="0"/>
-              <a:t>12/10/2026</a:t>
+              <a:t>16/10/2026</a:t>
             </a:fld>
             <a:endParaRPr lang="en-AE"/>
           </a:p>
@@ -2082,7 +2082,7 @@
 </file>
 
 <file path=ppt/notesSlides/notesSlide1.xml><?xml version="1.0" encoding="utf-8"?>
-<p:notes xmlns:a="http://schemas.openxmlformats.org/drawingml/2006/main" xmlns:p="http://schemas.openxmlformats.org/presentationml/2006/main" xmlns:r="http://schemas.openxmlformats.org/officeDocument/2006/relationships">
+<p:notes xmlns:a="http://schemas.openxmlformats.org/drawingml/2006/main" xmlns:r="http://schemas.openxmlformats.org/officeDocument/2006/relationships" xmlns:p="http://schemas.openxmlformats.org/presentationml/2006/main">
   <p:cSld>
     <p:spTree>
       <p:nvGrpSpPr>
@@ -2102,7 +2102,7 @@
         <p:nvSpPr>
           <p:cNvPr id="2" name="Slide Image Placeholder 1"/>
           <p:cNvSpPr>
-            <a:spLocks noGrp="1"/>
+            <a:spLocks noGrp="1" noRot="1" noChangeAspect="1"/>
           </p:cNvSpPr>
           <p:nvPr>
             <p:ph type="sldImg" idx="2"/>
@@ -2117,7 +2117,7 @@
             <a:spLocks noGrp="1"/>
           </p:cNvSpPr>
           <p:nvPr>
-            <p:ph type="body" idx="3" sz="quarter"/>
+            <p:ph type="body" sz="quarter" idx="3"/>
           </p:nvPr>
         </p:nvSpPr>
         <p:spPr/>
@@ -2126,6 +2126,7 @@
           <a:lstStyle/>
           <a:p>
             <a:r>
+              <a:rPr dirty="0"/>
               <a:t>Good morning. We are Sumant and Parva. Our question: when every reactor experiment costs a day, how do you find the best operating point in as few runs as possible? We built a tool for that.</a:t>
             </a:r>
           </a:p>
@@ -2138,7 +2139,7 @@
             <a:spLocks noGrp="1"/>
           </p:cNvSpPr>
           <p:nvPr>
-            <p:ph type="sldNum" idx="5" sz="quarter"/>
+            <p:ph type="sldNum" sz="quarter" idx="5"/>
           </p:nvPr>
         </p:nvSpPr>
         <p:spPr/>
@@ -2152,7 +2153,7 @@
 </file>
 
 <file path=ppt/notesSlides/notesSlide10.xml><?xml version="1.0" encoding="utf-8"?>
-<p:notes xmlns:a="http://schemas.openxmlformats.org/drawingml/2006/main" xmlns:p="http://schemas.openxmlformats.org/presentationml/2006/main" xmlns:r="http://schemas.openxmlformats.org/officeDocument/2006/relationships">
+<p:notes xmlns:a="http://schemas.openxmlformats.org/drawingml/2006/main" xmlns:r="http://schemas.openxmlformats.org/officeDocument/2006/relationships" xmlns:p="http://schemas.openxmlformats.org/presentationml/2006/main">
   <p:cSld>
     <p:spTree>
       <p:nvGrpSpPr>
@@ -2172,7 +2173,7 @@
         <p:nvSpPr>
           <p:cNvPr id="2" name="Slide Image Placeholder 1"/>
           <p:cNvSpPr>
-            <a:spLocks noGrp="1"/>
+            <a:spLocks noGrp="1" noRot="1" noChangeAspect="1"/>
           </p:cNvSpPr>
           <p:nvPr>
             <p:ph type="sldImg" idx="2"/>
@@ -2187,7 +2188,7 @@
             <a:spLocks noGrp="1"/>
           </p:cNvSpPr>
           <p:nvPr>
-            <p:ph type="body" idx="3" sz="quarter"/>
+            <p:ph type="body" sz="quarter" idx="3"/>
           </p:nvPr>
         </p:nvSpPr>
         <p:spPr/>
@@ -2196,8 +2197,25 @@
           <a:lstStyle/>
           <a:p>
             <a:r>
-              <a:t>Where we are: a verified twin, a benchmarked optimisation package, the advisor with a rules-of-thumb baseline and a web tool, and this month's learning upgrade; everything is tested and on GitHub. Next, four steps. First, make the numbers real: so far everything runs on placeholder kinetics and prices, so next we collect real ones and a real GC log from the reactor with Professor Khare. Second, let users type in their own reactions, and let the advisor work out which reactions are actually happening. Third, a blind test: the advisor against a real chemist on the same reactor and budget. Fourth, show the trade-off between profit and purity, so the operator picks the point that fits the contract. To close: we asked for fewer experiments to the best operating point, for someone who is not a specialist. On the simulated reactor the answer is nine runs instead of twenty-one, in plain English. The next step is the real reactor. Thank you.</a:t>
-            </a:r>
+              <a:rPr dirty="0"/>
+              <a:t>Where we are: a verified twin, a benchmarked </a:t>
+            </a:r>
+            <a:r>
+              <a:rPr dirty="0" err="1"/>
+              <a:t>optimisation</a:t>
+            </a:r>
+            <a:r>
+              <a:rPr dirty="0"/>
+              <a:t> package, the advisor with a rules-of-thumb baseline and a web tool, and this month's learning upgrade; everything is tested and on GitHub. Next, four steps. First, make the numbers real: so far everything runs on placeholder kinetics and prices, so next we collect real ones and a real GC log from the reactor with Professor Khare. Second, let users type in their own reactions, and let the advisor work out which reactions are actually happening. Third, a blind test: the advisor against a real chemist on the same reactor and budget. Fourth, show the trade-off between profit and purity, so the operator picks the point that fits the contract. To close: we asked for fewer experiments to the best operating point, for someone who is not a specialist. On the simulated reactor the answer is nine runs instead of twenty-one, in plain English. The next step is the real reactor. Thank you.</a:t>
+            </a:r>
+            <a:br>
+              <a:rPr lang="en-IN" dirty="0"/>
+            </a:br>
+            <a:r>
+              <a:rPr lang="pt-BR" dirty="0"/>
+              <a:t>k(r) = σ² · (1 + √5·r/ℓ + 5r²/(3ℓ²)) · exp( −√5·r/ℓ ) - matern kernel</a:t>
+            </a:r>
+            <a:endParaRPr dirty="0"/>
           </a:p>
         </p:txBody>
       </p:sp>
@@ -2208,7 +2226,7 @@
             <a:spLocks noGrp="1"/>
           </p:cNvSpPr>
           <p:nvPr>
-            <p:ph type="sldNum" idx="5" sz="quarter"/>
+            <p:ph type="sldNum" sz="quarter" idx="5"/>
           </p:nvPr>
         </p:nvSpPr>
         <p:spPr/>
@@ -2222,7 +2240,7 @@
 </file>
 
 <file path=ppt/notesSlides/notesSlide2.xml><?xml version="1.0" encoding="utf-8"?>
-<p:notes xmlns:a="http://schemas.openxmlformats.org/drawingml/2006/main" xmlns:p="http://schemas.openxmlformats.org/presentationml/2006/main" xmlns:r="http://schemas.openxmlformats.org/officeDocument/2006/relationships">
+<p:notes xmlns:a="http://schemas.openxmlformats.org/drawingml/2006/main" xmlns:r="http://schemas.openxmlformats.org/officeDocument/2006/relationships" xmlns:p="http://schemas.openxmlformats.org/presentationml/2006/main">
   <p:cSld>
     <p:spTree>
       <p:nvGrpSpPr>
@@ -2242,7 +2260,7 @@
         <p:nvSpPr>
           <p:cNvPr id="2" name="Slide Image Placeholder 1"/>
           <p:cNvSpPr>
-            <a:spLocks noGrp="1"/>
+            <a:spLocks noGrp="1" noRot="1" noChangeAspect="1"/>
           </p:cNvSpPr>
           <p:nvPr>
             <p:ph type="sldImg" idx="2"/>
@@ -2257,7 +2275,7 @@
             <a:spLocks noGrp="1"/>
           </p:cNvSpPr>
           <p:nvPr>
-            <p:ph type="body" idx="3" sz="quarter"/>
+            <p:ph type="body" sz="quarter" idx="3"/>
           </p:nvPr>
         </p:nvSpPr>
         <p:spPr/>
@@ -2266,8 +2284,10 @@
           <a:lstStyle/>
           <a:p>
             <a:r>
-              <a:t>Motivation, what the literature offers and where it stops, how we built the twin and the advisor, the results, what it means for the person at the reactor, and next steps.</a:t>
-            </a:r>
+              <a:rPr lang="en-US" dirty="0"/>
+              <a:t>Here's the plan. First, the problem and why it matters. Then what the research already offers and where it stops. Then how we built the reactor twin and the advisor, the results, what it means for the person running the reactor, and what comes next.</a:t>
+            </a:r>
+            <a:endParaRPr dirty="0"/>
           </a:p>
         </p:txBody>
       </p:sp>
@@ -2278,7 +2298,7 @@
             <a:spLocks noGrp="1"/>
           </p:cNvSpPr>
           <p:nvPr>
-            <p:ph type="sldNum" idx="5" sz="quarter"/>
+            <p:ph type="sldNum" sz="quarter" idx="5"/>
           </p:nvPr>
         </p:nvSpPr>
         <p:spPr/>
@@ -2292,7 +2312,7 @@
 </file>
 
 <file path=ppt/notesSlides/notesSlide3.xml><?xml version="1.0" encoding="utf-8"?>
-<p:notes xmlns:a="http://schemas.openxmlformats.org/drawingml/2006/main" xmlns:p="http://schemas.openxmlformats.org/presentationml/2006/main" xmlns:r="http://schemas.openxmlformats.org/officeDocument/2006/relationships">
+<p:notes xmlns:a="http://schemas.openxmlformats.org/drawingml/2006/main" xmlns:r="http://schemas.openxmlformats.org/officeDocument/2006/relationships" xmlns:p="http://schemas.openxmlformats.org/presentationml/2006/main">
   <p:cSld>
     <p:spTree>
       <p:nvGrpSpPr>
@@ -2312,7 +2332,7 @@
         <p:nvSpPr>
           <p:cNvPr id="2" name="Slide Image Placeholder 1"/>
           <p:cNvSpPr>
-            <a:spLocks noGrp="1"/>
+            <a:spLocks noGrp="1" noRot="1" noChangeAspect="1"/>
           </p:cNvSpPr>
           <p:nvPr>
             <p:ph type="sldImg" idx="2"/>
@@ -2327,7 +2347,7 @@
             <a:spLocks noGrp="1"/>
           </p:cNvSpPr>
           <p:nvPr>
-            <p:ph type="body" idx="3" sz="quarter"/>
+            <p:ph type="body" sz="quarter" idx="3"/>
           </p:nvPr>
         </p:nvSpPr>
         <p:spPr/>
@@ -2336,8 +2356,24 @@
           <a:lstStyle/>
           <a:p>
             <a:r>
-              <a:t>Here is the system: a gas-phase fixed-bed reactor. Reactants A and B and an inert gas are fed through mass-flow controllers over a catalyst bed at a set temperature and pressure, and a gas chromatograph prints what came out. Five knobs can change between runs; the catalyst is loaded once. Each run takes about a day, so a campaign is ten to twenty-five runs. Today the operator tunes this by rules of thumb: too much waste product, go cooler; too little feed reacting, go hotter. It works, but slowly, and the early runs lose money. And there are real constraints: no big jumps between runs, a product spec to meet, and every run costs money. So our problem: take the run log the operator already keeps, and tell them what to run next, why, what profit to expect and whether another run is worth it — in fewer runs than the rules of thumb. Over to Parva for the literature and the method.</a:t>
-            </a:r>
+              <a:rPr lang="en-US" dirty="0"/>
+              <a:t>This is the system: a gas-phase fixed-bed reactor. Reactants A and B, plus an inert gas, flow through mass-flow controllers over a bed of catalyst at a set temperature and pressure. At the outlet, a gas chromatograph, the GC, tells us what came out. </a:t>
+            </a:r>
+            <a:br>
+              <a:rPr lang="en-US" dirty="0"/>
+            </a:br>
+            <a:r>
+              <a:rPr lang="en-US" dirty="0"/>
+              <a:t>There are five knobs we can change between runs: pressure, the three gas flows, and temperature. The catalyst is loaded once and stays. Each run takes about a day to reach a steady, reliable reading, so a campaign gets maybe 10 to 25 runs. Today, operators tune this by rules of thumb: too much waste product, go cooler; too little reacting, go hotter. It works, but it's slow, needs an experienced chemist, and the early runs lose money. And there are real limits: no knob can jump more than one step per run, the product must meet a spec, and every run costs money. </a:t>
+            </a:r>
+            <a:br>
+              <a:rPr lang="en-US" dirty="0"/>
+            </a:br>
+            <a:r>
+              <a:rPr lang="en-US" dirty="0"/>
+              <a:t>So our problem: take the run log the operator already keeps, and say what to run next, why, what profit to expect, and whether another run is worth it, in fewer runs than the rules of thumb.</a:t>
+            </a:r>
+            <a:endParaRPr dirty="0"/>
           </a:p>
         </p:txBody>
       </p:sp>
@@ -2348,7 +2384,7 @@
             <a:spLocks noGrp="1"/>
           </p:cNvSpPr>
           <p:nvPr>
-            <p:ph type="sldNum" idx="5" sz="quarter"/>
+            <p:ph type="sldNum" sz="quarter" idx="5"/>
           </p:nvPr>
         </p:nvSpPr>
         <p:spPr/>
@@ -2362,7 +2398,7 @@
 </file>
 
 <file path=ppt/notesSlides/notesSlide4.xml><?xml version="1.0" encoding="utf-8"?>
-<p:notes xmlns:a="http://schemas.openxmlformats.org/drawingml/2006/main" xmlns:p="http://schemas.openxmlformats.org/presentationml/2006/main" xmlns:r="http://schemas.openxmlformats.org/officeDocument/2006/relationships">
+<p:notes xmlns:a="http://schemas.openxmlformats.org/drawingml/2006/main" xmlns:r="http://schemas.openxmlformats.org/officeDocument/2006/relationships" xmlns:p="http://schemas.openxmlformats.org/presentationml/2006/main">
   <p:cSld>
     <p:spTree>
       <p:nvGrpSpPr>
@@ -2382,7 +2418,7 @@
         <p:nvSpPr>
           <p:cNvPr id="2" name="Slide Image Placeholder 1"/>
           <p:cNvSpPr>
-            <a:spLocks noGrp="1"/>
+            <a:spLocks noGrp="1" noRot="1" noChangeAspect="1"/>
           </p:cNvSpPr>
           <p:nvPr>
             <p:ph type="sldImg" idx="2"/>
@@ -2397,7 +2433,7 @@
             <a:spLocks noGrp="1"/>
           </p:cNvSpPr>
           <p:nvPr>
-            <p:ph type="body" idx="3" sz="quarter"/>
+            <p:ph type="body" sz="quarter" idx="3"/>
           </p:nvPr>
         </p:nvSpPr>
         <p:spPr/>
@@ -2406,14 +2442,26 @@
           <a:lstStyle/>
           <a:p>
             <a:r>
-              <a:t>What does the literature offer? First, optimising expensive experiments: a statistical model guesses where the best experiment is, you run it and update — response surfaces since the fifties, Bayesian optimisation today; in 2021 Shields and co-workers showed in Nature that it beats expert chemists. Second, the extensions a plant needs: product specs as constraints, step costs, local search, and grey-box methods that use the measured composition but learn it from scratch. Third, physics plus data: hybrid models, and model-based design of experiments, which uses the kinetic model to sharpen its parameters rather than to earn profit. The gap: nobody combines kinetics learned from every GC reading with step-limited planning toward profit, under a fixed catalyst, for a non-specialist. That is this project.</a:t>
-            </a:r>
-          </a:p>
-          <a:p/>
-          <a:p>
-            <a:r>
-              <a:t>Full references. Box, G.E.P. &amp; Wilson, K.B., J. R. Stat. Soc. B 13, 1–45 (1951). Jones, D.R., Schonlau, M. &amp; Welch, W.J., J. Global Optim. 13, 455–492 (1998). Shields, B.J. et al., Nature 590, 89–96 (2021). Taylor, C.J. et al., Chem. Rev. 123, 3089–3126 (2023). Gelbart, M.A., Snoek, J. &amp; Adams, R.P., UAI 2014, 250–259. Eriksson, D. et al., NeurIPS 32, 5496–5507 (2019). Folch, J.P. et al., SnAKe, NeurIPS 35 (2022). Astudillo, R. &amp; Frazier, P.I., ICML 2019, PMLR 97, 354–363. Paulson, J.A. &amp; Lu, C., COBALT, Comput. Chem. Eng. 160, 107700 (2022). Psichogios, D.C. &amp; Ungar, L.H., AIChE J. 38, 1499–1511 (1992). von Stosch, M. et al., Comput. Chem. Eng. 60, 86–101 (2014). Franceschini, G. &amp; Macchietto, S., Chem. Eng. Sci. 63, 4846–4872 (2008). Waldron, C. et al., Ind. Eng. Chem. Res. 58, 22165–22177 (2019). Reactor model after Froment, Bischoff &amp; De Wilde, Chemical Reactor Analysis and Design, 3rd ed., Wiley 2011, and Fogler, Elements of Chemical Reaction Engineering, 6th ed., Pearson 2020.</a:t>
-            </a:r>
+              <a:rPr lang="en-US" dirty="0"/>
+              <a:t>There are three strands of research relevant to our problem. First, </a:t>
+            </a:r>
+            <a:r>
+              <a:rPr lang="en-US" dirty="0" err="1"/>
+              <a:t>optimising</a:t>
+            </a:r>
+            <a:r>
+              <a:rPr lang="en-US" dirty="0"/>
+              <a:t> expensive experiments: from response surfaces in the 1950s to Bayesian </a:t>
+            </a:r>
+            <a:r>
+              <a:rPr lang="en-US" dirty="0" err="1"/>
+              <a:t>optimisation</a:t>
+            </a:r>
+            <a:r>
+              <a:rPr lang="en-US" dirty="0"/>
+              <a:t> today. A statistical model picks the next experiment, and in 2021 it was shown to beat expert chemists. Second, the extensions a real plant needs: product specs as constraints, keeping the search local, the cost of changing settings, and grey-box methods that use the measured composition but still learn everything from scratch. Third, physics plus data: hybrid models and model-based experiment design. These use the kinetic model, but to pin down its parameters, not to make money, and they can jump to any setting. The gap: nobody combines kinetics learned from every GC reading with step-by-step planning toward profit, under a product spec and a fixed catalyst, in a tool a nonspecialist can use. That's this project.</a:t>
+            </a:r>
+            <a:endParaRPr dirty="0"/>
           </a:p>
         </p:txBody>
       </p:sp>
@@ -2424,7 +2472,7 @@
             <a:spLocks noGrp="1"/>
           </p:cNvSpPr>
           <p:nvPr>
-            <p:ph type="sldNum" idx="5" sz="quarter"/>
+            <p:ph type="sldNum" sz="quarter" idx="5"/>
           </p:nvPr>
         </p:nvSpPr>
         <p:spPr/>
@@ -2438,7 +2486,7 @@
 </file>
 
 <file path=ppt/notesSlides/notesSlide5.xml><?xml version="1.0" encoding="utf-8"?>
-<p:notes xmlns:a="http://schemas.openxmlformats.org/drawingml/2006/main" xmlns:p="http://schemas.openxmlformats.org/presentationml/2006/main" xmlns:r="http://schemas.openxmlformats.org/officeDocument/2006/relationships">
+<p:notes xmlns:a="http://schemas.openxmlformats.org/drawingml/2006/main" xmlns:r="http://schemas.openxmlformats.org/officeDocument/2006/relationships" xmlns:p="http://schemas.openxmlformats.org/presentationml/2006/main">
   <p:cSld>
     <p:spTree>
       <p:nvGrpSpPr>
@@ -2458,7 +2506,7 @@
         <p:nvSpPr>
           <p:cNvPr id="2" name="Slide Image Placeholder 1"/>
           <p:cNvSpPr>
-            <a:spLocks noGrp="1"/>
+            <a:spLocks noGrp="1" noRot="1" noChangeAspect="1"/>
           </p:cNvSpPr>
           <p:nvPr>
             <p:ph type="sldImg" idx="2"/>
@@ -2473,7 +2521,7 @@
             <a:spLocks noGrp="1"/>
           </p:cNvSpPr>
           <p:nvPr>
-            <p:ph type="body" idx="3" sz="quarter"/>
+            <p:ph type="body" sz="quarter" idx="3"/>
           </p:nvPr>
         </p:nvSpPr>
         <p:spPr/>
@@ -2482,8 +2530,25 @@
           <a:lstStyle/>
           <a:p>
             <a:r>
-              <a:t>We built a digital twin of the reactor: a textbook model of how much of each substance is left after the gas passes over the catalyst, per square metre of catalyst, with reaction speeds rising with temperature in the standard way, and an economic layer that turns a GC reading into profit per hour. We test on two chemistries: a simple one, and a complex one where three reactions compete — hotter is faster but the equilibrium and the cracking take product away; more B converts more A but the over-reaction eats the product. The profitable temperature band is about thirty degrees wide. The virtual reactor we test against is deliberately imperfect: the product slows the reactions and the instrument has one per cent error, things the advisor's model does not know. Every method follows the same protocol: catalyst loaded once, the same five screening runs, then one allowed step per run, twenty-five runs, ten campaigns from different starting points. Because the reactor is simulated we know the true best, so every method is scored against it.</a:t>
-            </a:r>
+              <a:rPr lang="en-US" dirty="0"/>
+              <a:t>To test this safely, we built a digital twin: a textbook model of the reactor that predicts what comes out for any settings. It works per square </a:t>
+            </a:r>
+            <a:r>
+              <a:rPr lang="en-US" dirty="0" err="1"/>
+              <a:t>metre</a:t>
+            </a:r>
+            <a:r>
+              <a:rPr lang="en-US" dirty="0"/>
+              <a:t> of catalyst surface, so what it learns belongs to the catalyst material, not to one loading. Reactions speed up with temperature by the standard Arrhenius law, and profit is product value minus the costs of feed, compression and by-products, all from the GC reading. We use two chemistries. A simple one, and a complex one where three reactions compete: hotter is faster, but side reactions eat the product. On the complex one, the profitable temperature window is only about 30 degrees wide. Miss it and most of the profit is gone. The test reactor is deliberately imperfect: the product slows the reactions, and the GC has 1% error, effects our advisor isn't told about.</a:t>
+            </a:r>
+            <a:br>
+              <a:rPr lang="en-US" dirty="0"/>
+            </a:br>
+            <a:r>
+              <a:rPr lang="en-US" dirty="0"/>
+              <a:t>Every method follows the same protocol: catalyst loaded once, the same five screening runs, then one allowed step per run, 25 runs, 10 campaigns. Because the reactor is simulated, we know the true best, and we score every method against it.</a:t>
+            </a:r>
+            <a:endParaRPr dirty="0"/>
           </a:p>
         </p:txBody>
       </p:sp>
@@ -2494,7 +2559,7 @@
             <a:spLocks noGrp="1"/>
           </p:cNvSpPr>
           <p:nvPr>
-            <p:ph type="sldNum" idx="5" sz="quarter"/>
+            <p:ph type="sldNum" sz="quarter" idx="5"/>
           </p:nvPr>
         </p:nvSpPr>
         <p:spPr/>
@@ -2508,7 +2573,7 @@
 </file>
 
 <file path=ppt/notesSlides/notesSlide6.xml><?xml version="1.0" encoding="utf-8"?>
-<p:notes xmlns:a="http://schemas.openxmlformats.org/drawingml/2006/main" xmlns:p="http://schemas.openxmlformats.org/presentationml/2006/main" xmlns:r="http://schemas.openxmlformats.org/officeDocument/2006/relationships">
+<p:notes xmlns:a="http://schemas.openxmlformats.org/drawingml/2006/main" xmlns:r="http://schemas.openxmlformats.org/officeDocument/2006/relationships" xmlns:p="http://schemas.openxmlformats.org/presentationml/2006/main">
   <p:cSld>
     <p:spTree>
       <p:nvGrpSpPr>
@@ -2528,7 +2593,7 @@
         <p:nvSpPr>
           <p:cNvPr id="2" name="Slide Image Placeholder 1"/>
           <p:cNvSpPr>
-            <a:spLocks noGrp="1"/>
+            <a:spLocks noGrp="1" noRot="1" noChangeAspect="1"/>
           </p:cNvSpPr>
           <p:nvPr>
             <p:ph type="sldImg" idx="2"/>
@@ -2543,7 +2608,7 @@
             <a:spLocks noGrp="1"/>
           </p:cNvSpPr>
           <p:nvPr>
-            <p:ph type="body" idx="3" sz="quarter"/>
+            <p:ph type="body" sz="quarter" idx="3"/>
           </p:nvPr>
         </p:nvSpPr>
         <p:spPr/>
@@ -2552,8 +2617,18 @@
           <a:lstStyle/>
           <a:p>
             <a:r>
-              <a:t>The advisor's loop has five steps. One: fit the chemistry — find the reaction speeds that explain every GC number, starting simple and adding product inhibition or catalyst ageing only when the data justify it. Two: keep several chemistries that fit about equally well, not one lucky fit. Three: plan — predict profit everywhere and find the best spot and how many allowed steps away it is. Four: a flexible statistical model learns whatever the textbook still gets wrong, and it is told how noisy the instrument is, so it never chases noise. Five: decide — look a few runs ahead and score each allowed path by the profit earned on the way plus what the best point found is worth for the runs left. The split is the key idea: physics we know is typed in, what we do not know is learned from your runs. Steps one and five are this month's upgrade. Sumant will show how it performed.</a:t>
-            </a:r>
+              <a:rPr lang="en-US" dirty="0"/>
+              <a:t>"The advisor runs a five-step loop after every run. One, fit the chemistry. It finds the reaction speeds that best explain every number on the GC. It starts simple, and adds 'the product slows the reaction' or 'the catalyst is ageing' only when the data clearly justify it. Two, keep alternatives. Several versions of the chemistry fit about equally well, so it keeps them all instead of trusting one lucky fit. Three, plan. Using the physics, it predicts profit everywhere in the operating range, finds the best settings, and works out how many allowed steps away they are. Four, correct. A statistical model, a Gaussian process, learns whatever the textbook still gets wrong, and it knows how noisy the GC is, so it never chases noise. Five, decide. It looks up to four runs ahead and picks the next step that earns the most over the runs you have left. The key idea: the physics we know is typed in, and what we don't know is learned from your runs. We compare it against the rules of thumb, plain Bayesian </a:t>
+            </a:r>
+            <a:r>
+              <a:rPr lang="en-US" dirty="0" err="1"/>
+              <a:t>optimisation</a:t>
+            </a:r>
+            <a:r>
+              <a:rPr lang="en-US" dirty="0"/>
+              <a:t> and a random walk, all under the same limits. Sumant will now show how it performed.</a:t>
+            </a:r>
+            <a:endParaRPr dirty="0"/>
           </a:p>
         </p:txBody>
       </p:sp>
@@ -2564,7 +2639,7 @@
             <a:spLocks noGrp="1"/>
           </p:cNvSpPr>
           <p:nvPr>
-            <p:ph type="sldNum" idx="5" sz="quarter"/>
+            <p:ph type="sldNum" sz="quarter" idx="5"/>
           </p:nvPr>
         </p:nvSpPr>
         <p:spPr/>
@@ -2578,7 +2653,7 @@
 </file>
 
 <file path=ppt/notesSlides/notesSlide7.xml><?xml version="1.0" encoding="utf-8"?>
-<p:notes xmlns:a="http://schemas.openxmlformats.org/drawingml/2006/main" xmlns:p="http://schemas.openxmlformats.org/presentationml/2006/main" xmlns:r="http://schemas.openxmlformats.org/officeDocument/2006/relationships">
+<p:notes xmlns:a="http://schemas.openxmlformats.org/drawingml/2006/main" xmlns:r="http://schemas.openxmlformats.org/officeDocument/2006/relationships" xmlns:p="http://schemas.openxmlformats.org/presentationml/2006/main">
   <p:cSld>
     <p:spTree>
       <p:nvGrpSpPr>
@@ -2598,7 +2673,7 @@
         <p:nvSpPr>
           <p:cNvPr id="2" name="Slide Image Placeholder 1"/>
           <p:cNvSpPr>
-            <a:spLocks noGrp="1"/>
+            <a:spLocks noGrp="1" noRot="1" noChangeAspect="1"/>
           </p:cNvSpPr>
           <p:nvPr>
             <p:ph type="sldImg" idx="2"/>
@@ -2613,7 +2688,7 @@
             <a:spLocks noGrp="1"/>
           </p:cNvSpPr>
           <p:nvPr>
-            <p:ph type="body" idx="3" sz="quarter"/>
+            <p:ph type="body" sz="quarter" idx="3"/>
           </p:nvPr>
         </p:nvSpPr>
         <p:spPr/>
@@ -2622,7 +2697,38 @@
           <a:lstStyle/>
           <a:p>
             <a:r>
-              <a:t>Here is the head-to-head, from the previous version of the advisor; the new planner's benchmark has just finished; first look on the next slide. Grey band: the five screening runs, identical for everyone. From run six each method chooses. The advisor, in orange, reaches ninety per cent of the best possible profit in a median of nine to ten runs. The rules of thumb, in green, need twenty-one runs on the simple chemistry and do not get there within twenty-five on the complex one. Plain Bayesian optimisation, in blue, sees only one profit number per run and cannot plan beyond one step, so it falls far behind. After ten and fifteen runs the advisor wins ten out of ten paired campaigns. To be fair: the rules get there too — after twenty-five runs they tie on the simple chemistry; the advisor's value is speed. And in the pink stress test we told the advisor an incomplete chemistry — one reaction left out, as a user might. Slower, but it still ends at ninety-nine per cent, because the statistical correction learns what it was not told.</a:t>
+              <a:rPr dirty="0"/>
+              <a:t>Here is the head-to-head, from the previous version of the advisor; the new planner's benchmark has just finished; first look on the next slide. </a:t>
+            </a:r>
+            <a:br>
+              <a:rPr lang="en-IN" dirty="0"/>
+            </a:br>
+            <a:r>
+              <a:rPr dirty="0"/>
+              <a:t>Grey band: the five screening runs, identical for everyone. From run six each method chooses. </a:t>
+            </a:r>
+            <a:br>
+              <a:rPr lang="en-IN" dirty="0"/>
+            </a:br>
+            <a:r>
+              <a:rPr dirty="0"/>
+              <a:t>The advisor, in orange, reaches </a:t>
+            </a:r>
+            <a:r>
+              <a:rPr lang="en-US" dirty="0"/>
+              <a:t>90% of the best possible profit in a median of 9 to 10</a:t>
+            </a:r>
+            <a:r>
+              <a:rPr dirty="0"/>
+              <a:t> runs. The rules of thumb, in green, need twenty-one runs on the simple chemistry and do not get there within twenty-five on the complex one. Plain Bayesian </a:t>
+            </a:r>
+            <a:r>
+              <a:rPr dirty="0" err="1"/>
+              <a:t>optimisation</a:t>
+            </a:r>
+            <a:r>
+              <a:rPr dirty="0"/>
+              <a:t>, in blue, sees only one profit number per run and cannot plan beyond one step, so it falls far behind. After ten and fifteen runs the advisor wins ten out of ten paired campaigns. To be fair: the rules get there too — after twenty-five runs they tie on the simple chemistry; the advisor's value is speed. And in the pink stress test we told the advisor an incomplete chemistry — one reaction left out, as a user might. Slower, but it still ends at ninety-nine per cent, because the statistical correction learns what it was not told.</a:t>
             </a:r>
           </a:p>
         </p:txBody>
@@ -2634,7 +2740,7 @@
             <a:spLocks noGrp="1"/>
           </p:cNvSpPr>
           <p:nvPr>
-            <p:ph type="sldNum" idx="5" sz="quarter"/>
+            <p:ph type="sldNum" sz="quarter" idx="5"/>
           </p:nvPr>
         </p:nvSpPr>
         <p:spPr/>
@@ -2648,7 +2754,7 @@
 </file>
 
 <file path=ppt/notesSlides/notesSlide8.xml><?xml version="1.0" encoding="utf-8"?>
-<p:notes xmlns:a="http://schemas.openxmlformats.org/drawingml/2006/main" xmlns:p="http://schemas.openxmlformats.org/presentationml/2006/main" xmlns:r="http://schemas.openxmlformats.org/officeDocument/2006/relationships">
+<p:notes xmlns:a="http://schemas.openxmlformats.org/drawingml/2006/main" xmlns:r="http://schemas.openxmlformats.org/officeDocument/2006/relationships" xmlns:p="http://schemas.openxmlformats.org/presentationml/2006/main">
   <p:cSld>
     <p:spTree>
       <p:nvGrpSpPr>
@@ -2668,7 +2774,7 @@
         <p:nvSpPr>
           <p:cNvPr id="2" name="Slide Image Placeholder 1"/>
           <p:cNvSpPr>
-            <a:spLocks noGrp="1"/>
+            <a:spLocks noGrp="1" noRot="1" noChangeAspect="1"/>
           </p:cNvSpPr>
           <p:nvPr>
             <p:ph type="sldImg" idx="2"/>
@@ -2683,7 +2789,7 @@
             <a:spLocks noGrp="1"/>
           </p:cNvSpPr>
           <p:nvPr>
-            <p:ph type="body" idx="3" sz="quarter"/>
+            <p:ph type="body" sz="quarter" idx="3"/>
           </p:nvPr>
         </p:nvSpPr>
         <p:spPr/>
@@ -2692,7 +2798,32 @@
           <a:lstStyle/>
           <a:p>
             <a:r>
-              <a:t>The advisor does not just find an optimum, it learns the chemistry. Dashed is what it learned from fifteen runs, solid is the truth it never saw. How strongly each reaction speeds up with heat comes out in the right order, and that order decides the best temperature. This month's upgrade made the learning honest: product inhibition and catalyst ageing are only added when the data support them, and the new planner counts the runs you have left. The benchmark that just finished shows it ending at the best point and earning more on the way; on an ageing catalyst it earns more than before, but ageing is detected and reported, not solved. We are honest about the limits: all kinetics and prices are placeholders, the reactor is simulated, and the advisor needs to be told which reactions happen. Parva, what this means for the operator.</a:t>
+              <a:rPr dirty="0"/>
+              <a:t>The advisor does not just find an optimum, it learns the chemistry. Dashed is what it learned from fifteen runs, solid is the truth it never saw. How strongly each reaction speeds up with heat comes out in the right order, and that order decides the best temperature. </a:t>
+            </a:r>
+            <a:r>
+              <a:rPr lang="en-IN" dirty="0"/>
+              <a:t>We want to </a:t>
+            </a:r>
+            <a:r>
+              <a:rPr dirty="0"/>
+              <a:t>ma</a:t>
+            </a:r>
+            <a:r>
+              <a:rPr lang="en-IN" dirty="0"/>
+              <a:t>k</a:t>
+            </a:r>
+            <a:r>
+              <a:rPr dirty="0"/>
+              <a:t>e the learning honest: product inhibition and catalyst ageing are only added when the data support them, and the new planner counts the runs you have left. The benchmark</a:t>
+            </a:r>
+            <a:r>
+              <a:rPr lang="en-IN" dirty="0"/>
+              <a:t> </a:t>
+            </a:r>
+            <a:r>
+              <a:rPr dirty="0"/>
+              <a:t>shows it ending at the best point and earning more on the way; on an ageing catalyst it earns more than before, but ageing is detected and reported, not solved. We are honest about the limits: all kinetics and prices are placeholders, the reactor is simulated, and the advisor needs to be told which reactions happen. </a:t>
             </a:r>
           </a:p>
         </p:txBody>
@@ -2704,7 +2835,7 @@
             <a:spLocks noGrp="1"/>
           </p:cNvSpPr>
           <p:nvPr>
-            <p:ph type="sldNum" idx="5" sz="quarter"/>
+            <p:ph type="sldNum" sz="quarter" idx="5"/>
           </p:nvPr>
         </p:nvSpPr>
         <p:spPr/>
@@ -2718,7 +2849,7 @@
 </file>
 
 <file path=ppt/notesSlides/notesSlide9.xml><?xml version="1.0" encoding="utf-8"?>
-<p:notes xmlns:a="http://schemas.openxmlformats.org/drawingml/2006/main" xmlns:p="http://schemas.openxmlformats.org/presentationml/2006/main" xmlns:r="http://schemas.openxmlformats.org/officeDocument/2006/relationships">
+<p:notes xmlns:a="http://schemas.openxmlformats.org/drawingml/2006/main" xmlns:r="http://schemas.openxmlformats.org/officeDocument/2006/relationships" xmlns:p="http://schemas.openxmlformats.org/presentationml/2006/main">
   <p:cSld>
     <p:spTree>
       <p:nvGrpSpPr>
@@ -2738,7 +2869,7 @@
         <p:nvSpPr>
           <p:cNvPr id="2" name="Slide Image Placeholder 1"/>
           <p:cNvSpPr>
-            <a:spLocks noGrp="1"/>
+            <a:spLocks noGrp="1" noRot="1" noChangeAspect="1"/>
           </p:cNvSpPr>
           <p:nvPr>
             <p:ph type="sldImg" idx="2"/>
@@ -2753,7 +2884,7 @@
             <a:spLocks noGrp="1"/>
           </p:cNvSpPr>
           <p:nvPr>
-            <p:ph type="body" idx="3" sz="quarter"/>
+            <p:ph type="body" sz="quarter" idx="3"/>
           </p:nvPr>
         </p:nvSpPr>
         <p:spPr/>
@@ -2774,7 +2905,7 @@
             <a:spLocks noGrp="1"/>
           </p:cNvSpPr>
           <p:nvPr>
-            <p:ph type="sldNum" idx="5" sz="quarter"/>
+            <p:ph type="sldNum" sz="quarter" idx="5"/>
           </p:nvPr>
         </p:nvSpPr>
         <p:spPr/>
@@ -2950,7 +3081,7 @@
           <a:p>
             <a:fld id="{6A598CA1-C44E-CE41-9557-B037BAF6F6DA}" type="datetimeFigureOut">
               <a:rPr lang="en-AE" smtClean="0"/>
-              <a:t>12/10/2026</a:t>
+              <a:t>16/10/2026</a:t>
             </a:fld>
             <a:endParaRPr lang="en-AE"/>
           </a:p>
@@ -3210,7 +3341,7 @@
           <a:p>
             <a:fld id="{6A598CA1-C44E-CE41-9557-B037BAF6F6DA}" type="datetimeFigureOut">
               <a:rPr lang="en-AE" smtClean="0"/>
-              <a:t>12/10/2026</a:t>
+              <a:t>16/10/2026</a:t>
             </a:fld>
             <a:endParaRPr lang="en-AE"/>
           </a:p>
@@ -3444,7 +3575,7 @@
           <a:p>
             <a:fld id="{6A598CA1-C44E-CE41-9557-B037BAF6F6DA}" type="datetimeFigureOut">
               <a:rPr lang="en-AE" smtClean="0"/>
-              <a:t>12/10/2026</a:t>
+              <a:t>16/10/2026</a:t>
             </a:fld>
             <a:endParaRPr lang="en-AE"/>
           </a:p>
@@ -3610,7 +3741,7 @@
           <a:p>
             <a:fld id="{1663657D-8E22-4681-BD7E-16E8F6F56673}" type="datetimeFigureOut">
               <a:rPr lang="en-FI" smtClean="0"/>
-              <a:t>10/12/2026</a:t>
+              <a:t>10/16/2026</a:t>
             </a:fld>
             <a:endParaRPr lang="en-FI"/>
           </a:p>
@@ -3897,7 +4028,7 @@
           <a:p>
             <a:fld id="{6A598CA1-C44E-CE41-9557-B037BAF6F6DA}" type="datetimeFigureOut">
               <a:rPr lang="en-AE" smtClean="0"/>
-              <a:t>12/10/2026</a:t>
+              <a:t>16/10/2026</a:t>
             </a:fld>
             <a:endParaRPr lang="en-AE"/>
           </a:p>
@@ -4197,7 +4328,7 @@
           <a:p>
             <a:fld id="{6A598CA1-C44E-CE41-9557-B037BAF6F6DA}" type="datetimeFigureOut">
               <a:rPr lang="en-AE" smtClean="0"/>
-              <a:t>12/10/2026</a:t>
+              <a:t>16/10/2026</a:t>
             </a:fld>
             <a:endParaRPr lang="en-AE"/>
           </a:p>
@@ -4489,7 +4620,7 @@
           <a:p>
             <a:fld id="{6A598CA1-C44E-CE41-9557-B037BAF6F6DA}" type="datetimeFigureOut">
               <a:rPr lang="en-AE" smtClean="0"/>
-              <a:t>12/10/2026</a:t>
+              <a:t>16/10/2026</a:t>
             </a:fld>
             <a:endParaRPr lang="en-AE"/>
           </a:p>
@@ -4928,7 +5059,7 @@
           <a:p>
             <a:fld id="{6A598CA1-C44E-CE41-9557-B037BAF6F6DA}" type="datetimeFigureOut">
               <a:rPr lang="en-AE" smtClean="0"/>
-              <a:t>12/10/2026</a:t>
+              <a:t>16/10/2026</a:t>
             </a:fld>
             <a:endParaRPr lang="en-AE"/>
           </a:p>
@@ -5065,7 +5196,7 @@
           <a:p>
             <a:fld id="{6A598CA1-C44E-CE41-9557-B037BAF6F6DA}" type="datetimeFigureOut">
               <a:rPr lang="en-AE" smtClean="0"/>
-              <a:t>12/10/2026</a:t>
+              <a:t>16/10/2026</a:t>
             </a:fld>
             <a:endParaRPr lang="en-AE"/>
           </a:p>
@@ -5596,7 +5727,7 @@
           <a:p>
             <a:fld id="{6A598CA1-C44E-CE41-9557-B037BAF6F6DA}" type="datetimeFigureOut">
               <a:rPr lang="en-AE" smtClean="0"/>
-              <a:t>12/10/2026</a:t>
+              <a:t>16/10/2026</a:t>
             </a:fld>
             <a:endParaRPr lang="en-AE"/>
           </a:p>
@@ -5909,7 +6040,7 @@
           <a:p>
             <a:fld id="{6A598CA1-C44E-CE41-9557-B037BAF6F6DA}" type="datetimeFigureOut">
               <a:rPr lang="en-AE" smtClean="0"/>
-              <a:t>12/10/2026</a:t>
+              <a:t>16/10/2026</a:t>
             </a:fld>
             <a:endParaRPr lang="en-AE"/>
           </a:p>
@@ -6168,7 +6299,7 @@
           <a:p>
             <a:fld id="{6A598CA1-C44E-CE41-9557-B037BAF6F6DA}" type="datetimeFigureOut">
               <a:rPr lang="en-AE" smtClean="0"/>
-              <a:t>12/10/2026</a:t>
+              <a:t>16/10/2026</a:t>
             </a:fld>
             <a:endParaRPr lang="en-AE"/>
           </a:p>
@@ -6570,7 +6701,7 @@
 </file>
 
 <file path=ppt/slides/slide1.xml><?xml version="1.0" encoding="utf-8"?>
-<p:sld xmlns:a="http://schemas.openxmlformats.org/drawingml/2006/main" xmlns:p="http://schemas.openxmlformats.org/presentationml/2006/main" xmlns:r="http://schemas.openxmlformats.org/officeDocument/2006/relationships">
+<p:sld xmlns:a="http://schemas.openxmlformats.org/drawingml/2006/main" xmlns:r="http://schemas.openxmlformats.org/officeDocument/2006/relationships" xmlns:p="http://schemas.openxmlformats.org/presentationml/2006/main">
   <p:cSld>
     <p:spTree>
       <p:nvGrpSpPr>
@@ -6578,7 +6709,14 @@
         <p:cNvGrpSpPr/>
         <p:nvPr/>
       </p:nvGrpSpPr>
-      <p:grpSpPr/>
+      <p:grpSpPr>
+        <a:xfrm>
+          <a:off x="0" y="0"/>
+          <a:ext cx="0" cy="0"/>
+          <a:chOff x="0" y="0"/>
+          <a:chExt cx="0" cy="0"/>
+        </a:xfrm>
+      </p:grpSpPr>
       <p:sp>
         <p:nvSpPr>
           <p:cNvPr id="2" name="Title 1"/>
@@ -6632,73 +6770,103 @@
               </a:spcBef>
             </a:pPr>
             <a:r>
-              <a:rPr sz="1900" b="0" i="1">
+              <a:rPr sz="1900" b="0" i="1" dirty="0">
                 <a:solidFill>
                   <a:srgbClr val="555555"/>
                 </a:solidFill>
                 <a:latin typeface="Arial"/>
               </a:rPr>
-              <a:t>Fewer experiments to the best operating point — for someone who is not a specialist</a:t>
+              <a:t>Fewer experiments to the best operating point </a:t>
+            </a:r>
+            <a:r>
+              <a:rPr lang="en-IN" sz="1900" b="0" i="1" dirty="0">
+                <a:solidFill>
+                  <a:srgbClr val="555555"/>
+                </a:solidFill>
+                <a:latin typeface="Arial"/>
+              </a:rPr>
+              <a:t>-</a:t>
+            </a:r>
+            <a:r>
+              <a:rPr sz="1900" b="0" i="1" dirty="0">
+                <a:solidFill>
+                  <a:srgbClr val="555555"/>
+                </a:solidFill>
+                <a:latin typeface="Arial"/>
+              </a:rPr>
+              <a:t> for someone who is not a specialist</a:t>
             </a:r>
           </a:p>
           <a:p>
             <a:pPr algn="ctr"/>
-            <a:r>
-              <a:rPr sz="1000" b="0" i="0">
+            <a:endParaRPr sz="1900" b="0" i="1" dirty="0">
+              <a:solidFill>
+                <a:srgbClr val="555555"/>
+              </a:solidFill>
+              <a:latin typeface="Arial"/>
+            </a:endParaRPr>
+          </a:p>
+          <a:p>
+            <a:pPr algn="ctr"/>
+            <a:r>
+              <a:rPr sz="2200" b="1" i="0" dirty="0">
                 <a:solidFill>
                   <a:srgbClr val="222222"/>
                 </a:solidFill>
                 <a:latin typeface="Arial"/>
               </a:rPr>
-              <a:t/>
+              <a:t>Sumant Varanasi  ·  Parva Chaudhary</a:t>
             </a:r>
           </a:p>
           <a:p>
             <a:pPr algn="ctr"/>
             <a:r>
-              <a:rPr sz="2200" b="1" i="0">
-                <a:solidFill>
-                  <a:srgbClr val="222222"/>
-                </a:solidFill>
-                <a:latin typeface="Arial"/>
-              </a:rPr>
-              <a:t>Sumant Varanasi  ·  Parva Chaudhary</a:t>
+              <a:rPr sz="1600" b="0" i="0" dirty="0">
+                <a:solidFill>
+                  <a:srgbClr val="555555"/>
+                </a:solidFill>
+                <a:latin typeface="Arial"/>
+              </a:rPr>
+              <a:t>Supervisors: Prof. Rachit Khare  ·  Prof. Rahul Singh</a:t>
             </a:r>
           </a:p>
           <a:p>
             <a:pPr algn="ctr"/>
-            <a:r>
-              <a:rPr sz="1600" b="0" i="0">
-                <a:solidFill>
-                  <a:srgbClr val="555555"/>
-                </a:solidFill>
-                <a:latin typeface="Arial"/>
-              </a:rPr>
-              <a:t>Supervisors: Prof. Rachit Khare  ·  Prof. Rahul Singh</a:t>
-            </a:r>
+            <a:endParaRPr sz="1600" b="0" i="0" dirty="0">
+              <a:solidFill>
+                <a:srgbClr val="555555"/>
+              </a:solidFill>
+              <a:latin typeface="Arial"/>
+            </a:endParaRPr>
           </a:p>
           <a:p>
             <a:pPr algn="ctr"/>
             <a:r>
-              <a:rPr sz="800" b="0" i="0">
-                <a:solidFill>
-                  <a:srgbClr val="222222"/>
-                </a:solidFill>
-                <a:latin typeface="Arial"/>
-              </a:rPr>
-              <a:t/>
-            </a:r>
-          </a:p>
-          <a:p>
-            <a:pPr algn="ctr"/>
-            <a:r>
-              <a:rPr sz="1300" b="0" i="0">
+              <a:rPr sz="1300" b="0" i="0" dirty="0">
                 <a:solidFill>
                   <a:srgbClr val="808080"/>
                 </a:solidFill>
                 <a:latin typeface="Arial"/>
               </a:rPr>
-              <a:t>ACOD310 mid-term presentation  ·  Semester 1, 2026–27  ·  17 October 2026</a:t>
+              <a:t>ACOD310 mid-term presentation  ·  Semester 1, 2026–27  ·  1</a:t>
+            </a:r>
+            <a:r>
+              <a:rPr lang="en-IN" sz="1300" b="0" i="0" dirty="0">
+                <a:solidFill>
+                  <a:srgbClr val="808080"/>
+                </a:solidFill>
+                <a:latin typeface="Arial"/>
+              </a:rPr>
+              <a:t>6</a:t>
+            </a:r>
+            <a:r>
+              <a:rPr sz="1300" b="0" i="0" dirty="0">
+                <a:solidFill>
+                  <a:srgbClr val="808080"/>
+                </a:solidFill>
+                <a:latin typeface="Arial"/>
+              </a:rPr>
+              <a:t> October 2026</a:t>
             </a:r>
           </a:p>
         </p:txBody>
@@ -6712,7 +6880,7 @@
 </file>
 
 <file path=ppt/slides/slide10.xml><?xml version="1.0" encoding="utf-8"?>
-<p:sld xmlns:a="http://schemas.openxmlformats.org/drawingml/2006/main" xmlns:p="http://schemas.openxmlformats.org/presentationml/2006/main" xmlns:r="http://schemas.openxmlformats.org/officeDocument/2006/relationships">
+<p:sld xmlns:a="http://schemas.openxmlformats.org/drawingml/2006/main" xmlns:r="http://schemas.openxmlformats.org/officeDocument/2006/relationships" xmlns:p="http://schemas.openxmlformats.org/presentationml/2006/main">
   <p:cSld>
     <p:spTree>
       <p:nvGrpSpPr>
@@ -6720,7 +6888,14 @@
         <p:cNvGrpSpPr/>
         <p:nvPr/>
       </p:nvGrpSpPr>
-      <p:grpSpPr/>
+      <p:grpSpPr>
+        <a:xfrm>
+          <a:off x="0" y="0"/>
+          <a:ext cx="0" cy="0"/>
+          <a:chOff x="0" y="0"/>
+          <a:chExt cx="0" cy="0"/>
+        </a:xfrm>
+      </p:grpSpPr>
       <p:sp>
         <p:nvSpPr>
           <p:cNvPr id="2" name="Title 1"/>
@@ -6738,7 +6913,7 @@
           </a:xfrm>
         </p:spPr>
         <p:txBody>
-          <a:bodyPr anchor="ctr" lIns="45720"/>
+          <a:bodyPr lIns="45720" anchor="ctr"/>
           <a:lstStyle/>
           <a:p>
             <a:pPr algn="l"/>
@@ -6771,7 +6946,7 @@
           <a:noFill/>
         </p:spPr>
         <p:txBody>
-          <a:bodyPr wrap="square" lIns="45720" rIns="45720" tIns="27432" bIns="27432" anchor="t"/>
+          <a:bodyPr wrap="square" lIns="45720" tIns="27432" rIns="45720" bIns="27432" anchor="t"/>
           <a:lstStyle/>
           <a:p>
             <a:pPr algn="l">
@@ -6846,7 +7021,7 @@
           <a:noFill/>
         </p:spPr>
         <p:txBody>
-          <a:bodyPr wrap="square" lIns="45720" rIns="45720" tIns="27432" bIns="27432" anchor="t"/>
+          <a:bodyPr wrap="square" lIns="45720" tIns="27432" rIns="45720" bIns="27432" anchor="t"/>
           <a:lstStyle/>
           <a:p>
             <a:pPr algn="l">
@@ -6858,13 +7033,31 @@
               </a:spcAft>
             </a:pPr>
             <a:r>
-              <a:rPr sz="850" b="0" i="0">
+              <a:rPr sz="850" b="0" i="0" dirty="0">
                 <a:solidFill>
                   <a:srgbClr val="808080"/>
                 </a:solidFill>
                 <a:latin typeface="Arial"/>
               </a:rPr>
-              <a:t>ACOD310 mid-term  ·  17 October 2026  ·  Sumant Varanasi &amp; Parva Chaudhary</a:t>
+              <a:t>ACOD310 mid-term  ·  1</a:t>
+            </a:r>
+            <a:r>
+              <a:rPr lang="en-IN" sz="850" b="0" i="0" dirty="0">
+                <a:solidFill>
+                  <a:srgbClr val="808080"/>
+                </a:solidFill>
+                <a:latin typeface="Arial"/>
+              </a:rPr>
+              <a:t>6</a:t>
+            </a:r>
+            <a:r>
+              <a:rPr sz="850" b="0" i="0" dirty="0">
+                <a:solidFill>
+                  <a:srgbClr val="808080"/>
+                </a:solidFill>
+                <a:latin typeface="Arial"/>
+              </a:rPr>
+              <a:t> October 2026  ·  Sumant Varanasi &amp; Parva Chaudhary</a:t>
             </a:r>
           </a:p>
         </p:txBody>
@@ -6886,7 +7079,7 @@
           <a:noFill/>
         </p:spPr>
         <p:txBody>
-          <a:bodyPr wrap="square" lIns="45720" rIns="45720" tIns="27432" bIns="27432" anchor="t"/>
+          <a:bodyPr wrap="square" lIns="45720" tIns="27432" rIns="45720" bIns="27432" anchor="t"/>
           <a:lstStyle/>
           <a:p>
             <a:pPr algn="r">
@@ -6950,7 +7143,9 @@
         <p:txBody>
           <a:bodyPr rtlCol="0" anchor="ctr"/>
           <a:lstStyle/>
-          <a:p/>
+          <a:p>
+            <a:endParaRPr/>
+          </a:p>
         </p:txBody>
       </p:sp>
       <p:sp>
@@ -6970,7 +7165,7 @@
           <a:noFill/>
         </p:spPr>
         <p:txBody>
-          <a:bodyPr wrap="square" lIns="45720" rIns="45720" tIns="27432" bIns="27432" anchor="t"/>
+          <a:bodyPr wrap="square" lIns="45720" tIns="27432" rIns="45720" bIns="27432" anchor="t"/>
           <a:lstStyle/>
           <a:p>
             <a:pPr algn="l">
@@ -6981,15 +7176,12 @@
                 <a:spcPts val="300"/>
               </a:spcAft>
             </a:pPr>
-            <a:r>
-              <a:rPr sz="900" b="1" i="0">
-                <a:solidFill>
-                  <a:srgbClr val="8B2327"/>
-                </a:solidFill>
-                <a:latin typeface="Arial"/>
-              </a:rPr>
-              <a:t>SEPT</a:t>
-            </a:r>
+            <a:endParaRPr sz="900" b="1" i="0" dirty="0">
+              <a:solidFill>
+                <a:srgbClr val="8B2327"/>
+              </a:solidFill>
+              <a:latin typeface="Arial"/>
+            </a:endParaRPr>
           </a:p>
         </p:txBody>
       </p:sp>
@@ -7010,7 +7202,7 @@
           <a:noFill/>
         </p:spPr>
         <p:txBody>
-          <a:bodyPr wrap="square" lIns="45720" rIns="45720" tIns="27432" bIns="27432" anchor="t"/>
+          <a:bodyPr wrap="square" lIns="45720" tIns="27432" rIns="45720" bIns="27432" anchor="t"/>
           <a:lstStyle/>
           <a:p>
             <a:pPr algn="l">
@@ -7050,7 +7242,7 @@
           <a:noFill/>
         </p:spPr>
         <p:txBody>
-          <a:bodyPr wrap="square" lIns="45720" rIns="45720" tIns="27432" bIns="27432" anchor="t"/>
+          <a:bodyPr wrap="square" lIns="45720" tIns="27432" rIns="45720" bIns="27432" anchor="t"/>
           <a:lstStyle/>
           <a:p>
             <a:pPr algn="l">
@@ -7114,6 +7306,7 @@
           <a:lstStyle/>
           <a:p>
             <a:pPr algn="ctr"/>
+            <a:endParaRPr/>
           </a:p>
         </p:txBody>
       </p:sp>
@@ -7158,7 +7351,9 @@
         <p:txBody>
           <a:bodyPr rtlCol="0" anchor="ctr"/>
           <a:lstStyle/>
-          <a:p/>
+          <a:p>
+            <a:endParaRPr/>
+          </a:p>
         </p:txBody>
       </p:sp>
       <p:sp>
@@ -7178,7 +7373,7 @@
           <a:noFill/>
         </p:spPr>
         <p:txBody>
-          <a:bodyPr wrap="square" lIns="45720" rIns="45720" tIns="27432" bIns="27432" anchor="t"/>
+          <a:bodyPr wrap="square" lIns="45720" tIns="27432" rIns="45720" bIns="27432" anchor="t"/>
           <a:lstStyle/>
           <a:p>
             <a:pPr algn="l">
@@ -7189,15 +7384,12 @@
                 <a:spcPts val="300"/>
               </a:spcAft>
             </a:pPr>
-            <a:r>
-              <a:rPr sz="900" b="1" i="0">
-                <a:solidFill>
-                  <a:srgbClr val="8B2327"/>
-                </a:solidFill>
-                <a:latin typeface="Arial"/>
-              </a:rPr>
-              <a:t>EARLY OCT</a:t>
-            </a:r>
+            <a:endParaRPr sz="900" b="1" i="0" dirty="0">
+              <a:solidFill>
+                <a:srgbClr val="8B2327"/>
+              </a:solidFill>
+              <a:latin typeface="Arial"/>
+            </a:endParaRPr>
           </a:p>
         </p:txBody>
       </p:sp>
@@ -7218,7 +7410,7 @@
           <a:noFill/>
         </p:spPr>
         <p:txBody>
-          <a:bodyPr wrap="square" lIns="45720" rIns="45720" tIns="27432" bIns="27432" anchor="t"/>
+          <a:bodyPr wrap="square" lIns="45720" tIns="27432" rIns="45720" bIns="27432" anchor="t"/>
           <a:lstStyle/>
           <a:p>
             <a:pPr algn="l">
@@ -7258,7 +7450,7 @@
           <a:noFill/>
         </p:spPr>
         <p:txBody>
-          <a:bodyPr wrap="square" lIns="45720" rIns="45720" tIns="27432" bIns="27432" anchor="t"/>
+          <a:bodyPr wrap="square" lIns="45720" tIns="27432" rIns="45720" bIns="27432" anchor="t"/>
           <a:lstStyle/>
           <a:p>
             <a:pPr algn="l">
@@ -7322,6 +7514,7 @@
           <a:lstStyle/>
           <a:p>
             <a:pPr algn="ctr"/>
+            <a:endParaRPr/>
           </a:p>
         </p:txBody>
       </p:sp>
@@ -7366,7 +7559,9 @@
         <p:txBody>
           <a:bodyPr rtlCol="0" anchor="ctr"/>
           <a:lstStyle/>
-          <a:p/>
+          <a:p>
+            <a:endParaRPr/>
+          </a:p>
         </p:txBody>
       </p:sp>
       <p:sp>
@@ -7386,7 +7581,7 @@
           <a:noFill/>
         </p:spPr>
         <p:txBody>
-          <a:bodyPr wrap="square" lIns="45720" rIns="45720" tIns="27432" bIns="27432" anchor="t"/>
+          <a:bodyPr wrap="square" lIns="45720" tIns="27432" rIns="45720" bIns="27432" anchor="t"/>
           <a:lstStyle/>
           <a:p>
             <a:pPr algn="l">
@@ -7397,15 +7592,12 @@
                 <a:spcPts val="300"/>
               </a:spcAft>
             </a:pPr>
-            <a:r>
-              <a:rPr sz="900" b="1" i="0">
-                <a:solidFill>
-                  <a:srgbClr val="8B2327"/>
-                </a:solidFill>
-                <a:latin typeface="Arial"/>
-              </a:rPr>
-              <a:t>MID OCT</a:t>
-            </a:r>
+            <a:endParaRPr sz="900" b="1" i="0" dirty="0">
+              <a:solidFill>
+                <a:srgbClr val="8B2327"/>
+              </a:solidFill>
+              <a:latin typeface="Arial"/>
+            </a:endParaRPr>
           </a:p>
         </p:txBody>
       </p:sp>
@@ -7426,7 +7618,7 @@
           <a:noFill/>
         </p:spPr>
         <p:txBody>
-          <a:bodyPr wrap="square" lIns="45720" rIns="45720" tIns="27432" bIns="27432" anchor="t"/>
+          <a:bodyPr wrap="square" lIns="45720" tIns="27432" rIns="45720" bIns="27432" anchor="t"/>
           <a:lstStyle/>
           <a:p>
             <a:pPr algn="l">
@@ -7466,7 +7658,7 @@
           <a:noFill/>
         </p:spPr>
         <p:txBody>
-          <a:bodyPr wrap="square" lIns="45720" rIns="45720" tIns="27432" bIns="27432" anchor="t"/>
+          <a:bodyPr wrap="square" lIns="45720" tIns="27432" rIns="45720" bIns="27432" anchor="t"/>
           <a:lstStyle/>
           <a:p>
             <a:pPr algn="l">
@@ -7530,6 +7722,7 @@
           <a:lstStyle/>
           <a:p>
             <a:pPr algn="ctr"/>
+            <a:endParaRPr/>
           </a:p>
         </p:txBody>
       </p:sp>
@@ -7574,19 +7767,21 @@
         <p:txBody>
           <a:bodyPr rtlCol="0" anchor="ctr"/>
           <a:lstStyle/>
-          <a:p/>
-        </p:txBody>
-      </p:sp>
-      <p:sp>
-        <p:nvSpPr>
-          <p:cNvPr id="23" name="TextBox 22"/>
+          <a:p>
+            <a:endParaRPr/>
+          </a:p>
+        </p:txBody>
+      </p:sp>
+      <p:sp>
+        <p:nvSpPr>
+          <p:cNvPr id="24" name="TextBox 23"/>
           <p:cNvSpPr txBox="1"/>
           <p:nvPr/>
         </p:nvSpPr>
         <p:spPr>
           <a:xfrm>
-            <a:off x="9069933" y="1536192"/>
-            <a:ext cx="2523744" cy="274320"/>
+            <a:off x="9069933" y="1783080"/>
+            <a:ext cx="2523744" cy="320040"/>
           </a:xfrm>
           <a:prstGeom prst="rect">
             <a:avLst/>
@@ -7594,7 +7789,7 @@
           <a:noFill/>
         </p:spPr>
         <p:txBody>
-          <a:bodyPr wrap="square" lIns="45720" rIns="45720" tIns="27432" bIns="27432" anchor="t"/>
+          <a:bodyPr wrap="square" lIns="45720" tIns="27432" rIns="45720" bIns="27432" anchor="t"/>
           <a:lstStyle/>
           <a:p>
             <a:pPr algn="l">
@@ -7606,27 +7801,27 @@
               </a:spcAft>
             </a:pPr>
             <a:r>
-              <a:rPr sz="900" b="1" i="0">
-                <a:solidFill>
-                  <a:srgbClr val="8B2327"/>
-                </a:solidFill>
-                <a:latin typeface="Arial"/>
-              </a:rPr>
-              <a:t>NOW</a:t>
-            </a:r>
-          </a:p>
-        </p:txBody>
-      </p:sp>
-      <p:sp>
-        <p:nvSpPr>
-          <p:cNvPr id="24" name="TextBox 23"/>
+              <a:rPr sz="1150" b="1" i="0" dirty="0">
+                <a:solidFill>
+                  <a:srgbClr val="222222"/>
+                </a:solidFill>
+                <a:latin typeface="Arial"/>
+              </a:rPr>
+              <a:t>v5  Learning upgrade</a:t>
+            </a:r>
+          </a:p>
+        </p:txBody>
+      </p:sp>
+      <p:sp>
+        <p:nvSpPr>
+          <p:cNvPr id="25" name="TextBox 24"/>
           <p:cNvSpPr txBox="1"/>
           <p:nvPr/>
         </p:nvSpPr>
         <p:spPr>
           <a:xfrm>
-            <a:off x="9069933" y="1783080"/>
-            <a:ext cx="2523744" cy="320040"/>
+            <a:off x="9069933" y="2084831"/>
+            <a:ext cx="2523744" cy="548640"/>
           </a:xfrm>
           <a:prstGeom prst="rect">
             <a:avLst/>
@@ -7634,7 +7829,201 @@
           <a:noFill/>
         </p:spPr>
         <p:txBody>
-          <a:bodyPr wrap="square" lIns="45720" rIns="45720" tIns="27432" bIns="27432" anchor="t"/>
+          <a:bodyPr wrap="square" lIns="45720" tIns="27432" rIns="45720" bIns="27432" anchor="t"/>
+          <a:lstStyle/>
+          <a:p>
+            <a:pPr algn="l">
+              <a:lnSpc>
+                <a:spcPct val="104000"/>
+              </a:lnSpc>
+              <a:spcAft>
+                <a:spcPts val="300"/>
+              </a:spcAft>
+            </a:pPr>
+            <a:r>
+              <a:rPr sz="950" b="0" i="0" dirty="0">
+                <a:solidFill>
+                  <a:srgbClr val="555555"/>
+                </a:solidFill>
+                <a:latin typeface="Arial"/>
+              </a:rPr>
+              <a:t>model ladder, campaign planner, specs, ageing </a:t>
+            </a:r>
+            <a:r>
+              <a:rPr lang="en-IN" sz="950" b="0" i="0" dirty="0">
+                <a:solidFill>
+                  <a:srgbClr val="555555"/>
+                </a:solidFill>
+                <a:latin typeface="Arial"/>
+              </a:rPr>
+              <a:t>-</a:t>
+            </a:r>
+            <a:r>
+              <a:rPr sz="950" b="0" i="0" dirty="0">
+                <a:solidFill>
+                  <a:srgbClr val="555555"/>
+                </a:solidFill>
+                <a:latin typeface="Arial"/>
+              </a:rPr>
+              <a:t> benchmark just finished</a:t>
+            </a:r>
+          </a:p>
+        </p:txBody>
+      </p:sp>
+      <p:sp>
+        <p:nvSpPr>
+          <p:cNvPr id="26" name="TextBox 25"/>
+          <p:cNvSpPr txBox="1"/>
+          <p:nvPr/>
+        </p:nvSpPr>
+        <p:spPr>
+          <a:xfrm>
+            <a:off x="365760" y="2697480"/>
+            <a:ext cx="11338560" cy="274320"/>
+          </a:xfrm>
+          <a:prstGeom prst="rect">
+            <a:avLst/>
+          </a:prstGeom>
+          <a:noFill/>
+        </p:spPr>
+        <p:txBody>
+          <a:bodyPr wrap="square" lIns="45720" tIns="27432" rIns="45720" bIns="27432" anchor="t"/>
+          <a:lstStyle/>
+          <a:p>
+            <a:pPr algn="ctr">
+              <a:lnSpc>
+                <a:spcPct val="108000"/>
+              </a:lnSpc>
+              <a:spcAft>
+                <a:spcPts val="300"/>
+              </a:spcAft>
+            </a:pPr>
+            <a:endParaRPr sz="1000" b="0" i="0" dirty="0">
+              <a:solidFill>
+                <a:srgbClr val="808080"/>
+              </a:solidFill>
+              <a:latin typeface="Arial"/>
+            </a:endParaRPr>
+          </a:p>
+        </p:txBody>
+      </p:sp>
+      <p:sp>
+        <p:nvSpPr>
+          <p:cNvPr id="27" name="Rounded Rectangle 26"/>
+          <p:cNvSpPr/>
+          <p:nvPr/>
+        </p:nvSpPr>
+        <p:spPr>
+          <a:xfrm>
+            <a:off x="365760" y="3108960"/>
+            <a:ext cx="2743428" cy="2194560"/>
+          </a:xfrm>
+          <a:prstGeom prst="roundRect">
+            <a:avLst>
+              <a:gd name="adj" fmla="val 8000"/>
+            </a:avLst>
+          </a:prstGeom>
+          <a:solidFill>
+            <a:srgbClr val="F8F1F1"/>
+          </a:solidFill>
+          <a:ln>
+            <a:noFill/>
+          </a:ln>
+          <a:effectLst/>
+        </p:spPr>
+        <p:style>
+          <a:lnRef idx="1">
+            <a:schemeClr val="accent1"/>
+          </a:lnRef>
+          <a:fillRef idx="3">
+            <a:schemeClr val="accent1"/>
+          </a:fillRef>
+          <a:effectRef idx="2">
+            <a:schemeClr val="accent1"/>
+          </a:effectRef>
+          <a:fontRef idx="minor">
+            <a:schemeClr val="lt1"/>
+          </a:fontRef>
+        </p:style>
+        <p:txBody>
+          <a:bodyPr rtlCol="0" anchor="ctr"/>
+          <a:lstStyle/>
+          <a:p>
+            <a:endParaRPr/>
+          </a:p>
+        </p:txBody>
+      </p:sp>
+      <p:sp>
+        <p:nvSpPr>
+          <p:cNvPr id="28" name="Oval 27"/>
+          <p:cNvSpPr/>
+          <p:nvPr/>
+        </p:nvSpPr>
+        <p:spPr>
+          <a:xfrm>
+            <a:off x="493776" y="3236976"/>
+            <a:ext cx="329184" cy="329184"/>
+          </a:xfrm>
+          <a:prstGeom prst="ellipse">
+            <a:avLst/>
+          </a:prstGeom>
+          <a:solidFill>
+            <a:srgbClr val="8B2327"/>
+          </a:solidFill>
+          <a:ln>
+            <a:noFill/>
+          </a:ln>
+          <a:effectLst/>
+        </p:spPr>
+        <p:style>
+          <a:lnRef idx="1">
+            <a:schemeClr val="accent1"/>
+          </a:lnRef>
+          <a:fillRef idx="3">
+            <a:schemeClr val="accent1"/>
+          </a:fillRef>
+          <a:effectRef idx="2">
+            <a:schemeClr val="accent1"/>
+          </a:effectRef>
+          <a:fontRef idx="minor">
+            <a:schemeClr val="lt1"/>
+          </a:fontRef>
+        </p:style>
+        <p:txBody>
+          <a:bodyPr lIns="0" tIns="0" rIns="0" bIns="0" rtlCol="0" anchor="ctr"/>
+          <a:lstStyle/>
+          <a:p>
+            <a:pPr algn="ctr"/>
+            <a:r>
+              <a:rPr sz="1200" b="1" i="0">
+                <a:solidFill>
+                  <a:srgbClr val="FFFFFF"/>
+                </a:solidFill>
+                <a:latin typeface="Arial"/>
+              </a:rPr>
+              <a:t>1</a:t>
+            </a:r>
+          </a:p>
+        </p:txBody>
+      </p:sp>
+      <p:sp>
+        <p:nvSpPr>
+          <p:cNvPr id="29" name="TextBox 28"/>
+          <p:cNvSpPr txBox="1"/>
+          <p:nvPr/>
+        </p:nvSpPr>
+        <p:spPr>
+          <a:xfrm>
+            <a:off x="859536" y="3182112"/>
+            <a:ext cx="2139924" cy="365760"/>
+          </a:xfrm>
+          <a:prstGeom prst="rect">
+            <a:avLst/>
+          </a:prstGeom>
+          <a:noFill/>
+        </p:spPr>
+        <p:txBody>
+          <a:bodyPr wrap="square" lIns="45720" tIns="27432" rIns="45720" bIns="27432" anchor="t"/>
           <a:lstStyle/>
           <a:p>
             <a:pPr algn="l">
@@ -7646,27 +8035,27 @@
               </a:spcAft>
             </a:pPr>
             <a:r>
-              <a:rPr sz="1150" b="1" i="0">
-                <a:solidFill>
-                  <a:srgbClr val="222222"/>
-                </a:solidFill>
-                <a:latin typeface="Arial"/>
-              </a:rPr>
-              <a:t>v5  Learning upgrade</a:t>
-            </a:r>
-          </a:p>
-        </p:txBody>
-      </p:sp>
-      <p:sp>
-        <p:nvSpPr>
-          <p:cNvPr id="25" name="TextBox 24"/>
+              <a:rPr sz="1250" b="1" i="0">
+                <a:solidFill>
+                  <a:srgbClr val="6E1A1D"/>
+                </a:solidFill>
+                <a:latin typeface="Arial"/>
+              </a:rPr>
+              <a:t>Make the numbers real</a:t>
+            </a:r>
+          </a:p>
+        </p:txBody>
+      </p:sp>
+      <p:sp>
+        <p:nvSpPr>
+          <p:cNvPr id="30" name="TextBox 29"/>
           <p:cNvSpPr txBox="1"/>
           <p:nvPr/>
         </p:nvSpPr>
         <p:spPr>
           <a:xfrm>
-            <a:off x="9069933" y="2084831"/>
-            <a:ext cx="2523744" cy="548640"/>
+            <a:off x="859536" y="3547872"/>
+            <a:ext cx="2139924" cy="1700784"/>
           </a:xfrm>
           <a:prstGeom prst="rect">
             <a:avLst/>
@@ -7674,78 +8063,59 @@
           <a:noFill/>
         </p:spPr>
         <p:txBody>
-          <a:bodyPr wrap="square" lIns="45720" rIns="45720" tIns="27432" bIns="27432" anchor="t"/>
-          <a:lstStyle/>
-          <a:p>
-            <a:pPr algn="l">
+          <a:bodyPr wrap="square" lIns="45720" tIns="27432" rIns="45720" bIns="27432" anchor="t"/>
+          <a:lstStyle/>
+          <a:p>
+            <a:pPr marL="155448" indent="-155448" algn="l">
               <a:lnSpc>
-                <a:spcPct val="104000"/>
+                <a:spcPct val="106000"/>
               </a:lnSpc>
               <a:spcAft>
-                <a:spcPts val="300"/>
+                <a:spcPts val="200"/>
               </a:spcAft>
+              <a:buChar char="•"/>
             </a:pPr>
             <a:r>
-              <a:rPr sz="950" b="0" i="0">
-                <a:solidFill>
-                  <a:srgbClr val="555555"/>
-                </a:solidFill>
-                <a:latin typeface="Arial"/>
-              </a:rPr>
-              <a:t>model ladder, campaign planner, specs, ageing — benchmark just finished</a:t>
-            </a:r>
-          </a:p>
-        </p:txBody>
-      </p:sp>
-      <p:sp>
-        <p:nvSpPr>
-          <p:cNvPr id="26" name="TextBox 25"/>
-          <p:cNvSpPr txBox="1"/>
-          <p:nvPr/>
-        </p:nvSpPr>
-        <p:spPr>
-          <a:xfrm>
-            <a:off x="365760" y="2697480"/>
-            <a:ext cx="11338560" cy="274320"/>
-          </a:xfrm>
-          <a:prstGeom prst="rect">
-            <a:avLst/>
-          </a:prstGeom>
-          <a:noFill/>
-        </p:spPr>
-        <p:txBody>
-          <a:bodyPr wrap="square" lIns="45720" rIns="45720" tIns="27432" bIns="27432" anchor="t"/>
-          <a:lstStyle/>
-          <a:p>
-            <a:pPr algn="ctr">
+              <a:rPr sz="1000" b="0" i="0">
+                <a:solidFill>
+                  <a:srgbClr val="222222"/>
+                </a:solidFill>
+                <a:latin typeface="Arial"/>
+              </a:rPr>
+              <a:t>Everything so far runs on placeholder kinetics and prices; next we collect real ones and a real GC log from the Micromeritics reactor, with Prof. Khare</a:t>
+            </a:r>
+          </a:p>
+          <a:p>
+            <a:pPr marL="155448" indent="-155448" algn="l">
               <a:lnSpc>
-                <a:spcPct val="108000"/>
+                <a:spcPct val="106000"/>
               </a:lnSpc>
               <a:spcAft>
-                <a:spcPts val="300"/>
+                <a:spcPts val="200"/>
               </a:spcAft>
+              <a:buChar char="•"/>
             </a:pPr>
             <a:r>
               <a:rPr sz="1000" b="0" i="0">
                 <a:solidFill>
-                  <a:srgbClr val="808080"/>
-                </a:solidFill>
-                <a:latin typeface="Arial"/>
-              </a:rPr>
-              <a:t>about 130 automated checks across the twin, the BO package, the advisor and the web tool  ·  code, figures and documentation on GitHub</a:t>
-            </a:r>
-          </a:p>
-        </p:txBody>
-      </p:sp>
-      <p:sp>
-        <p:nvSpPr>
-          <p:cNvPr id="27" name="Rounded Rectangle 26"/>
+                  <a:srgbClr val="222222"/>
+                </a:solidFill>
+                <a:latin typeface="Arial"/>
+              </a:rPr>
+              <a:t>Rerun the benchmark on them and see how far the textbook model is from the real reactor</a:t>
+            </a:r>
+          </a:p>
+        </p:txBody>
+      </p:sp>
+      <p:sp>
+        <p:nvSpPr>
+          <p:cNvPr id="31" name="Rounded Rectangle 30"/>
           <p:cNvSpPr/>
           <p:nvPr/>
         </p:nvSpPr>
         <p:spPr>
           <a:xfrm>
-            <a:off x="365760" y="3108960"/>
+            <a:off x="3230803" y="3108960"/>
             <a:ext cx="2743428" cy="2194560"/>
           </a:xfrm>
           <a:prstGeom prst="roundRect">
@@ -7778,18 +8148,20 @@
         <p:txBody>
           <a:bodyPr rtlCol="0" anchor="ctr"/>
           <a:lstStyle/>
-          <a:p/>
-        </p:txBody>
-      </p:sp>
-      <p:sp>
-        <p:nvSpPr>
-          <p:cNvPr id="28" name="Oval 27"/>
+          <a:p>
+            <a:endParaRPr/>
+          </a:p>
+        </p:txBody>
+      </p:sp>
+      <p:sp>
+        <p:nvSpPr>
+          <p:cNvPr id="32" name="Oval 31"/>
           <p:cNvSpPr/>
           <p:nvPr/>
         </p:nvSpPr>
         <p:spPr>
           <a:xfrm>
-            <a:off x="493776" y="3236976"/>
+            <a:off x="3358819" y="3236976"/>
             <a:ext cx="329184" cy="329184"/>
           </a:xfrm>
           <a:prstGeom prst="ellipse">
@@ -7818,7 +8190,7 @@
           </a:fontRef>
         </p:style>
         <p:txBody>
-          <a:bodyPr rtlCol="0" anchor="ctr" lIns="0" rIns="0" tIns="0" bIns="0"/>
+          <a:bodyPr lIns="0" tIns="0" rIns="0" bIns="0" rtlCol="0" anchor="ctr"/>
           <a:lstStyle/>
           <a:p>
             <a:pPr algn="ctr"/>
@@ -7829,20 +8201,20 @@
                 </a:solidFill>
                 <a:latin typeface="Arial"/>
               </a:rPr>
-              <a:t>1</a:t>
-            </a:r>
-          </a:p>
-        </p:txBody>
-      </p:sp>
-      <p:sp>
-        <p:nvSpPr>
-          <p:cNvPr id="29" name="TextBox 28"/>
+              <a:t>2</a:t>
+            </a:r>
+          </a:p>
+        </p:txBody>
+      </p:sp>
+      <p:sp>
+        <p:nvSpPr>
+          <p:cNvPr id="33" name="TextBox 32"/>
           <p:cNvSpPr txBox="1"/>
           <p:nvPr/>
         </p:nvSpPr>
         <p:spPr>
           <a:xfrm>
-            <a:off x="859536" y="3182112"/>
+            <a:off x="3724579" y="3182112"/>
             <a:ext cx="2139924" cy="365760"/>
           </a:xfrm>
           <a:prstGeom prst="rect">
@@ -7851,7 +8223,7 @@
           <a:noFill/>
         </p:spPr>
         <p:txBody>
-          <a:bodyPr wrap="square" lIns="45720" rIns="45720" tIns="27432" bIns="27432" anchor="t"/>
+          <a:bodyPr wrap="square" lIns="45720" tIns="27432" rIns="45720" bIns="27432" anchor="t"/>
           <a:lstStyle/>
           <a:p>
             <a:pPr algn="l">
@@ -7869,20 +8241,20 @@
                 </a:solidFill>
                 <a:latin typeface="Arial"/>
               </a:rPr>
-              <a:t>Make the numbers real</a:t>
-            </a:r>
-          </a:p>
-        </p:txBody>
-      </p:sp>
-      <p:sp>
-        <p:nvSpPr>
-          <p:cNvPr id="30" name="TextBox 29"/>
+              <a:t>Your own chemistry</a:t>
+            </a:r>
+          </a:p>
+        </p:txBody>
+      </p:sp>
+      <p:sp>
+        <p:nvSpPr>
+          <p:cNvPr id="34" name="TextBox 33"/>
           <p:cNvSpPr txBox="1"/>
           <p:nvPr/>
         </p:nvSpPr>
         <p:spPr>
           <a:xfrm>
-            <a:off x="859536" y="3547872"/>
+            <a:off x="3724579" y="3547872"/>
             <a:ext cx="2139924" cy="1700784"/>
           </a:xfrm>
           <a:prstGeom prst="rect">
@@ -7891,10 +8263,10 @@
           <a:noFill/>
         </p:spPr>
         <p:txBody>
-          <a:bodyPr wrap="square" lIns="45720" rIns="45720" tIns="27432" bIns="27432" anchor="t"/>
-          <a:lstStyle/>
-          <a:p>
-            <a:pPr algn="l" marL="155448" indent="-155448">
+          <a:bodyPr wrap="square" lIns="45720" tIns="27432" rIns="45720" bIns="27432" anchor="t"/>
+          <a:lstStyle/>
+          <a:p>
+            <a:pPr marL="155448" indent="-155448" algn="l">
               <a:lnSpc>
                 <a:spcPct val="106000"/>
               </a:lnSpc>
@@ -7910,11 +8282,11 @@
                 </a:solidFill>
                 <a:latin typeface="Arial"/>
               </a:rPr>
-              <a:t>Everything so far runs on placeholder kinetics and prices; next we collect real ones and a real GC log from the Micromeritics reactor, with Prof. Khare</a:t>
-            </a:r>
-          </a:p>
-          <a:p>
-            <a:pPr algn="l" marL="155448" indent="-155448">
+              <a:t>Type in your own reactions on the page</a:t>
+            </a:r>
+          </a:p>
+          <a:p>
+            <a:pPr marL="155448" indent="-155448" algn="l">
               <a:lnSpc>
                 <a:spcPct val="106000"/>
               </a:lnSpc>
@@ -7930,20 +8302,20 @@
                 </a:solidFill>
                 <a:latin typeface="Arial"/>
               </a:rPr>
-              <a:t>Rerun the benchmark on them and see how far the textbook model is from the real reactor</a:t>
-            </a:r>
-          </a:p>
-        </p:txBody>
-      </p:sp>
-      <p:sp>
-        <p:nvSpPr>
-          <p:cNvPr id="31" name="Rounded Rectangle 30"/>
+              <a:t>The advisor proposes runs that reveal which reactions are really happening (model discrimination)</a:t>
+            </a:r>
+          </a:p>
+        </p:txBody>
+      </p:sp>
+      <p:sp>
+        <p:nvSpPr>
+          <p:cNvPr id="35" name="Rounded Rectangle 34"/>
           <p:cNvSpPr/>
           <p:nvPr/>
         </p:nvSpPr>
         <p:spPr>
           <a:xfrm>
-            <a:off x="3230803" y="3108960"/>
+            <a:off x="6095847" y="3108960"/>
             <a:ext cx="2743428" cy="2194560"/>
           </a:xfrm>
           <a:prstGeom prst="roundRect">
@@ -7976,18 +8348,20 @@
         <p:txBody>
           <a:bodyPr rtlCol="0" anchor="ctr"/>
           <a:lstStyle/>
-          <a:p/>
-        </p:txBody>
-      </p:sp>
-      <p:sp>
-        <p:nvSpPr>
-          <p:cNvPr id="32" name="Oval 31"/>
+          <a:p>
+            <a:endParaRPr/>
+          </a:p>
+        </p:txBody>
+      </p:sp>
+      <p:sp>
+        <p:nvSpPr>
+          <p:cNvPr id="36" name="Oval 35"/>
           <p:cNvSpPr/>
           <p:nvPr/>
         </p:nvSpPr>
         <p:spPr>
           <a:xfrm>
-            <a:off x="3358819" y="3236976"/>
+            <a:off x="6223863" y="3236976"/>
             <a:ext cx="329184" cy="329184"/>
           </a:xfrm>
           <a:prstGeom prst="ellipse">
@@ -8016,7 +8390,7 @@
           </a:fontRef>
         </p:style>
         <p:txBody>
-          <a:bodyPr rtlCol="0" anchor="ctr" lIns="0" rIns="0" tIns="0" bIns="0"/>
+          <a:bodyPr lIns="0" tIns="0" rIns="0" bIns="0" rtlCol="0" anchor="ctr"/>
           <a:lstStyle/>
           <a:p>
             <a:pPr algn="ctr"/>
@@ -8027,20 +8401,20 @@
                 </a:solidFill>
                 <a:latin typeface="Arial"/>
               </a:rPr>
-              <a:t>2</a:t>
-            </a:r>
-          </a:p>
-        </p:txBody>
-      </p:sp>
-      <p:sp>
-        <p:nvSpPr>
-          <p:cNvPr id="33" name="TextBox 32"/>
+              <a:t>3</a:t>
+            </a:r>
+          </a:p>
+        </p:txBody>
+      </p:sp>
+      <p:sp>
+        <p:nvSpPr>
+          <p:cNvPr id="37" name="TextBox 36"/>
           <p:cNvSpPr txBox="1"/>
           <p:nvPr/>
         </p:nvSpPr>
         <p:spPr>
           <a:xfrm>
-            <a:off x="3724579" y="3182112"/>
+            <a:off x="6589623" y="3182112"/>
             <a:ext cx="2139924" cy="365760"/>
           </a:xfrm>
           <a:prstGeom prst="rect">
@@ -8049,7 +8423,7 @@
           <a:noFill/>
         </p:spPr>
         <p:txBody>
-          <a:bodyPr wrap="square" lIns="45720" rIns="45720" tIns="27432" bIns="27432" anchor="t"/>
+          <a:bodyPr wrap="square" lIns="45720" tIns="27432" rIns="45720" bIns="27432" anchor="t"/>
           <a:lstStyle/>
           <a:p>
             <a:pPr algn="l">
@@ -8067,20 +8441,20 @@
                 </a:solidFill>
                 <a:latin typeface="Arial"/>
               </a:rPr>
-              <a:t>Your own chemistry</a:t>
-            </a:r>
-          </a:p>
-        </p:txBody>
-      </p:sp>
-      <p:sp>
-        <p:nvSpPr>
-          <p:cNvPr id="34" name="TextBox 33"/>
+              <a:t>Blind test vs a chemist</a:t>
+            </a:r>
+          </a:p>
+        </p:txBody>
+      </p:sp>
+      <p:sp>
+        <p:nvSpPr>
+          <p:cNvPr id="38" name="TextBox 37"/>
           <p:cNvSpPr txBox="1"/>
           <p:nvPr/>
         </p:nvSpPr>
         <p:spPr>
           <a:xfrm>
-            <a:off x="3724579" y="3547872"/>
+            <a:off x="6589623" y="3547872"/>
             <a:ext cx="2139924" cy="1700784"/>
           </a:xfrm>
           <a:prstGeom prst="rect">
@@ -8089,10 +8463,10 @@
           <a:noFill/>
         </p:spPr>
         <p:txBody>
-          <a:bodyPr wrap="square" lIns="45720" rIns="45720" tIns="27432" bIns="27432" anchor="t"/>
-          <a:lstStyle/>
-          <a:p>
-            <a:pPr algn="l" marL="155448" indent="-155448">
+          <a:bodyPr wrap="square" lIns="45720" tIns="27432" rIns="45720" bIns="27432" anchor="t"/>
+          <a:lstStyle/>
+          <a:p>
+            <a:pPr marL="155448" indent="-155448" algn="l">
               <a:lnSpc>
                 <a:spcPct val="106000"/>
               </a:lnSpc>
@@ -8108,11 +8482,11 @@
                 </a:solidFill>
                 <a:latin typeface="Arial"/>
               </a:rPr>
-              <a:t>Type in your own reactions on the page</a:t>
-            </a:r>
-          </a:p>
-          <a:p>
-            <a:pPr algn="l" marL="155448" indent="-155448">
+              <a:t>Same reactor, same run budget: the advisor against a chemist at the bench, judged blind on profit and runs used</a:t>
+            </a:r>
+          </a:p>
+          <a:p>
+            <a:pPr marL="155448" indent="-155448" algn="l">
               <a:lnSpc>
                 <a:spcPct val="106000"/>
               </a:lnSpc>
@@ -8128,20 +8502,20 @@
                 </a:solidFill>
                 <a:latin typeface="Arial"/>
               </a:rPr>
-              <a:t>The advisor proposes runs that reveal which reactions are really happening (model discrimination)</a:t>
-            </a:r>
-          </a:p>
-        </p:txBody>
-      </p:sp>
-      <p:sp>
-        <p:nvSpPr>
-          <p:cNvPr id="35" name="Rounded Rectangle 34"/>
+              <a:t>The fair version of our rules-of-thumb comparison</a:t>
+            </a:r>
+          </a:p>
+        </p:txBody>
+      </p:sp>
+      <p:sp>
+        <p:nvSpPr>
+          <p:cNvPr id="39" name="Rounded Rectangle 38"/>
           <p:cNvSpPr/>
           <p:nvPr/>
         </p:nvSpPr>
         <p:spPr>
           <a:xfrm>
-            <a:off x="6095847" y="3108960"/>
+            <a:off x="8960891" y="3108960"/>
             <a:ext cx="2743428" cy="2194560"/>
           </a:xfrm>
           <a:prstGeom prst="roundRect">
@@ -8174,18 +8548,20 @@
         <p:txBody>
           <a:bodyPr rtlCol="0" anchor="ctr"/>
           <a:lstStyle/>
-          <a:p/>
-        </p:txBody>
-      </p:sp>
-      <p:sp>
-        <p:nvSpPr>
-          <p:cNvPr id="36" name="Oval 35"/>
+          <a:p>
+            <a:endParaRPr/>
+          </a:p>
+        </p:txBody>
+      </p:sp>
+      <p:sp>
+        <p:nvSpPr>
+          <p:cNvPr id="40" name="Oval 39"/>
           <p:cNvSpPr/>
           <p:nvPr/>
         </p:nvSpPr>
         <p:spPr>
           <a:xfrm>
-            <a:off x="6223863" y="3236976"/>
+            <a:off x="9088907" y="3236976"/>
             <a:ext cx="329184" cy="329184"/>
           </a:xfrm>
           <a:prstGeom prst="ellipse">
@@ -8214,7 +8590,7 @@
           </a:fontRef>
         </p:style>
         <p:txBody>
-          <a:bodyPr rtlCol="0" anchor="ctr" lIns="0" rIns="0" tIns="0" bIns="0"/>
+          <a:bodyPr lIns="0" tIns="0" rIns="0" bIns="0" rtlCol="0" anchor="ctr"/>
           <a:lstStyle/>
           <a:p>
             <a:pPr algn="ctr"/>
@@ -8225,20 +8601,20 @@
                 </a:solidFill>
                 <a:latin typeface="Arial"/>
               </a:rPr>
-              <a:t>3</a:t>
-            </a:r>
-          </a:p>
-        </p:txBody>
-      </p:sp>
-      <p:sp>
-        <p:nvSpPr>
-          <p:cNvPr id="37" name="TextBox 36"/>
+              <a:t>4</a:t>
+            </a:r>
+          </a:p>
+        </p:txBody>
+      </p:sp>
+      <p:sp>
+        <p:nvSpPr>
+          <p:cNvPr id="41" name="TextBox 40"/>
           <p:cNvSpPr txBox="1"/>
           <p:nvPr/>
         </p:nvSpPr>
         <p:spPr>
           <a:xfrm>
-            <a:off x="6589623" y="3182112"/>
+            <a:off x="9454667" y="3182112"/>
             <a:ext cx="2139924" cy="365760"/>
           </a:xfrm>
           <a:prstGeom prst="rect">
@@ -8247,7 +8623,7 @@
           <a:noFill/>
         </p:spPr>
         <p:txBody>
-          <a:bodyPr wrap="square" lIns="45720" rIns="45720" tIns="27432" bIns="27432" anchor="t"/>
+          <a:bodyPr wrap="square" lIns="45720" tIns="27432" rIns="45720" bIns="27432" anchor="t"/>
           <a:lstStyle/>
           <a:p>
             <a:pPr algn="l">
@@ -8265,20 +8641,20 @@
                 </a:solidFill>
                 <a:latin typeface="Arial"/>
               </a:rPr>
-              <a:t>Blind test vs a chemist</a:t>
-            </a:r>
-          </a:p>
-        </p:txBody>
-      </p:sp>
-      <p:sp>
-        <p:nvSpPr>
-          <p:cNvPr id="38" name="TextBox 37"/>
+              <a:t>Profit vs selectivity</a:t>
+            </a:r>
+          </a:p>
+        </p:txBody>
+      </p:sp>
+      <p:sp>
+        <p:nvSpPr>
+          <p:cNvPr id="42" name="TextBox 41"/>
           <p:cNvSpPr txBox="1"/>
           <p:nvPr/>
         </p:nvSpPr>
         <p:spPr>
           <a:xfrm>
-            <a:off x="6589623" y="3547872"/>
+            <a:off x="9454667" y="3547872"/>
             <a:ext cx="2139924" cy="1700784"/>
           </a:xfrm>
           <a:prstGeom prst="rect">
@@ -8287,10 +8663,10 @@
           <a:noFill/>
         </p:spPr>
         <p:txBody>
-          <a:bodyPr wrap="square" lIns="45720" rIns="45720" tIns="27432" bIns="27432" anchor="t"/>
-          <a:lstStyle/>
-          <a:p>
-            <a:pPr algn="l" marL="155448" indent="-155448">
+          <a:bodyPr wrap="square" lIns="45720" tIns="27432" rIns="45720" bIns="27432" anchor="t"/>
+          <a:lstStyle/>
+          <a:p>
+            <a:pPr marL="155448" indent="-155448" algn="l">
               <a:lnSpc>
                 <a:spcPct val="106000"/>
               </a:lnSpc>
@@ -8306,11 +8682,11 @@
                 </a:solidFill>
                 <a:latin typeface="Arial"/>
               </a:rPr>
-              <a:t>Same reactor, same run budget: the advisor against a chemist at the bench, judged blind on profit and runs used</a:t>
-            </a:r>
-          </a:p>
-          <a:p>
-            <a:pPr algn="l" marL="155448" indent="-155448">
+              <a:t>Show the trade-off curve between profit and product purity (Pareto front), not one answer</a:t>
+            </a:r>
+          </a:p>
+          <a:p>
+            <a:pPr marL="155448" indent="-155448" algn="l">
               <a:lnSpc>
                 <a:spcPct val="106000"/>
               </a:lnSpc>
@@ -8326,68 +8702,26 @@
                 </a:solidFill>
                 <a:latin typeface="Arial"/>
               </a:rPr>
-              <a:t>The fair version of our rules-of-thumb comparison</a:t>
-            </a:r>
-          </a:p>
-        </p:txBody>
-      </p:sp>
-      <p:sp>
-        <p:nvSpPr>
-          <p:cNvPr id="39" name="Rounded Rectangle 38"/>
+              <a:t>The operator picks the point that fits the contract</a:t>
+            </a:r>
+          </a:p>
+        </p:txBody>
+      </p:sp>
+      <p:sp>
+        <p:nvSpPr>
+          <p:cNvPr id="43" name="Rounded Rectangle 42"/>
           <p:cNvSpPr/>
           <p:nvPr/>
         </p:nvSpPr>
         <p:spPr>
           <a:xfrm>
-            <a:off x="8960891" y="3108960"/>
-            <a:ext cx="2743428" cy="2194560"/>
+            <a:off x="365760" y="5440680"/>
+            <a:ext cx="11338560" cy="960120"/>
           </a:xfrm>
           <a:prstGeom prst="roundRect">
             <a:avLst>
               <a:gd name="adj" fmla="val 8000"/>
             </a:avLst>
-          </a:prstGeom>
-          <a:solidFill>
-            <a:srgbClr val="F8F1F1"/>
-          </a:solidFill>
-          <a:ln>
-            <a:noFill/>
-          </a:ln>
-          <a:effectLst/>
-        </p:spPr>
-        <p:style>
-          <a:lnRef idx="1">
-            <a:schemeClr val="accent1"/>
-          </a:lnRef>
-          <a:fillRef idx="3">
-            <a:schemeClr val="accent1"/>
-          </a:fillRef>
-          <a:effectRef idx="2">
-            <a:schemeClr val="accent1"/>
-          </a:effectRef>
-          <a:fontRef idx="minor">
-            <a:schemeClr val="lt1"/>
-          </a:fontRef>
-        </p:style>
-        <p:txBody>
-          <a:bodyPr rtlCol="0" anchor="ctr"/>
-          <a:lstStyle/>
-          <a:p/>
-        </p:txBody>
-      </p:sp>
-      <p:sp>
-        <p:nvSpPr>
-          <p:cNvPr id="40" name="Oval 39"/>
-          <p:cNvSpPr/>
-          <p:nvPr/>
-        </p:nvSpPr>
-        <p:spPr>
-          <a:xfrm>
-            <a:off x="9088907" y="3236976"/>
-            <a:ext cx="329184" cy="329184"/>
-          </a:xfrm>
-          <a:prstGeom prst="ellipse">
-            <a:avLst/>
           </a:prstGeom>
           <a:solidFill>
             <a:srgbClr val="8B2327"/>
@@ -8412,165 +8746,11 @@
           </a:fontRef>
         </p:style>
         <p:txBody>
-          <a:bodyPr rtlCol="0" anchor="ctr" lIns="0" rIns="0" tIns="0" bIns="0"/>
-          <a:lstStyle/>
-          <a:p>
-            <a:pPr algn="ctr"/>
-            <a:r>
-              <a:rPr sz="1200" b="1" i="0">
-                <a:solidFill>
-                  <a:srgbClr val="FFFFFF"/>
-                </a:solidFill>
-                <a:latin typeface="Arial"/>
-              </a:rPr>
-              <a:t>4</a:t>
-            </a:r>
-          </a:p>
-        </p:txBody>
-      </p:sp>
-      <p:sp>
-        <p:nvSpPr>
-          <p:cNvPr id="41" name="TextBox 40"/>
-          <p:cNvSpPr txBox="1"/>
-          <p:nvPr/>
-        </p:nvSpPr>
-        <p:spPr>
-          <a:xfrm>
-            <a:off x="9454667" y="3182112"/>
-            <a:ext cx="2139924" cy="365760"/>
-          </a:xfrm>
-          <a:prstGeom prst="rect">
-            <a:avLst/>
-          </a:prstGeom>
-          <a:noFill/>
-        </p:spPr>
-        <p:txBody>
-          <a:bodyPr wrap="square" lIns="45720" rIns="45720" tIns="27432" bIns="27432" anchor="t"/>
-          <a:lstStyle/>
-          <a:p>
-            <a:pPr algn="l">
-              <a:lnSpc>
-                <a:spcPct val="108000"/>
-              </a:lnSpc>
-              <a:spcAft>
-                <a:spcPts val="300"/>
-              </a:spcAft>
-            </a:pPr>
-            <a:r>
-              <a:rPr sz="1250" b="1" i="0">
-                <a:solidFill>
-                  <a:srgbClr val="6E1A1D"/>
-                </a:solidFill>
-                <a:latin typeface="Arial"/>
-              </a:rPr>
-              <a:t>Profit vs selectivity</a:t>
-            </a:r>
-          </a:p>
-        </p:txBody>
-      </p:sp>
-      <p:sp>
-        <p:nvSpPr>
-          <p:cNvPr id="42" name="TextBox 41"/>
-          <p:cNvSpPr txBox="1"/>
-          <p:nvPr/>
-        </p:nvSpPr>
-        <p:spPr>
-          <a:xfrm>
-            <a:off x="9454667" y="3547872"/>
-            <a:ext cx="2139924" cy="1700784"/>
-          </a:xfrm>
-          <a:prstGeom prst="rect">
-            <a:avLst/>
-          </a:prstGeom>
-          <a:noFill/>
-        </p:spPr>
-        <p:txBody>
-          <a:bodyPr wrap="square" lIns="45720" rIns="45720" tIns="27432" bIns="27432" anchor="t"/>
-          <a:lstStyle/>
-          <a:p>
-            <a:pPr algn="l" marL="155448" indent="-155448">
-              <a:lnSpc>
-                <a:spcPct val="106000"/>
-              </a:lnSpc>
-              <a:spcAft>
-                <a:spcPts val="200"/>
-              </a:spcAft>
-              <a:buChar char="•"/>
-            </a:pPr>
-            <a:r>
-              <a:rPr sz="1000" b="0" i="0">
-                <a:solidFill>
-                  <a:srgbClr val="222222"/>
-                </a:solidFill>
-                <a:latin typeface="Arial"/>
-              </a:rPr>
-              <a:t>Show the trade-off curve between profit and product purity (Pareto front), not one answer</a:t>
-            </a:r>
-          </a:p>
-          <a:p>
-            <a:pPr algn="l" marL="155448" indent="-155448">
-              <a:lnSpc>
-                <a:spcPct val="106000"/>
-              </a:lnSpc>
-              <a:spcAft>
-                <a:spcPts val="200"/>
-              </a:spcAft>
-              <a:buChar char="•"/>
-            </a:pPr>
-            <a:r>
-              <a:rPr sz="1000" b="0" i="0">
-                <a:solidFill>
-                  <a:srgbClr val="222222"/>
-                </a:solidFill>
-                <a:latin typeface="Arial"/>
-              </a:rPr>
-              <a:t>The operator picks the point that fits the contract</a:t>
-            </a:r>
-          </a:p>
-        </p:txBody>
-      </p:sp>
-      <p:sp>
-        <p:nvSpPr>
-          <p:cNvPr id="43" name="Rounded Rectangle 42"/>
-          <p:cNvSpPr/>
-          <p:nvPr/>
-        </p:nvSpPr>
-        <p:spPr>
-          <a:xfrm>
-            <a:off x="365760" y="5440680"/>
-            <a:ext cx="11338560" cy="960120"/>
-          </a:xfrm>
-          <a:prstGeom prst="roundRect">
-            <a:avLst>
-              <a:gd name="adj" fmla="val 8000"/>
-            </a:avLst>
-          </a:prstGeom>
-          <a:solidFill>
-            <a:srgbClr val="8B2327"/>
-          </a:solidFill>
-          <a:ln>
-            <a:noFill/>
-          </a:ln>
-          <a:effectLst/>
-        </p:spPr>
-        <p:style>
-          <a:lnRef idx="1">
-            <a:schemeClr val="accent1"/>
-          </a:lnRef>
-          <a:fillRef idx="3">
-            <a:schemeClr val="accent1"/>
-          </a:fillRef>
-          <a:effectRef idx="2">
-            <a:schemeClr val="accent1"/>
-          </a:effectRef>
-          <a:fontRef idx="minor">
-            <a:schemeClr val="lt1"/>
-          </a:fontRef>
-        </p:style>
-        <p:txBody>
           <a:bodyPr rtlCol="0" anchor="ctr"/>
           <a:lstStyle/>
-          <a:p/>
+          <a:p>
+            <a:endParaRPr/>
+          </a:p>
         </p:txBody>
       </p:sp>
       <p:sp>
@@ -8590,7 +8770,7 @@
           <a:noFill/>
         </p:spPr>
         <p:txBody>
-          <a:bodyPr wrap="square" lIns="45720" rIns="45720" tIns="27432" bIns="27432" anchor="ctr"/>
+          <a:bodyPr wrap="square" lIns="45720" tIns="27432" rIns="45720" bIns="27432" anchor="ctr"/>
           <a:lstStyle/>
           <a:p>
             <a:pPr algn="l">
@@ -8622,7 +8802,7 @@
 </file>
 
 <file path=ppt/slides/slide2.xml><?xml version="1.0" encoding="utf-8"?>
-<p:sld xmlns:a="http://schemas.openxmlformats.org/drawingml/2006/main" xmlns:p="http://schemas.openxmlformats.org/presentationml/2006/main" xmlns:r="http://schemas.openxmlformats.org/officeDocument/2006/relationships">
+<p:sld xmlns:a="http://schemas.openxmlformats.org/drawingml/2006/main" xmlns:r="http://schemas.openxmlformats.org/officeDocument/2006/relationships" xmlns:p="http://schemas.openxmlformats.org/presentationml/2006/main">
   <p:cSld>
     <p:spTree>
       <p:nvGrpSpPr>
@@ -8630,7 +8810,14 @@
         <p:cNvGrpSpPr/>
         <p:nvPr/>
       </p:nvGrpSpPr>
-      <p:grpSpPr/>
+      <p:grpSpPr>
+        <a:xfrm>
+          <a:off x="0" y="0"/>
+          <a:ext cx="0" cy="0"/>
+          <a:chOff x="0" y="0"/>
+          <a:chExt cx="0" cy="0"/>
+        </a:xfrm>
+      </p:grpSpPr>
       <p:sp>
         <p:nvSpPr>
           <p:cNvPr id="2" name="Title 1"/>
@@ -8648,7 +8835,7 @@
           </a:xfrm>
         </p:spPr>
         <p:txBody>
-          <a:bodyPr anchor="ctr" lIns="45720"/>
+          <a:bodyPr lIns="45720" anchor="ctr"/>
           <a:lstStyle/>
           <a:p>
             <a:pPr algn="l"/>
@@ -8681,7 +8868,7 @@
           <a:noFill/>
         </p:spPr>
         <p:txBody>
-          <a:bodyPr wrap="square" lIns="45720" rIns="45720" tIns="27432" bIns="27432" anchor="t"/>
+          <a:bodyPr wrap="square" lIns="45720" tIns="27432" rIns="45720" bIns="27432" anchor="t"/>
           <a:lstStyle/>
           <a:p>
             <a:pPr algn="l">
@@ -8756,7 +8943,7 @@
           <a:noFill/>
         </p:spPr>
         <p:txBody>
-          <a:bodyPr wrap="square" lIns="45720" rIns="45720" tIns="27432" bIns="27432" anchor="t"/>
+          <a:bodyPr wrap="square" lIns="45720" tIns="27432" rIns="45720" bIns="27432" anchor="t"/>
           <a:lstStyle/>
           <a:p>
             <a:pPr algn="l">
@@ -8768,13 +8955,31 @@
               </a:spcAft>
             </a:pPr>
             <a:r>
-              <a:rPr sz="850" b="0" i="0">
+              <a:rPr sz="850" b="0" i="0" dirty="0">
                 <a:solidFill>
                   <a:srgbClr val="808080"/>
                 </a:solidFill>
                 <a:latin typeface="Arial"/>
               </a:rPr>
-              <a:t>ACOD310 mid-term  ·  17 October 2026  ·  Sumant Varanasi &amp; Parva Chaudhary</a:t>
+              <a:t>ACOD310 mid-term  ·  1</a:t>
+            </a:r>
+            <a:r>
+              <a:rPr lang="en-IN" sz="850" b="0" i="0" dirty="0">
+                <a:solidFill>
+                  <a:srgbClr val="808080"/>
+                </a:solidFill>
+                <a:latin typeface="Arial"/>
+              </a:rPr>
+              <a:t>6</a:t>
+            </a:r>
+            <a:r>
+              <a:rPr sz="850" b="0" i="0" dirty="0">
+                <a:solidFill>
+                  <a:srgbClr val="808080"/>
+                </a:solidFill>
+                <a:latin typeface="Arial"/>
+              </a:rPr>
+              <a:t> October 2026  ·  Sumant Varanasi &amp; Parva Chaudhary</a:t>
             </a:r>
           </a:p>
         </p:txBody>
@@ -8796,7 +9001,7 @@
           <a:noFill/>
         </p:spPr>
         <p:txBody>
-          <a:bodyPr wrap="square" lIns="45720" rIns="45720" tIns="27432" bIns="27432" anchor="t"/>
+          <a:bodyPr wrap="square" lIns="45720" tIns="27432" rIns="45720" bIns="27432" anchor="t"/>
           <a:lstStyle/>
           <a:p>
             <a:pPr algn="r">
@@ -8836,7 +9041,7 @@
           <a:noFill/>
         </p:spPr>
         <p:txBody>
-          <a:bodyPr wrap="square" lIns="45720" rIns="45720" tIns="27432" bIns="27432" anchor="t"/>
+          <a:bodyPr wrap="square" lIns="45720" tIns="27432" rIns="45720" bIns="27432" anchor="t"/>
           <a:lstStyle/>
           <a:p>
             <a:pPr algn="l">
@@ -8900,7 +9105,9 @@
         <p:txBody>
           <a:bodyPr rtlCol="0" anchor="ctr"/>
           <a:lstStyle/>
-          <a:p/>
+          <a:p>
+            <a:endParaRPr/>
+          </a:p>
         </p:txBody>
       </p:sp>
       <p:sp>
@@ -8940,7 +9147,7 @@
           </a:fontRef>
         </p:style>
         <p:txBody>
-          <a:bodyPr rtlCol="0" anchor="ctr" lIns="0" rIns="0" tIns="0" bIns="0"/>
+          <a:bodyPr lIns="0" tIns="0" rIns="0" bIns="0" rtlCol="0" anchor="ctr"/>
           <a:lstStyle/>
           <a:p>
             <a:pPr algn="ctr"/>
@@ -8973,7 +9180,7 @@
           <a:noFill/>
         </p:spPr>
         <p:txBody>
-          <a:bodyPr wrap="square" lIns="45720" rIns="45720" tIns="27432" bIns="27432" anchor="ctr"/>
+          <a:bodyPr wrap="square" lIns="45720" tIns="27432" rIns="45720" bIns="27432" anchor="ctr"/>
           <a:lstStyle/>
           <a:p>
             <a:pPr algn="l">
@@ -9013,7 +9220,7 @@
           <a:noFill/>
         </p:spPr>
         <p:txBody>
-          <a:bodyPr wrap="square" lIns="45720" rIns="45720" tIns="27432" bIns="27432" anchor="t"/>
+          <a:bodyPr wrap="square" lIns="45720" tIns="27432" rIns="45720" bIns="27432" anchor="t"/>
           <a:lstStyle/>
           <a:p>
             <a:pPr algn="l">
@@ -9077,7 +9284,9 @@
         <p:txBody>
           <a:bodyPr rtlCol="0" anchor="ctr"/>
           <a:lstStyle/>
-          <a:p/>
+          <a:p>
+            <a:endParaRPr/>
+          </a:p>
         </p:txBody>
       </p:sp>
       <p:sp>
@@ -9117,7 +9326,7 @@
           </a:fontRef>
         </p:style>
         <p:txBody>
-          <a:bodyPr rtlCol="0" anchor="ctr" lIns="0" rIns="0" tIns="0" bIns="0"/>
+          <a:bodyPr lIns="0" tIns="0" rIns="0" bIns="0" rtlCol="0" anchor="ctr"/>
           <a:lstStyle/>
           <a:p>
             <a:pPr algn="ctr"/>
@@ -9150,7 +9359,7 @@
           <a:noFill/>
         </p:spPr>
         <p:txBody>
-          <a:bodyPr wrap="square" lIns="45720" rIns="45720" tIns="27432" bIns="27432" anchor="ctr"/>
+          <a:bodyPr wrap="square" lIns="45720" tIns="27432" rIns="45720" bIns="27432" anchor="ctr"/>
           <a:lstStyle/>
           <a:p>
             <a:pPr algn="l">
@@ -9190,7 +9399,7 @@
           <a:noFill/>
         </p:spPr>
         <p:txBody>
-          <a:bodyPr wrap="square" lIns="45720" rIns="45720" tIns="27432" bIns="27432" anchor="t"/>
+          <a:bodyPr wrap="square" lIns="45720" tIns="27432" rIns="45720" bIns="27432" anchor="t"/>
           <a:lstStyle/>
           <a:p>
             <a:pPr algn="l">
@@ -9254,7 +9463,9 @@
         <p:txBody>
           <a:bodyPr rtlCol="0" anchor="ctr"/>
           <a:lstStyle/>
-          <a:p/>
+          <a:p>
+            <a:endParaRPr/>
+          </a:p>
         </p:txBody>
       </p:sp>
       <p:sp>
@@ -9294,7 +9505,7 @@
           </a:fontRef>
         </p:style>
         <p:txBody>
-          <a:bodyPr rtlCol="0" anchor="ctr" lIns="0" rIns="0" tIns="0" bIns="0"/>
+          <a:bodyPr lIns="0" tIns="0" rIns="0" bIns="0" rtlCol="0" anchor="ctr"/>
           <a:lstStyle/>
           <a:p>
             <a:pPr algn="ctr"/>
@@ -9327,7 +9538,7 @@
           <a:noFill/>
         </p:spPr>
         <p:txBody>
-          <a:bodyPr wrap="square" lIns="45720" rIns="45720" tIns="27432" bIns="27432" anchor="ctr"/>
+          <a:bodyPr wrap="square" lIns="45720" tIns="27432" rIns="45720" bIns="27432" anchor="ctr"/>
           <a:lstStyle/>
           <a:p>
             <a:pPr algn="l">
@@ -9391,7 +9602,9 @@
         <p:txBody>
           <a:bodyPr rtlCol="0" anchor="ctr"/>
           <a:lstStyle/>
-          <a:p/>
+          <a:p>
+            <a:endParaRPr/>
+          </a:p>
         </p:txBody>
       </p:sp>
       <p:sp>
@@ -9431,7 +9644,7 @@
           </a:fontRef>
         </p:style>
         <p:txBody>
-          <a:bodyPr rtlCol="0" anchor="ctr" lIns="0" rIns="0" tIns="0" bIns="0"/>
+          <a:bodyPr lIns="0" tIns="0" rIns="0" bIns="0" rtlCol="0" anchor="ctr"/>
           <a:lstStyle/>
           <a:p>
             <a:pPr algn="ctr"/>
@@ -9464,7 +9677,7 @@
           <a:noFill/>
         </p:spPr>
         <p:txBody>
-          <a:bodyPr wrap="square" lIns="45720" rIns="45720" tIns="27432" bIns="27432" anchor="ctr"/>
+          <a:bodyPr wrap="square" lIns="45720" tIns="27432" rIns="45720" bIns="27432" anchor="ctr"/>
           <a:lstStyle/>
           <a:p>
             <a:pPr algn="l">
@@ -9528,7 +9741,9 @@
         <p:txBody>
           <a:bodyPr rtlCol="0" anchor="ctr"/>
           <a:lstStyle/>
-          <a:p/>
+          <a:p>
+            <a:endParaRPr/>
+          </a:p>
         </p:txBody>
       </p:sp>
       <p:sp>
@@ -9568,7 +9783,7 @@
           </a:fontRef>
         </p:style>
         <p:txBody>
-          <a:bodyPr rtlCol="0" anchor="ctr" lIns="0" rIns="0" tIns="0" bIns="0"/>
+          <a:bodyPr lIns="0" tIns="0" rIns="0" bIns="0" rtlCol="0" anchor="ctr"/>
           <a:lstStyle/>
           <a:p>
             <a:pPr algn="ctr"/>
@@ -9601,7 +9816,7 @@
           <a:noFill/>
         </p:spPr>
         <p:txBody>
-          <a:bodyPr wrap="square" lIns="45720" rIns="45720" tIns="27432" bIns="27432" anchor="ctr"/>
+          <a:bodyPr wrap="square" lIns="45720" tIns="27432" rIns="45720" bIns="27432" anchor="ctr"/>
           <a:lstStyle/>
           <a:p>
             <a:pPr algn="l">
@@ -9641,7 +9856,7 @@
           <a:noFill/>
         </p:spPr>
         <p:txBody>
-          <a:bodyPr wrap="square" lIns="45720" rIns="45720" tIns="27432" bIns="27432" anchor="t"/>
+          <a:bodyPr wrap="square" lIns="45720" tIns="27432" rIns="45720" bIns="27432" anchor="t"/>
           <a:lstStyle/>
           <a:p>
             <a:pPr algn="l">
@@ -9705,7 +9920,9 @@
         <p:txBody>
           <a:bodyPr rtlCol="0" anchor="ctr"/>
           <a:lstStyle/>
-          <a:p/>
+          <a:p>
+            <a:endParaRPr/>
+          </a:p>
         </p:txBody>
       </p:sp>
       <p:sp>
@@ -9745,7 +9962,7 @@
           </a:fontRef>
         </p:style>
         <p:txBody>
-          <a:bodyPr rtlCol="0" anchor="ctr" lIns="0" rIns="0" tIns="0" bIns="0"/>
+          <a:bodyPr lIns="0" tIns="0" rIns="0" bIns="0" rtlCol="0" anchor="ctr"/>
           <a:lstStyle/>
           <a:p>
             <a:pPr algn="ctr"/>
@@ -9778,7 +9995,7 @@
           <a:noFill/>
         </p:spPr>
         <p:txBody>
-          <a:bodyPr wrap="square" lIns="45720" rIns="45720" tIns="27432" bIns="27432" anchor="ctr"/>
+          <a:bodyPr wrap="square" lIns="45720" tIns="27432" rIns="45720" bIns="27432" anchor="ctr"/>
           <a:lstStyle/>
           <a:p>
             <a:pPr algn="l">
@@ -9810,7 +10027,7 @@
 </file>
 
 <file path=ppt/slides/slide3.xml><?xml version="1.0" encoding="utf-8"?>
-<p:sld xmlns:a="http://schemas.openxmlformats.org/drawingml/2006/main" xmlns:p="http://schemas.openxmlformats.org/presentationml/2006/main" xmlns:r="http://schemas.openxmlformats.org/officeDocument/2006/relationships">
+<p:sld xmlns:a="http://schemas.openxmlformats.org/drawingml/2006/main" xmlns:r="http://schemas.openxmlformats.org/officeDocument/2006/relationships" xmlns:p="http://schemas.openxmlformats.org/presentationml/2006/main">
   <p:cSld>
     <p:spTree>
       <p:nvGrpSpPr>
@@ -9818,7 +10035,14 @@
         <p:cNvGrpSpPr/>
         <p:nvPr/>
       </p:nvGrpSpPr>
-      <p:grpSpPr/>
+      <p:grpSpPr>
+        <a:xfrm>
+          <a:off x="0" y="0"/>
+          <a:ext cx="0" cy="0"/>
+          <a:chOff x="0" y="0"/>
+          <a:chExt cx="0" cy="0"/>
+        </a:xfrm>
+      </p:grpSpPr>
       <p:sp>
         <p:nvSpPr>
           <p:cNvPr id="2" name="Title 1"/>
@@ -9836,7 +10060,7 @@
           </a:xfrm>
         </p:spPr>
         <p:txBody>
-          <a:bodyPr anchor="ctr" lIns="45720"/>
+          <a:bodyPr lIns="45720" anchor="ctr"/>
           <a:lstStyle/>
           <a:p>
             <a:pPr algn="l"/>
@@ -9869,7 +10093,7 @@
           <a:noFill/>
         </p:spPr>
         <p:txBody>
-          <a:bodyPr wrap="square" lIns="45720" rIns="45720" tIns="27432" bIns="27432" anchor="t"/>
+          <a:bodyPr wrap="square" lIns="45720" tIns="27432" rIns="45720" bIns="27432" anchor="t"/>
           <a:lstStyle/>
           <a:p>
             <a:pPr algn="l">
@@ -9944,7 +10168,7 @@
           <a:noFill/>
         </p:spPr>
         <p:txBody>
-          <a:bodyPr wrap="square" lIns="45720" rIns="45720" tIns="27432" bIns="27432" anchor="t"/>
+          <a:bodyPr wrap="square" lIns="45720" tIns="27432" rIns="45720" bIns="27432" anchor="t"/>
           <a:lstStyle/>
           <a:p>
             <a:pPr algn="l">
@@ -9956,13 +10180,31 @@
               </a:spcAft>
             </a:pPr>
             <a:r>
-              <a:rPr sz="850" b="0" i="0">
+              <a:rPr sz="850" b="0" i="0" dirty="0">
                 <a:solidFill>
                   <a:srgbClr val="808080"/>
                 </a:solidFill>
                 <a:latin typeface="Arial"/>
               </a:rPr>
-              <a:t>ACOD310 mid-term  ·  17 October 2026  ·  Sumant Varanasi &amp; Parva Chaudhary</a:t>
+              <a:t>ACOD310 mid-term  ·  1</a:t>
+            </a:r>
+            <a:r>
+              <a:rPr lang="en-IN" sz="850" b="0" i="0" dirty="0">
+                <a:solidFill>
+                  <a:srgbClr val="808080"/>
+                </a:solidFill>
+                <a:latin typeface="Arial"/>
+              </a:rPr>
+              <a:t>6</a:t>
+            </a:r>
+            <a:r>
+              <a:rPr sz="850" b="0" i="0" dirty="0">
+                <a:solidFill>
+                  <a:srgbClr val="808080"/>
+                </a:solidFill>
+                <a:latin typeface="Arial"/>
+              </a:rPr>
+              <a:t> October 2026  ·  Sumant Varanasi &amp; Parva Chaudhary</a:t>
             </a:r>
           </a:p>
         </p:txBody>
@@ -9984,7 +10226,7 @@
           <a:noFill/>
         </p:spPr>
         <p:txBody>
-          <a:bodyPr wrap="square" lIns="45720" rIns="45720" tIns="27432" bIns="27432" anchor="t"/>
+          <a:bodyPr wrap="square" lIns="45720" tIns="27432" rIns="45720" bIns="27432" anchor="t"/>
           <a:lstStyle/>
           <a:p>
             <a:pPr algn="r">
@@ -10048,7 +10290,9 @@
         <p:txBody>
           <a:bodyPr rtlCol="0" anchor="ctr"/>
           <a:lstStyle/>
-          <a:p/>
+          <a:p>
+            <a:endParaRPr/>
+          </a:p>
         </p:txBody>
       </p:sp>
       <p:sp>
@@ -10068,7 +10312,7 @@
           <a:noFill/>
         </p:spPr>
         <p:txBody>
-          <a:bodyPr wrap="square" lIns="45720" rIns="45720" tIns="27432" bIns="27432" anchor="t"/>
+          <a:bodyPr wrap="square" lIns="45720" tIns="27432" rIns="45720" bIns="27432" anchor="t"/>
           <a:lstStyle/>
           <a:p>
             <a:pPr algn="l">
@@ -10108,7 +10352,7 @@
           <a:noFill/>
         </p:spPr>
         <p:txBody>
-          <a:bodyPr wrap="square" lIns="45720" rIns="45720" tIns="27432" bIns="27432" anchor="t"/>
+          <a:bodyPr wrap="square" lIns="45720" tIns="27432" rIns="45720" bIns="27432" anchor="t"/>
           <a:lstStyle/>
           <a:p>
             <a:pPr algn="l">
@@ -10172,6 +10416,7 @@
           <a:lstStyle/>
           <a:p>
             <a:pPr algn="ctr"/>
+            <a:endParaRPr/>
           </a:p>
         </p:txBody>
       </p:sp>
@@ -10216,7 +10461,9 @@
         <p:txBody>
           <a:bodyPr rtlCol="0" anchor="ctr"/>
           <a:lstStyle/>
-          <a:p/>
+          <a:p>
+            <a:endParaRPr/>
+          </a:p>
         </p:txBody>
       </p:sp>
       <p:sp>
@@ -10236,7 +10483,7 @@
           <a:noFill/>
         </p:spPr>
         <p:txBody>
-          <a:bodyPr wrap="square" lIns="45720" rIns="45720" tIns="27432" bIns="27432" anchor="t"/>
+          <a:bodyPr wrap="square" lIns="45720" tIns="27432" rIns="45720" bIns="27432" anchor="t"/>
           <a:lstStyle/>
           <a:p>
             <a:pPr algn="l">
@@ -10276,7 +10523,7 @@
           <a:noFill/>
         </p:spPr>
         <p:txBody>
-          <a:bodyPr wrap="square" lIns="45720" rIns="45720" tIns="27432" bIns="27432" anchor="t"/>
+          <a:bodyPr wrap="square" lIns="45720" tIns="27432" rIns="45720" bIns="27432" anchor="t"/>
           <a:lstStyle/>
           <a:p>
             <a:pPr algn="l">
@@ -10340,6 +10587,7 @@
           <a:lstStyle/>
           <a:p>
             <a:pPr algn="ctr"/>
+            <a:endParaRPr/>
           </a:p>
         </p:txBody>
       </p:sp>
@@ -10384,7 +10632,9 @@
         <p:txBody>
           <a:bodyPr rtlCol="0" anchor="ctr"/>
           <a:lstStyle/>
-          <a:p/>
+          <a:p>
+            <a:endParaRPr/>
+          </a:p>
         </p:txBody>
       </p:sp>
       <p:sp>
@@ -10404,7 +10654,7 @@
           <a:noFill/>
         </p:spPr>
         <p:txBody>
-          <a:bodyPr wrap="square" lIns="45720" rIns="45720" tIns="27432" bIns="27432" anchor="t"/>
+          <a:bodyPr wrap="square" lIns="45720" tIns="27432" rIns="45720" bIns="27432" anchor="t"/>
           <a:lstStyle/>
           <a:p>
             <a:pPr algn="l">
@@ -10444,7 +10694,7 @@
           <a:noFill/>
         </p:spPr>
         <p:txBody>
-          <a:bodyPr wrap="square" lIns="45720" rIns="45720" tIns="27432" bIns="27432" anchor="t"/>
+          <a:bodyPr wrap="square" lIns="45720" tIns="27432" rIns="45720" bIns="27432" anchor="t"/>
           <a:lstStyle/>
           <a:p>
             <a:pPr algn="l">
@@ -10508,6 +10758,7 @@
           <a:lstStyle/>
           <a:p>
             <a:pPr algn="ctr"/>
+            <a:endParaRPr/>
           </a:p>
         </p:txBody>
       </p:sp>
@@ -10552,7 +10803,9 @@
         <p:txBody>
           <a:bodyPr rtlCol="0" anchor="ctr"/>
           <a:lstStyle/>
-          <a:p/>
+          <a:p>
+            <a:endParaRPr/>
+          </a:p>
         </p:txBody>
       </p:sp>
       <p:sp>
@@ -10572,7 +10825,7 @@
           <a:noFill/>
         </p:spPr>
         <p:txBody>
-          <a:bodyPr wrap="square" lIns="45720" rIns="45720" tIns="27432" bIns="27432" anchor="t"/>
+          <a:bodyPr wrap="square" lIns="45720" tIns="27432" rIns="45720" bIns="27432" anchor="t"/>
           <a:lstStyle/>
           <a:p>
             <a:pPr algn="l">
@@ -10612,7 +10865,7 @@
           <a:noFill/>
         </p:spPr>
         <p:txBody>
-          <a:bodyPr wrap="square" lIns="45720" rIns="45720" tIns="27432" bIns="27432" anchor="t"/>
+          <a:bodyPr wrap="square" lIns="45720" tIns="27432" rIns="45720" bIns="27432" anchor="t"/>
           <a:lstStyle/>
           <a:p>
             <a:pPr algn="l">
@@ -10652,7 +10905,7 @@
           <a:noFill/>
         </p:spPr>
         <p:txBody>
-          <a:bodyPr wrap="square" lIns="45720" rIns="45720" tIns="27432" bIns="27432" anchor="t"/>
+          <a:bodyPr wrap="square" lIns="45720" tIns="27432" rIns="45720" bIns="27432" anchor="t"/>
           <a:lstStyle/>
           <a:p>
             <a:pPr algn="ctr">
@@ -10716,7 +10969,9 @@
         <p:txBody>
           <a:bodyPr rtlCol="0" anchor="ctr"/>
           <a:lstStyle/>
-          <a:p/>
+          <a:p>
+            <a:endParaRPr/>
+          </a:p>
         </p:txBody>
       </p:sp>
       <p:sp>
@@ -10756,7 +11011,7 @@
           </a:fontRef>
         </p:style>
         <p:txBody>
-          <a:bodyPr rtlCol="0" anchor="ctr" lIns="0" rIns="0" tIns="0" bIns="0"/>
+          <a:bodyPr lIns="0" tIns="0" rIns="0" bIns="0" rtlCol="0" anchor="ctr"/>
           <a:lstStyle/>
           <a:p>
             <a:pPr algn="ctr"/>
@@ -10789,7 +11044,7 @@
           <a:noFill/>
         </p:spPr>
         <p:txBody>
-          <a:bodyPr wrap="square" lIns="45720" rIns="45720" tIns="27432" bIns="27432" anchor="t"/>
+          <a:bodyPr wrap="square" lIns="45720" tIns="27432" rIns="45720" bIns="27432" anchor="t"/>
           <a:lstStyle/>
           <a:p>
             <a:pPr algn="l">
@@ -10829,10 +11084,10 @@
           <a:noFill/>
         </p:spPr>
         <p:txBody>
-          <a:bodyPr wrap="square" lIns="45720" rIns="45720" tIns="27432" bIns="27432" anchor="t"/>
-          <a:lstStyle/>
-          <a:p>
-            <a:pPr algn="l" marL="155448" indent="-155448">
+          <a:bodyPr wrap="square" lIns="45720" tIns="27432" rIns="45720" bIns="27432" anchor="t"/>
+          <a:lstStyle/>
+          <a:p>
+            <a:pPr marL="155448" indent="-155448" algn="l">
               <a:lnSpc>
                 <a:spcPct val="106000"/>
               </a:lnSpc>
@@ -10852,7 +11107,7 @@
             </a:r>
           </a:p>
           <a:p>
-            <a:pPr algn="l" marL="155448" indent="-155448">
+            <a:pPr marL="155448" indent="-155448" algn="l">
               <a:lnSpc>
                 <a:spcPct val="106000"/>
               </a:lnSpc>
@@ -10872,7 +11127,7 @@
             </a:r>
           </a:p>
           <a:p>
-            <a:pPr algn="l" marL="155448" indent="-155448">
+            <a:pPr marL="155448" indent="-155448" algn="l">
               <a:lnSpc>
                 <a:spcPct val="106000"/>
               </a:lnSpc>
@@ -10934,7 +11189,9 @@
         <p:txBody>
           <a:bodyPr rtlCol="0" anchor="ctr"/>
           <a:lstStyle/>
-          <a:p/>
+          <a:p>
+            <a:endParaRPr/>
+          </a:p>
         </p:txBody>
       </p:sp>
       <p:sp>
@@ -10974,7 +11231,7 @@
           </a:fontRef>
         </p:style>
         <p:txBody>
-          <a:bodyPr rtlCol="0" anchor="ctr" lIns="0" rIns="0" tIns="0" bIns="0"/>
+          <a:bodyPr lIns="0" tIns="0" rIns="0" bIns="0" rtlCol="0" anchor="ctr"/>
           <a:lstStyle/>
           <a:p>
             <a:pPr algn="ctr"/>
@@ -11007,7 +11264,7 @@
           <a:noFill/>
         </p:spPr>
         <p:txBody>
-          <a:bodyPr wrap="square" lIns="45720" rIns="45720" tIns="27432" bIns="27432" anchor="t"/>
+          <a:bodyPr wrap="square" lIns="45720" tIns="27432" rIns="45720" bIns="27432" anchor="t"/>
           <a:lstStyle/>
           <a:p>
             <a:pPr algn="l">
@@ -11047,10 +11304,10 @@
           <a:noFill/>
         </p:spPr>
         <p:txBody>
-          <a:bodyPr wrap="square" lIns="45720" rIns="45720" tIns="27432" bIns="27432" anchor="t"/>
-          <a:lstStyle/>
-          <a:p>
-            <a:pPr algn="l" marL="155448" indent="-155448">
+          <a:bodyPr wrap="square" lIns="45720" tIns="27432" rIns="45720" bIns="27432" anchor="t"/>
+          <a:lstStyle/>
+          <a:p>
+            <a:pPr marL="155448" indent="-155448" algn="l">
               <a:lnSpc>
                 <a:spcPct val="106000"/>
               </a:lnSpc>
@@ -11070,7 +11327,7 @@
             </a:r>
           </a:p>
           <a:p>
-            <a:pPr algn="l" marL="155448" indent="-155448">
+            <a:pPr marL="155448" indent="-155448" algn="l">
               <a:lnSpc>
                 <a:spcPct val="106000"/>
               </a:lnSpc>
@@ -11090,7 +11347,7 @@
             </a:r>
           </a:p>
           <a:p>
-            <a:pPr algn="l" marL="155448" indent="-155448">
+            <a:pPr marL="155448" indent="-155448" algn="l">
               <a:lnSpc>
                 <a:spcPct val="106000"/>
               </a:lnSpc>
@@ -11152,7 +11409,9 @@
         <p:txBody>
           <a:bodyPr rtlCol="0" anchor="ctr"/>
           <a:lstStyle/>
-          <a:p/>
+          <a:p>
+            <a:endParaRPr/>
+          </a:p>
         </p:txBody>
       </p:sp>
       <p:sp>
@@ -11192,7 +11451,7 @@
           </a:fontRef>
         </p:style>
         <p:txBody>
-          <a:bodyPr rtlCol="0" anchor="ctr" lIns="0" rIns="0" tIns="0" bIns="0"/>
+          <a:bodyPr lIns="0" tIns="0" rIns="0" bIns="0" rtlCol="0" anchor="ctr"/>
           <a:lstStyle/>
           <a:p>
             <a:pPr algn="ctr"/>
@@ -11225,7 +11484,7 @@
           <a:noFill/>
         </p:spPr>
         <p:txBody>
-          <a:bodyPr wrap="square" lIns="45720" rIns="45720" tIns="27432" bIns="27432" anchor="t"/>
+          <a:bodyPr wrap="square" lIns="45720" tIns="27432" rIns="45720" bIns="27432" anchor="t"/>
           <a:lstStyle/>
           <a:p>
             <a:pPr algn="l">
@@ -11265,10 +11524,10 @@
           <a:noFill/>
         </p:spPr>
         <p:txBody>
-          <a:bodyPr wrap="square" lIns="45720" rIns="45720" tIns="27432" bIns="27432" anchor="t"/>
-          <a:lstStyle/>
-          <a:p>
-            <a:pPr algn="l" marL="155448" indent="-155448">
+          <a:bodyPr wrap="square" lIns="45720" tIns="27432" rIns="45720" bIns="27432" anchor="t"/>
+          <a:lstStyle/>
+          <a:p>
+            <a:pPr marL="155448" indent="-155448" algn="l">
               <a:lnSpc>
                 <a:spcPct val="106000"/>
               </a:lnSpc>
@@ -11288,7 +11547,7 @@
             </a:r>
           </a:p>
           <a:p>
-            <a:pPr algn="l" marL="155448" indent="-155448">
+            <a:pPr marL="155448" indent="-155448" algn="l">
               <a:lnSpc>
                 <a:spcPct val="106000"/>
               </a:lnSpc>
@@ -11308,7 +11567,7 @@
             </a:r>
           </a:p>
           <a:p>
-            <a:pPr algn="l" marL="155448" indent="-155448">
+            <a:pPr marL="155448" indent="-155448" algn="l">
               <a:lnSpc>
                 <a:spcPct val="106000"/>
               </a:lnSpc>
@@ -11370,7 +11629,9 @@
         <p:txBody>
           <a:bodyPr rtlCol="0" anchor="ctr"/>
           <a:lstStyle/>
-          <a:p/>
+          <a:p>
+            <a:endParaRPr/>
+          </a:p>
         </p:txBody>
       </p:sp>
       <p:sp>
@@ -11390,7 +11651,7 @@
           <a:noFill/>
         </p:spPr>
         <p:txBody>
-          <a:bodyPr wrap="square" lIns="45720" rIns="45720" tIns="27432" bIns="27432" anchor="t"/>
+          <a:bodyPr wrap="square" lIns="45720" tIns="27432" rIns="45720" bIns="27432" anchor="t"/>
           <a:lstStyle/>
           <a:p>
             <a:pPr algn="l">
@@ -11430,7 +11691,7 @@
           <a:noFill/>
         </p:spPr>
         <p:txBody>
-          <a:bodyPr wrap="square" lIns="45720" rIns="45720" tIns="27432" bIns="27432" anchor="t"/>
+          <a:bodyPr wrap="square" lIns="45720" tIns="27432" rIns="45720" bIns="27432" anchor="t"/>
           <a:lstStyle/>
           <a:p>
             <a:pPr algn="l">
@@ -11442,7 +11703,7 @@
               </a:spcAft>
             </a:pPr>
             <a:r>
-              <a:rPr sz="1150" b="1" i="0">
+              <a:rPr sz="1150" b="1" i="0" dirty="0">
                 <a:solidFill>
                   <a:srgbClr val="FFFFFF"/>
                 </a:solidFill>
@@ -11451,13 +11712,31 @@
               <a:t>Given: </a:t>
             </a:r>
             <a:r>
-              <a:rPr sz="1150" b="0" i="0">
+              <a:rPr sz="1150" b="0" i="0" dirty="0">
                 <a:solidFill>
                   <a:srgbClr val="FFFFFF"/>
                 </a:solidFill>
                 <a:latin typeface="Arial"/>
               </a:rPr>
-              <a:t>the run log the operator already keeps — the set points and the GC printout of what came out.</a:t>
+              <a:t>the run log the operator already keeps </a:t>
+            </a:r>
+            <a:r>
+              <a:rPr lang="en-IN" sz="1150" b="0" i="0" dirty="0">
+                <a:solidFill>
+                  <a:srgbClr val="FFFFFF"/>
+                </a:solidFill>
+                <a:latin typeface="Arial"/>
+              </a:rPr>
+              <a:t>-</a:t>
+            </a:r>
+            <a:r>
+              <a:rPr sz="1150" b="0" i="0" dirty="0">
+                <a:solidFill>
+                  <a:srgbClr val="FFFFFF"/>
+                </a:solidFill>
+                <a:latin typeface="Arial"/>
+              </a:rPr>
+              <a:t> the set points and the GC printout of what came out.</a:t>
             </a:r>
           </a:p>
           <a:p>
@@ -11470,7 +11749,7 @@
               </a:spcAft>
             </a:pPr>
             <a:r>
-              <a:rPr sz="1150" b="1" i="0">
+              <a:rPr sz="1150" b="1" i="0" dirty="0">
                 <a:solidFill>
                   <a:srgbClr val="FFFFFF"/>
                 </a:solidFill>
@@ -11479,13 +11758,22 @@
               <a:t>Objective: </a:t>
             </a:r>
             <a:r>
-              <a:rPr sz="1150" b="0" i="0">
+              <a:rPr sz="1150" b="0" i="0" dirty="0" err="1">
                 <a:solidFill>
                   <a:srgbClr val="FFFFFF"/>
                 </a:solidFill>
                 <a:latin typeface="Arial"/>
               </a:rPr>
-              <a:t>maximise profit per hour (product value − feed − compression − by-products, worked out from the GC reading), subject to a product spec, safety ranges and one allowed step per run.</a:t>
+              <a:t>maximise</a:t>
+            </a:r>
+            <a:r>
+              <a:rPr sz="1150" b="0" i="0" dirty="0">
+                <a:solidFill>
+                  <a:srgbClr val="FFFFFF"/>
+                </a:solidFill>
+                <a:latin typeface="Arial"/>
+              </a:rPr>
+              <a:t> profit per hour (product value − feed − compression − by-products, worked out from the GC reading), subject to a product spec, safety ranges and one allowed step per run.</a:t>
             </a:r>
           </a:p>
           <a:p>
@@ -11498,7 +11786,7 @@
               </a:spcAft>
             </a:pPr>
             <a:r>
-              <a:rPr sz="1150" b="1" i="0">
+              <a:rPr sz="1150" b="1" i="0" dirty="0">
                 <a:solidFill>
                   <a:srgbClr val="FFFFFF"/>
                 </a:solidFill>
@@ -11507,13 +11795,31 @@
               <a:t>Deliver: </a:t>
             </a:r>
             <a:r>
-              <a:rPr sz="1150" b="0" i="0">
+              <a:rPr sz="1150" b="0" i="0" dirty="0">
                 <a:solidFill>
                   <a:srgbClr val="FFFFFF"/>
                 </a:solidFill>
                 <a:latin typeface="Arial"/>
               </a:rPr>
-              <a:t>the next run, the reason, the expected profit and whether another run is worth its cost — reaching the best operating point in fewer runs than the usual rules of thumb, for someone who knows neither kinetics nor machine learning.</a:t>
+              <a:t>the next run, the reason, the expected profit and whether another run is worth its cost </a:t>
+            </a:r>
+            <a:r>
+              <a:rPr lang="en-IN" sz="1150" b="0" i="0" dirty="0">
+                <a:solidFill>
+                  <a:srgbClr val="FFFFFF"/>
+                </a:solidFill>
+                <a:latin typeface="Arial"/>
+              </a:rPr>
+              <a:t>-</a:t>
+            </a:r>
+            <a:r>
+              <a:rPr sz="1150" b="0" i="0" dirty="0">
+                <a:solidFill>
+                  <a:srgbClr val="FFFFFF"/>
+                </a:solidFill>
+                <a:latin typeface="Arial"/>
+              </a:rPr>
+              <a:t> reaching the best operating point in fewer runs than the usual rules of thumb, for someone who knows neither kinetics nor machine learning.</a:t>
             </a:r>
           </a:p>
         </p:txBody>
@@ -11527,7 +11833,7 @@
 </file>
 
 <file path=ppt/slides/slide4.xml><?xml version="1.0" encoding="utf-8"?>
-<p:sld xmlns:a="http://schemas.openxmlformats.org/drawingml/2006/main" xmlns:p="http://schemas.openxmlformats.org/presentationml/2006/main" xmlns:r="http://schemas.openxmlformats.org/officeDocument/2006/relationships">
+<p:sld xmlns:a="http://schemas.openxmlformats.org/drawingml/2006/main" xmlns:r="http://schemas.openxmlformats.org/officeDocument/2006/relationships" xmlns:p="http://schemas.openxmlformats.org/presentationml/2006/main">
   <p:cSld>
     <p:spTree>
       <p:nvGrpSpPr>
@@ -11535,7 +11841,14 @@
         <p:cNvGrpSpPr/>
         <p:nvPr/>
       </p:nvGrpSpPr>
-      <p:grpSpPr/>
+      <p:grpSpPr>
+        <a:xfrm>
+          <a:off x="0" y="0"/>
+          <a:ext cx="0" cy="0"/>
+          <a:chOff x="0" y="0"/>
+          <a:chExt cx="0" cy="0"/>
+        </a:xfrm>
+      </p:grpSpPr>
       <p:sp>
         <p:nvSpPr>
           <p:cNvPr id="2" name="Title 1"/>
@@ -11553,7 +11866,7 @@
           </a:xfrm>
         </p:spPr>
         <p:txBody>
-          <a:bodyPr anchor="ctr" lIns="45720"/>
+          <a:bodyPr lIns="45720" anchor="ctr"/>
           <a:lstStyle/>
           <a:p>
             <a:pPr algn="l"/>
@@ -11586,7 +11899,7 @@
           <a:noFill/>
         </p:spPr>
         <p:txBody>
-          <a:bodyPr wrap="square" lIns="45720" rIns="45720" tIns="27432" bIns="27432" anchor="t"/>
+          <a:bodyPr wrap="square" lIns="45720" tIns="27432" rIns="45720" bIns="27432" anchor="t"/>
           <a:lstStyle/>
           <a:p>
             <a:pPr algn="l">
@@ -11661,7 +11974,7 @@
           <a:noFill/>
         </p:spPr>
         <p:txBody>
-          <a:bodyPr wrap="square" lIns="45720" rIns="45720" tIns="27432" bIns="27432" anchor="t"/>
+          <a:bodyPr wrap="square" lIns="45720" tIns="27432" rIns="45720" bIns="27432" anchor="t"/>
           <a:lstStyle/>
           <a:p>
             <a:pPr algn="l">
@@ -11673,13 +11986,31 @@
               </a:spcAft>
             </a:pPr>
             <a:r>
-              <a:rPr sz="850" b="0" i="0">
+              <a:rPr sz="850" b="0" i="0" dirty="0">
                 <a:solidFill>
                   <a:srgbClr val="808080"/>
                 </a:solidFill>
                 <a:latin typeface="Arial"/>
               </a:rPr>
-              <a:t>ACOD310 mid-term  ·  17 October 2026  ·  Sumant Varanasi &amp; Parva Chaudhary</a:t>
+              <a:t>ACOD310 mid-term  ·  1</a:t>
+            </a:r>
+            <a:r>
+              <a:rPr lang="en-IN" sz="850" b="0" i="0" dirty="0">
+                <a:solidFill>
+                  <a:srgbClr val="808080"/>
+                </a:solidFill>
+                <a:latin typeface="Arial"/>
+              </a:rPr>
+              <a:t>6</a:t>
+            </a:r>
+            <a:r>
+              <a:rPr sz="850" b="0" i="0" dirty="0">
+                <a:solidFill>
+                  <a:srgbClr val="808080"/>
+                </a:solidFill>
+                <a:latin typeface="Arial"/>
+              </a:rPr>
+              <a:t> October 2026  ·  Sumant Varanasi &amp; Parva Chaudhary</a:t>
             </a:r>
           </a:p>
         </p:txBody>
@@ -11701,7 +12032,7 @@
           <a:noFill/>
         </p:spPr>
         <p:txBody>
-          <a:bodyPr wrap="square" lIns="45720" rIns="45720" tIns="27432" bIns="27432" anchor="t"/>
+          <a:bodyPr wrap="square" lIns="45720" tIns="27432" rIns="45720" bIns="27432" anchor="t"/>
           <a:lstStyle/>
           <a:p>
             <a:pPr algn="r">
@@ -11765,7 +12096,9 @@
         <p:txBody>
           <a:bodyPr rtlCol="0" anchor="ctr"/>
           <a:lstStyle/>
-          <a:p/>
+          <a:p>
+            <a:endParaRPr/>
+          </a:p>
         </p:txBody>
       </p:sp>
       <p:sp>
@@ -11785,7 +12118,7 @@
           <a:noFill/>
         </p:spPr>
         <p:txBody>
-          <a:bodyPr wrap="square" lIns="45720" rIns="45720" tIns="27432" bIns="27432" anchor="t"/>
+          <a:bodyPr wrap="square" lIns="45720" tIns="27432" rIns="45720" bIns="27432" anchor="t"/>
           <a:lstStyle/>
           <a:p>
             <a:pPr algn="l">
@@ -11825,7 +12158,7 @@
           <a:noFill/>
         </p:spPr>
         <p:txBody>
-          <a:bodyPr wrap="square" lIns="45720" rIns="45720" tIns="27432" bIns="27432" anchor="t"/>
+          <a:bodyPr wrap="square" lIns="45720" tIns="27432" rIns="45720" bIns="27432" anchor="t"/>
           <a:lstStyle/>
           <a:p>
             <a:pPr algn="l">
@@ -11865,10 +12198,10 @@
           <a:noFill/>
         </p:spPr>
         <p:txBody>
-          <a:bodyPr wrap="square" lIns="45720" rIns="45720" tIns="27432" bIns="27432" anchor="t"/>
-          <a:lstStyle/>
-          <a:p>
-            <a:pPr algn="l" marL="155448" indent="-155448">
+          <a:bodyPr wrap="square" lIns="45720" tIns="27432" rIns="45720" bIns="27432" anchor="t"/>
+          <a:lstStyle/>
+          <a:p>
+            <a:pPr marL="155448" indent="-155448" algn="l">
               <a:lnSpc>
                 <a:spcPct val="104000"/>
               </a:lnSpc>
@@ -11897,7 +12230,7 @@
             </a:r>
           </a:p>
           <a:p>
-            <a:pPr algn="l" marL="155448" indent="-155448">
+            <a:pPr marL="155448" indent="-155448" algn="l">
               <a:lnSpc>
                 <a:spcPct val="104000"/>
               </a:lnSpc>
@@ -11926,7 +12259,7 @@
             </a:r>
           </a:p>
           <a:p>
-            <a:pPr algn="l" marL="155448" indent="-155448">
+            <a:pPr marL="155448" indent="-155448" algn="l">
               <a:lnSpc>
                 <a:spcPct val="104000"/>
               </a:lnSpc>
@@ -11955,7 +12288,7 @@
             </a:r>
           </a:p>
           <a:p>
-            <a:pPr algn="l" marL="155448" indent="-155448">
+            <a:pPr marL="155448" indent="-155448" algn="l">
               <a:lnSpc>
                 <a:spcPct val="104000"/>
               </a:lnSpc>
@@ -12026,7 +12359,9 @@
         <p:txBody>
           <a:bodyPr rtlCol="0" anchor="ctr"/>
           <a:lstStyle/>
-          <a:p/>
+          <a:p>
+            <a:endParaRPr/>
+          </a:p>
         </p:txBody>
       </p:sp>
       <p:sp>
@@ -12046,7 +12381,7 @@
           <a:noFill/>
         </p:spPr>
         <p:txBody>
-          <a:bodyPr wrap="square" lIns="45720" rIns="45720" tIns="27432" bIns="27432" anchor="t"/>
+          <a:bodyPr wrap="square" lIns="45720" tIns="27432" rIns="45720" bIns="27432" anchor="t"/>
           <a:lstStyle/>
           <a:p>
             <a:pPr algn="l">
@@ -12086,7 +12421,7 @@
           <a:noFill/>
         </p:spPr>
         <p:txBody>
-          <a:bodyPr wrap="square" lIns="45720" rIns="45720" tIns="27432" bIns="27432" anchor="t"/>
+          <a:bodyPr wrap="square" lIns="45720" tIns="27432" rIns="45720" bIns="27432" anchor="t"/>
           <a:lstStyle/>
           <a:p>
             <a:pPr algn="l">
@@ -12126,10 +12461,10 @@
           <a:noFill/>
         </p:spPr>
         <p:txBody>
-          <a:bodyPr wrap="square" lIns="45720" rIns="45720" tIns="27432" bIns="27432" anchor="t"/>
-          <a:lstStyle/>
-          <a:p>
-            <a:pPr algn="l" marL="155448" indent="-155448">
+          <a:bodyPr wrap="square" lIns="45720" tIns="27432" rIns="45720" bIns="27432" anchor="t"/>
+          <a:lstStyle/>
+          <a:p>
+            <a:pPr marL="155448" indent="-155448" algn="l">
               <a:lnSpc>
                 <a:spcPct val="104000"/>
               </a:lnSpc>
@@ -12158,7 +12493,7 @@
             </a:r>
           </a:p>
           <a:p>
-            <a:pPr algn="l" marL="155448" indent="-155448">
+            <a:pPr marL="155448" indent="-155448" algn="l">
               <a:lnSpc>
                 <a:spcPct val="104000"/>
               </a:lnSpc>
@@ -12187,7 +12522,7 @@
             </a:r>
           </a:p>
           <a:p>
-            <a:pPr algn="l" marL="155448" indent="-155448">
+            <a:pPr marL="155448" indent="-155448" algn="l">
               <a:lnSpc>
                 <a:spcPct val="104000"/>
               </a:lnSpc>
@@ -12216,7 +12551,7 @@
             </a:r>
           </a:p>
           <a:p>
-            <a:pPr algn="l" marL="155448" indent="-155448">
+            <a:pPr marL="155448" indent="-155448" algn="l">
               <a:lnSpc>
                 <a:spcPct val="104000"/>
               </a:lnSpc>
@@ -12287,7 +12622,9 @@
         <p:txBody>
           <a:bodyPr rtlCol="0" anchor="ctr"/>
           <a:lstStyle/>
-          <a:p/>
+          <a:p>
+            <a:endParaRPr/>
+          </a:p>
         </p:txBody>
       </p:sp>
       <p:sp>
@@ -12307,7 +12644,7 @@
           <a:noFill/>
         </p:spPr>
         <p:txBody>
-          <a:bodyPr wrap="square" lIns="45720" rIns="45720" tIns="27432" bIns="27432" anchor="t"/>
+          <a:bodyPr wrap="square" lIns="45720" tIns="27432" rIns="45720" bIns="27432" anchor="t"/>
           <a:lstStyle/>
           <a:p>
             <a:pPr algn="l">
@@ -12347,7 +12684,7 @@
           <a:noFill/>
         </p:spPr>
         <p:txBody>
-          <a:bodyPr wrap="square" lIns="45720" rIns="45720" tIns="27432" bIns="27432" anchor="t"/>
+          <a:bodyPr wrap="square" lIns="45720" tIns="27432" rIns="45720" bIns="27432" anchor="t"/>
           <a:lstStyle/>
           <a:p>
             <a:pPr algn="l">
@@ -12387,10 +12724,10 @@
           <a:noFill/>
         </p:spPr>
         <p:txBody>
-          <a:bodyPr wrap="square" lIns="45720" rIns="45720" tIns="27432" bIns="27432" anchor="t"/>
-          <a:lstStyle/>
-          <a:p>
-            <a:pPr algn="l" marL="155448" indent="-155448">
+          <a:bodyPr wrap="square" lIns="45720" tIns="27432" rIns="45720" bIns="27432" anchor="t"/>
+          <a:lstStyle/>
+          <a:p>
+            <a:pPr marL="155448" indent="-155448" algn="l">
               <a:lnSpc>
                 <a:spcPct val="104000"/>
               </a:lnSpc>
@@ -12419,7 +12756,7 @@
             </a:r>
           </a:p>
           <a:p>
-            <a:pPr algn="l" marL="155448" indent="-155448">
+            <a:pPr marL="155448" indent="-155448" algn="l">
               <a:lnSpc>
                 <a:spcPct val="104000"/>
               </a:lnSpc>
@@ -12490,7 +12827,9 @@
         <p:txBody>
           <a:bodyPr rtlCol="0" anchor="ctr"/>
           <a:lstStyle/>
-          <a:p/>
+          <a:p>
+            <a:endParaRPr/>
+          </a:p>
         </p:txBody>
       </p:sp>
       <p:sp>
@@ -12510,7 +12849,7 @@
           <a:noFill/>
         </p:spPr>
         <p:txBody>
-          <a:bodyPr wrap="square" lIns="45720" rIns="45720" tIns="27432" bIns="27432" anchor="t"/>
+          <a:bodyPr wrap="square" lIns="45720" tIns="27432" rIns="45720" bIns="27432" anchor="t"/>
           <a:lstStyle/>
           <a:p>
             <a:pPr algn="l">
@@ -12550,7 +12889,7 @@
           <a:noFill/>
         </p:spPr>
         <p:txBody>
-          <a:bodyPr wrap="square" lIns="45720" rIns="45720" tIns="27432" bIns="27432" anchor="t"/>
+          <a:bodyPr wrap="square" lIns="45720" tIns="27432" rIns="45720" bIns="27432" anchor="t"/>
           <a:lstStyle/>
           <a:p>
             <a:pPr algn="l">
@@ -12582,7 +12921,7 @@
 </file>
 
 <file path=ppt/slides/slide5.xml><?xml version="1.0" encoding="utf-8"?>
-<p:sld xmlns:a="http://schemas.openxmlformats.org/drawingml/2006/main" xmlns:p="http://schemas.openxmlformats.org/presentationml/2006/main" xmlns:r="http://schemas.openxmlformats.org/officeDocument/2006/relationships">
+<p:sld xmlns:a="http://schemas.openxmlformats.org/drawingml/2006/main" xmlns:r="http://schemas.openxmlformats.org/officeDocument/2006/relationships" xmlns:p="http://schemas.openxmlformats.org/presentationml/2006/main">
   <p:cSld>
     <p:spTree>
       <p:nvGrpSpPr>
@@ -12590,7 +12929,14 @@
         <p:cNvGrpSpPr/>
         <p:nvPr/>
       </p:nvGrpSpPr>
-      <p:grpSpPr/>
+      <p:grpSpPr>
+        <a:xfrm>
+          <a:off x="0" y="0"/>
+          <a:ext cx="0" cy="0"/>
+          <a:chOff x="0" y="0"/>
+          <a:chExt cx="0" cy="0"/>
+        </a:xfrm>
+      </p:grpSpPr>
       <p:sp>
         <p:nvSpPr>
           <p:cNvPr id="2" name="Title 1"/>
@@ -12608,7 +12954,7 @@
           </a:xfrm>
         </p:spPr>
         <p:txBody>
-          <a:bodyPr anchor="ctr" lIns="45720"/>
+          <a:bodyPr lIns="45720" anchor="ctr"/>
           <a:lstStyle/>
           <a:p>
             <a:pPr algn="l"/>
@@ -12641,7 +12987,7 @@
           <a:noFill/>
         </p:spPr>
         <p:txBody>
-          <a:bodyPr wrap="square" lIns="45720" rIns="45720" tIns="27432" bIns="27432" anchor="t"/>
+          <a:bodyPr wrap="square" lIns="45720" tIns="27432" rIns="45720" bIns="27432" anchor="t"/>
           <a:lstStyle/>
           <a:p>
             <a:pPr algn="l">
@@ -12716,7 +13062,7 @@
           <a:noFill/>
         </p:spPr>
         <p:txBody>
-          <a:bodyPr wrap="square" lIns="45720" rIns="45720" tIns="27432" bIns="27432" anchor="t"/>
+          <a:bodyPr wrap="square" lIns="45720" tIns="27432" rIns="45720" bIns="27432" anchor="t"/>
           <a:lstStyle/>
           <a:p>
             <a:pPr algn="l">
@@ -12728,13 +13074,31 @@
               </a:spcAft>
             </a:pPr>
             <a:r>
-              <a:rPr sz="850" b="0" i="0">
+              <a:rPr sz="850" b="0" i="0" dirty="0">
                 <a:solidFill>
                   <a:srgbClr val="808080"/>
                 </a:solidFill>
                 <a:latin typeface="Arial"/>
               </a:rPr>
-              <a:t>ACOD310 mid-term  ·  17 October 2026  ·  Sumant Varanasi &amp; Parva Chaudhary</a:t>
+              <a:t>ACOD310 mid-term  ·  1</a:t>
+            </a:r>
+            <a:r>
+              <a:rPr lang="en-IN" sz="850" b="0" i="0" dirty="0">
+                <a:solidFill>
+                  <a:srgbClr val="808080"/>
+                </a:solidFill>
+                <a:latin typeface="Arial"/>
+              </a:rPr>
+              <a:t>6</a:t>
+            </a:r>
+            <a:r>
+              <a:rPr sz="850" b="0" i="0" dirty="0">
+                <a:solidFill>
+                  <a:srgbClr val="808080"/>
+                </a:solidFill>
+                <a:latin typeface="Arial"/>
+              </a:rPr>
+              <a:t> October 2026  ·  Sumant Varanasi &amp; Parva Chaudhary</a:t>
             </a:r>
           </a:p>
         </p:txBody>
@@ -12756,7 +13120,7 @@
           <a:noFill/>
         </p:spPr>
         <p:txBody>
-          <a:bodyPr wrap="square" lIns="45720" rIns="45720" tIns="27432" bIns="27432" anchor="t"/>
+          <a:bodyPr wrap="square" lIns="45720" tIns="27432" rIns="45720" bIns="27432" anchor="t"/>
           <a:lstStyle/>
           <a:p>
             <a:pPr algn="r">
@@ -12820,7 +13184,9 @@
         <p:txBody>
           <a:bodyPr rtlCol="0" anchor="ctr"/>
           <a:lstStyle/>
-          <a:p/>
+          <a:p>
+            <a:endParaRPr/>
+          </a:p>
         </p:txBody>
       </p:sp>
       <p:sp>
@@ -12840,7 +13206,7 @@
           <a:noFill/>
         </p:spPr>
         <p:txBody>
-          <a:bodyPr wrap="square" lIns="45720" rIns="45720" tIns="27432" bIns="27432" anchor="t"/>
+          <a:bodyPr wrap="square" lIns="45720" tIns="27432" rIns="45720" bIns="27432" anchor="t"/>
           <a:lstStyle/>
           <a:p>
             <a:pPr algn="l">
@@ -12880,10 +13246,10 @@
           <a:noFill/>
         </p:spPr>
         <p:txBody>
-          <a:bodyPr wrap="square" lIns="45720" rIns="45720" tIns="27432" bIns="27432" anchor="t"/>
-          <a:lstStyle/>
-          <a:p>
-            <a:pPr algn="l" marL="155448" indent="-155448">
+          <a:bodyPr wrap="square" lIns="45720" tIns="27432" rIns="45720" bIns="27432" anchor="t"/>
+          <a:lstStyle/>
+          <a:p>
+            <a:pPr marL="155448" indent="-155448" algn="l">
               <a:lnSpc>
                 <a:spcPct val="106000"/>
               </a:lnSpc>
@@ -12903,7 +13269,7 @@
             </a:r>
           </a:p>
           <a:p>
-            <a:pPr algn="l" marL="155448" indent="-155448">
+            <a:pPr marL="155448" indent="-155448" algn="l">
               <a:lnSpc>
                 <a:spcPct val="106000"/>
               </a:lnSpc>
@@ -12923,7 +13289,7 @@
             </a:r>
           </a:p>
           <a:p>
-            <a:pPr algn="l" marL="155448" indent="-155448">
+            <a:pPr marL="155448" indent="-155448" algn="l">
               <a:lnSpc>
                 <a:spcPct val="106000"/>
               </a:lnSpc>
@@ -12943,7 +13309,7 @@
             </a:r>
           </a:p>
           <a:p>
-            <a:pPr algn="l" marL="155448" indent="-155448">
+            <a:pPr marL="155448" indent="-155448" algn="l">
               <a:lnSpc>
                 <a:spcPct val="106000"/>
               </a:lnSpc>
@@ -12963,7 +13329,7 @@
             </a:r>
           </a:p>
           <a:p>
-            <a:pPr algn="l" marL="155448" indent="-155448">
+            <a:pPr marL="155448" indent="-155448" algn="l">
               <a:lnSpc>
                 <a:spcPct val="106000"/>
               </a:lnSpc>
@@ -13025,7 +13391,9 @@
         <p:txBody>
           <a:bodyPr rtlCol="0" anchor="ctr"/>
           <a:lstStyle/>
-          <a:p/>
+          <a:p>
+            <a:endParaRPr/>
+          </a:p>
         </p:txBody>
       </p:sp>
       <p:sp>
@@ -13045,7 +13413,7 @@
           <a:noFill/>
         </p:spPr>
         <p:txBody>
-          <a:bodyPr wrap="square" lIns="45720" rIns="45720" tIns="27432" bIns="27432" anchor="t"/>
+          <a:bodyPr wrap="square" lIns="45720" tIns="27432" rIns="45720" bIns="27432" anchor="t"/>
           <a:lstStyle/>
           <a:p>
             <a:pPr algn="l">
@@ -13085,10 +13453,10 @@
           <a:noFill/>
         </p:spPr>
         <p:txBody>
-          <a:bodyPr wrap="square" lIns="45720" rIns="45720" tIns="27432" bIns="27432" anchor="t"/>
-          <a:lstStyle/>
-          <a:p>
-            <a:pPr algn="l" marL="155448" indent="-155448">
+          <a:bodyPr wrap="square" lIns="45720" tIns="27432" rIns="45720" bIns="27432" anchor="t"/>
+          <a:lstStyle/>
+          <a:p>
+            <a:pPr marL="155448" indent="-155448" algn="l">
               <a:lnSpc>
                 <a:spcPct val="106000"/>
               </a:lnSpc>
@@ -13108,7 +13476,7 @@
             </a:r>
           </a:p>
           <a:p>
-            <a:pPr algn="l" marL="155448" indent="-155448">
+            <a:pPr marL="155448" indent="-155448" algn="l">
               <a:lnSpc>
                 <a:spcPct val="106000"/>
               </a:lnSpc>
@@ -13128,7 +13496,7 @@
             </a:r>
           </a:p>
           <a:p>
-            <a:pPr algn="l" marL="155448" indent="-155448">
+            <a:pPr marL="155448" indent="-155448" algn="l">
               <a:lnSpc>
                 <a:spcPct val="106000"/>
               </a:lnSpc>
@@ -13148,7 +13516,7 @@
             </a:r>
           </a:p>
           <a:p>
-            <a:pPr algn="l" marL="155448" indent="-155448">
+            <a:pPr marL="155448" indent="-155448" algn="l">
               <a:lnSpc>
                 <a:spcPct val="106000"/>
               </a:lnSpc>
@@ -13168,7 +13536,7 @@
             </a:r>
           </a:p>
           <a:p>
-            <a:pPr algn="l" marL="155448" indent="-155448">
+            <a:pPr marL="155448" indent="-155448" algn="l">
               <a:lnSpc>
                 <a:spcPct val="106000"/>
               </a:lnSpc>
@@ -13189,90 +13557,6 @@
           </a:p>
         </p:txBody>
       </p:sp>
-      <p:sp>
-        <p:nvSpPr>
-          <p:cNvPr id="13" name="Rounded Rectangle 12"/>
-          <p:cNvSpPr/>
-          <p:nvPr/>
-        </p:nvSpPr>
-        <p:spPr>
-          <a:xfrm>
-            <a:off x="365760" y="4846320"/>
-            <a:ext cx="5852160" cy="1600200"/>
-          </a:xfrm>
-          <a:prstGeom prst="roundRect">
-            <a:avLst>
-              <a:gd name="adj" fmla="val 8000"/>
-            </a:avLst>
-          </a:prstGeom>
-          <a:solidFill>
-            <a:srgbClr val="F3F3F3"/>
-          </a:solidFill>
-          <a:ln>
-            <a:noFill/>
-          </a:ln>
-          <a:effectLst/>
-        </p:spPr>
-        <p:style>
-          <a:lnRef idx="1">
-            <a:schemeClr val="accent1"/>
-          </a:lnRef>
-          <a:fillRef idx="3">
-            <a:schemeClr val="accent1"/>
-          </a:fillRef>
-          <a:effectRef idx="2">
-            <a:schemeClr val="accent1"/>
-          </a:effectRef>
-          <a:fontRef idx="minor">
-            <a:schemeClr val="lt1"/>
-          </a:fontRef>
-        </p:style>
-        <p:txBody>
-          <a:bodyPr rtlCol="0" anchor="ctr"/>
-          <a:lstStyle/>
-          <a:p/>
-        </p:txBody>
-      </p:sp>
-      <p:sp>
-        <p:nvSpPr>
-          <p:cNvPr id="14" name="TextBox 13"/>
-          <p:cNvSpPr txBox="1"/>
-          <p:nvPr/>
-        </p:nvSpPr>
-        <p:spPr>
-          <a:xfrm>
-            <a:off x="502920" y="4873752"/>
-            <a:ext cx="5577840" cy="274320"/>
-          </a:xfrm>
-          <a:prstGeom prst="rect">
-            <a:avLst/>
-          </a:prstGeom>
-          <a:noFill/>
-        </p:spPr>
-        <p:txBody>
-          <a:bodyPr wrap="square" lIns="45720" rIns="45720" tIns="27432" bIns="27432" anchor="t"/>
-          <a:lstStyle/>
-          <a:p>
-            <a:pPr algn="l">
-              <a:lnSpc>
-                <a:spcPct val="108000"/>
-              </a:lnSpc>
-              <a:spcAft>
-                <a:spcPts val="300"/>
-              </a:spcAft>
-            </a:pPr>
-            <a:r>
-              <a:rPr sz="1000" b="1" i="0">
-                <a:solidFill>
-                  <a:srgbClr val="6E1A1D"/>
-                </a:solidFill>
-                <a:latin typeface="Arial"/>
-              </a:rPr>
-              <a:t>Temperature window that keeps ≥ 90 % of the best profit (other knobs at their best)</a:t>
-            </a:r>
-          </a:p>
-        </p:txBody>
-      </p:sp>
       <p:cxnSp>
         <p:nvCxnSpPr>
           <p:cNvPr id="15" name="Connector 14"/>
@@ -13325,7 +13609,7 @@
           <a:noFill/>
         </p:spPr>
         <p:txBody>
-          <a:bodyPr wrap="square" lIns="45720" rIns="45720" tIns="27432" bIns="27432" anchor="t"/>
+          <a:bodyPr wrap="square" lIns="45720" tIns="27432" rIns="45720" bIns="27432" anchor="t"/>
           <a:lstStyle/>
           <a:p>
             <a:pPr algn="ctr">
@@ -13365,7 +13649,7 @@
           <a:noFill/>
         </p:spPr>
         <p:txBody>
-          <a:bodyPr wrap="square" lIns="45720" rIns="45720" tIns="27432" bIns="27432" anchor="t"/>
+          <a:bodyPr wrap="square" lIns="45720" tIns="27432" rIns="45720" bIns="27432" anchor="t"/>
           <a:lstStyle/>
           <a:p>
             <a:pPr algn="ctr">
@@ -13405,7 +13689,7 @@
           <a:noFill/>
         </p:spPr>
         <p:txBody>
-          <a:bodyPr wrap="square" lIns="45720" rIns="45720" tIns="27432" bIns="27432" anchor="t"/>
+          <a:bodyPr wrap="square" lIns="45720" tIns="27432" rIns="45720" bIns="27432" anchor="t"/>
           <a:lstStyle/>
           <a:p>
             <a:pPr algn="ctr">
@@ -13445,7 +13729,7 @@
           <a:noFill/>
         </p:spPr>
         <p:txBody>
-          <a:bodyPr wrap="square" lIns="45720" rIns="45720" tIns="27432" bIns="27432" anchor="t"/>
+          <a:bodyPr wrap="square" lIns="45720" tIns="27432" rIns="45720" bIns="27432" anchor="t"/>
           <a:lstStyle/>
           <a:p>
             <a:pPr algn="ctr">
@@ -13485,7 +13769,7 @@
           <a:noFill/>
         </p:spPr>
         <p:txBody>
-          <a:bodyPr wrap="square" lIns="45720" rIns="45720" tIns="27432" bIns="27432" anchor="t"/>
+          <a:bodyPr wrap="square" lIns="45720" tIns="27432" rIns="45720" bIns="27432" anchor="t"/>
           <a:lstStyle/>
           <a:p>
             <a:pPr algn="ctr">
@@ -13504,219 +13788,6 @@
                 <a:latin typeface="Arial"/>
               </a:rPr>
               <a:t>700 K</a:t>
-            </a:r>
-          </a:p>
-        </p:txBody>
-      </p:sp>
-      <p:sp>
-        <p:nvSpPr>
-          <p:cNvPr id="21" name="Rectangle 20"/>
-          <p:cNvSpPr/>
-          <p:nvPr/>
-        </p:nvSpPr>
-        <p:spPr>
-          <a:xfrm>
-            <a:off x="3340053" y="5230368"/>
-            <a:ext cx="1711590" cy="274320"/>
-          </a:xfrm>
-          <a:prstGeom prst="rect">
-            <a:avLst/>
-          </a:prstGeom>
-          <a:solidFill>
-            <a:srgbClr val="555555"/>
-          </a:solidFill>
-          <a:ln>
-            <a:noFill/>
-          </a:ln>
-          <a:effectLst/>
-        </p:spPr>
-        <p:style>
-          <a:lnRef idx="1">
-            <a:schemeClr val="accent1"/>
-          </a:lnRef>
-          <a:fillRef idx="3">
-            <a:schemeClr val="accent1"/>
-          </a:fillRef>
-          <a:effectRef idx="2">
-            <a:schemeClr val="accent1"/>
-          </a:effectRef>
-          <a:fontRef idx="minor">
-            <a:schemeClr val="lt1"/>
-          </a:fontRef>
-        </p:style>
-        <p:txBody>
-          <a:bodyPr rtlCol="0" anchor="ctr"/>
-          <a:lstStyle/>
-          <a:p/>
-        </p:txBody>
-      </p:sp>
-      <p:sp>
-        <p:nvSpPr>
-          <p:cNvPr id="22" name="TextBox 21"/>
-          <p:cNvSpPr txBox="1"/>
-          <p:nvPr/>
-        </p:nvSpPr>
-        <p:spPr>
-          <a:xfrm>
-            <a:off x="825453" y="5212080"/>
-            <a:ext cx="2468880" cy="310896"/>
-          </a:xfrm>
-          <a:prstGeom prst="rect">
-            <a:avLst/>
-          </a:prstGeom>
-          <a:noFill/>
-        </p:spPr>
-        <p:txBody>
-          <a:bodyPr wrap="square" lIns="45720" rIns="45720" tIns="27432" bIns="27432" anchor="t"/>
-          <a:lstStyle/>
-          <a:p>
-            <a:pPr algn="r">
-              <a:lnSpc>
-                <a:spcPct val="108000"/>
-              </a:lnSpc>
-              <a:spcAft>
-                <a:spcPts val="300"/>
-              </a:spcAft>
-            </a:pPr>
-            <a:r>
-              <a:rPr sz="950" b="1" i="0">
-                <a:solidFill>
-                  <a:srgbClr val="555555"/>
-                </a:solidFill>
-                <a:latin typeface="Arial"/>
-              </a:rPr>
-              <a:t>simple network: 72 K  (592–663 K)</a:t>
-            </a:r>
-          </a:p>
-        </p:txBody>
-      </p:sp>
-      <p:sp>
-        <p:nvSpPr>
-          <p:cNvPr id="23" name="Rectangle 22"/>
-          <p:cNvSpPr/>
-          <p:nvPr/>
-        </p:nvSpPr>
-        <p:spPr>
-          <a:xfrm>
-            <a:off x="1435607" y="5687568"/>
-            <a:ext cx="771421" cy="274320"/>
-          </a:xfrm>
-          <a:prstGeom prst="rect">
-            <a:avLst/>
-          </a:prstGeom>
-          <a:solidFill>
-            <a:srgbClr val="8B2327"/>
-          </a:solidFill>
-          <a:ln>
-            <a:noFill/>
-          </a:ln>
-          <a:effectLst/>
-        </p:spPr>
-        <p:style>
-          <a:lnRef idx="1">
-            <a:schemeClr val="accent1"/>
-          </a:lnRef>
-          <a:fillRef idx="3">
-            <a:schemeClr val="accent1"/>
-          </a:fillRef>
-          <a:effectRef idx="2">
-            <a:schemeClr val="accent1"/>
-          </a:effectRef>
-          <a:fontRef idx="minor">
-            <a:schemeClr val="lt1"/>
-          </a:fontRef>
-        </p:style>
-        <p:txBody>
-          <a:bodyPr rtlCol="0" anchor="ctr"/>
-          <a:lstStyle/>
-          <a:p/>
-        </p:txBody>
-      </p:sp>
-      <p:sp>
-        <p:nvSpPr>
-          <p:cNvPr id="24" name="TextBox 23"/>
-          <p:cNvSpPr txBox="1"/>
-          <p:nvPr/>
-        </p:nvSpPr>
-        <p:spPr>
-          <a:xfrm>
-            <a:off x="2298469" y="5669280"/>
-            <a:ext cx="2468880" cy="310896"/>
-          </a:xfrm>
-          <a:prstGeom prst="rect">
-            <a:avLst/>
-          </a:prstGeom>
-          <a:noFill/>
-        </p:spPr>
-        <p:txBody>
-          <a:bodyPr wrap="square" lIns="45720" rIns="45720" tIns="27432" bIns="27432" anchor="t"/>
-          <a:lstStyle/>
-          <a:p>
-            <a:pPr algn="l">
-              <a:lnSpc>
-                <a:spcPct val="108000"/>
-              </a:lnSpc>
-              <a:spcAft>
-                <a:spcPts val="300"/>
-              </a:spcAft>
-            </a:pPr>
-            <a:r>
-              <a:rPr sz="950" b="1" i="0">
-                <a:solidFill>
-                  <a:srgbClr val="8B2327"/>
-                </a:solidFill>
-                <a:latin typeface="Arial"/>
-              </a:rPr>
-              <a:t>complex network: 32 K  (513–545 K)</a:t>
-            </a:r>
-          </a:p>
-        </p:txBody>
-      </p:sp>
-      <p:sp>
-        <p:nvSpPr>
-          <p:cNvPr id="25" name="TextBox 24"/>
-          <p:cNvSpPr txBox="1"/>
-          <p:nvPr/>
-        </p:nvSpPr>
-        <p:spPr>
-          <a:xfrm>
-            <a:off x="6400800" y="4892040"/>
-            <a:ext cx="5303520" cy="1554480"/>
-          </a:xfrm>
-          <a:prstGeom prst="rect">
-            <a:avLst/>
-          </a:prstGeom>
-          <a:noFill/>
-        </p:spPr>
-        <p:txBody>
-          <a:bodyPr wrap="square" lIns="45720" rIns="45720" tIns="27432" bIns="27432" anchor="t"/>
-          <a:lstStyle/>
-          <a:p>
-            <a:pPr algn="l">
-              <a:lnSpc>
-                <a:spcPct val="106000"/>
-              </a:lnSpc>
-              <a:spcAft>
-                <a:spcPts val="300"/>
-              </a:spcAft>
-            </a:pPr>
-            <a:r>
-              <a:rPr sz="1000" b="1" i="0">
-                <a:solidFill>
-                  <a:srgbClr val="6E1A1D"/>
-                </a:solidFill>
-                <a:latin typeface="Arial"/>
-              </a:rPr>
-              <a:t>Why the complex chemistry is hard. </a:t>
-            </a:r>
-            <a:r>
-              <a:rPr sz="1000" b="0" i="0">
-                <a:solidFill>
-                  <a:srgbClr val="222222"/>
-                </a:solidFill>
-                <a:latin typeface="Arial"/>
-              </a:rPr>
-              <a:t>On the complex chemistry the profitable temperature band is about 30 degrees wide: miss it by 20 degrees and most of the profit is gone. Hotter is faster but the equilibrium and the cracking take product away; more B converts more A but the over-reaction eats the product; pressure helps the equilibrium but costs compression; the inert dilutes everything.</a:t>
             </a:r>
           </a:p>
         </p:txBody>
@@ -13730,7 +13801,7 @@
 </file>
 
 <file path=ppt/slides/slide6.xml><?xml version="1.0" encoding="utf-8"?>
-<p:sld xmlns:a="http://schemas.openxmlformats.org/drawingml/2006/main" xmlns:p="http://schemas.openxmlformats.org/presentationml/2006/main" xmlns:r="http://schemas.openxmlformats.org/officeDocument/2006/relationships">
+<p:sld xmlns:a="http://schemas.openxmlformats.org/drawingml/2006/main" xmlns:r="http://schemas.openxmlformats.org/officeDocument/2006/relationships" xmlns:p="http://schemas.openxmlformats.org/presentationml/2006/main">
   <p:cSld>
     <p:spTree>
       <p:nvGrpSpPr>
@@ -13738,7 +13809,14 @@
         <p:cNvGrpSpPr/>
         <p:nvPr/>
       </p:nvGrpSpPr>
-      <p:grpSpPr/>
+      <p:grpSpPr>
+        <a:xfrm>
+          <a:off x="0" y="0"/>
+          <a:ext cx="0" cy="0"/>
+          <a:chOff x="0" y="0"/>
+          <a:chExt cx="0" cy="0"/>
+        </a:xfrm>
+      </p:grpSpPr>
       <p:sp>
         <p:nvSpPr>
           <p:cNvPr id="2" name="Title 1"/>
@@ -13756,7 +13834,7 @@
           </a:xfrm>
         </p:spPr>
         <p:txBody>
-          <a:bodyPr anchor="ctr" lIns="45720"/>
+          <a:bodyPr lIns="45720" anchor="ctr"/>
           <a:lstStyle/>
           <a:p>
             <a:pPr algn="l"/>
@@ -13789,7 +13867,7 @@
           <a:noFill/>
         </p:spPr>
         <p:txBody>
-          <a:bodyPr wrap="square" lIns="45720" rIns="45720" tIns="27432" bIns="27432" anchor="t"/>
+          <a:bodyPr wrap="square" lIns="45720" tIns="27432" rIns="45720" bIns="27432" anchor="t"/>
           <a:lstStyle/>
           <a:p>
             <a:pPr algn="l">
@@ -13864,7 +13942,7 @@
           <a:noFill/>
         </p:spPr>
         <p:txBody>
-          <a:bodyPr wrap="square" lIns="45720" rIns="45720" tIns="27432" bIns="27432" anchor="t"/>
+          <a:bodyPr wrap="square" lIns="45720" tIns="27432" rIns="45720" bIns="27432" anchor="t"/>
           <a:lstStyle/>
           <a:p>
             <a:pPr algn="l">
@@ -13876,13 +13954,31 @@
               </a:spcAft>
             </a:pPr>
             <a:r>
-              <a:rPr sz="850" b="0" i="0">
+              <a:rPr sz="850" b="0" i="0" dirty="0">
                 <a:solidFill>
                   <a:srgbClr val="808080"/>
                 </a:solidFill>
                 <a:latin typeface="Arial"/>
               </a:rPr>
-              <a:t>ACOD310 mid-term  ·  17 October 2026  ·  Sumant Varanasi &amp; Parva Chaudhary</a:t>
+              <a:t>ACOD310 mid-term  ·  1</a:t>
+            </a:r>
+            <a:r>
+              <a:rPr lang="en-IN" sz="850" b="0" i="0" dirty="0">
+                <a:solidFill>
+                  <a:srgbClr val="808080"/>
+                </a:solidFill>
+                <a:latin typeface="Arial"/>
+              </a:rPr>
+              <a:t>6</a:t>
+            </a:r>
+            <a:r>
+              <a:rPr sz="850" b="0" i="0" dirty="0">
+                <a:solidFill>
+                  <a:srgbClr val="808080"/>
+                </a:solidFill>
+                <a:latin typeface="Arial"/>
+              </a:rPr>
+              <a:t> October 2026  ·  Sumant Varanasi &amp; Parva Chaudhary</a:t>
             </a:r>
           </a:p>
         </p:txBody>
@@ -13904,7 +14000,7 @@
           <a:noFill/>
         </p:spPr>
         <p:txBody>
-          <a:bodyPr wrap="square" lIns="45720" rIns="45720" tIns="27432" bIns="27432" anchor="t"/>
+          <a:bodyPr wrap="square" lIns="45720" tIns="27432" rIns="45720" bIns="27432" anchor="t"/>
           <a:lstStyle/>
           <a:p>
             <a:pPr algn="r">
@@ -13968,7 +14064,9 @@
         <p:txBody>
           <a:bodyPr rtlCol="0" anchor="ctr"/>
           <a:lstStyle/>
-          <a:p/>
+          <a:p>
+            <a:endParaRPr/>
+          </a:p>
         </p:txBody>
       </p:sp>
       <p:sp>
@@ -14008,7 +14106,7 @@
           </a:fontRef>
         </p:style>
         <p:txBody>
-          <a:bodyPr rtlCol="0" anchor="ctr" lIns="0" rIns="0" tIns="0" bIns="0"/>
+          <a:bodyPr lIns="0" tIns="0" rIns="0" bIns="0" rtlCol="0" anchor="ctr"/>
           <a:lstStyle/>
           <a:p>
             <a:pPr algn="ctr"/>
@@ -14041,7 +14139,7 @@
           <a:noFill/>
         </p:spPr>
         <p:txBody>
-          <a:bodyPr wrap="square" lIns="45720" rIns="45720" tIns="27432" bIns="27432" anchor="t"/>
+          <a:bodyPr wrap="square" lIns="45720" tIns="27432" rIns="45720" bIns="27432" anchor="t"/>
           <a:lstStyle/>
           <a:p>
             <a:pPr algn="l">
@@ -14081,7 +14179,7 @@
           <a:noFill/>
         </p:spPr>
         <p:txBody>
-          <a:bodyPr wrap="square" lIns="45720" rIns="45720" tIns="27432" bIns="27432" anchor="t"/>
+          <a:bodyPr wrap="square" lIns="45720" tIns="27432" rIns="45720" bIns="27432" anchor="t"/>
           <a:lstStyle/>
           <a:p>
             <a:pPr algn="l">
@@ -14106,19 +14204,17 @@
       </p:sp>
       <p:sp>
         <p:nvSpPr>
-          <p:cNvPr id="11" name="Rounded Rectangle 10"/>
+          <p:cNvPr id="12" name="Right Arrow 11"/>
           <p:cNvSpPr/>
           <p:nvPr/>
         </p:nvSpPr>
         <p:spPr>
           <a:xfrm>
-            <a:off x="475488" y="3493008"/>
-            <a:ext cx="1325880" cy="219456"/>
-          </a:xfrm>
-          <a:prstGeom prst="roundRect">
-            <a:avLst>
-              <a:gd name="adj" fmla="val 50000"/>
-            </a:avLst>
+            <a:off x="2505456" y="2569463"/>
+            <a:ext cx="182880" cy="219456"/>
+          </a:xfrm>
+          <a:prstGeom prst="rightArrow">
+            <a:avLst/>
           </a:prstGeom>
           <a:solidFill>
             <a:srgbClr val="8B2327"/>
@@ -14143,34 +14239,72 @@
           </a:fontRef>
         </p:style>
         <p:txBody>
-          <a:bodyPr rtlCol="0" anchor="ctr" lIns="36576" rIns="36576" tIns="0" bIns="0"/>
+          <a:bodyPr rtlCol="0" anchor="ctr"/>
           <a:lstStyle/>
           <a:p>
             <a:pPr algn="ctr"/>
-            <a:r>
-              <a:rPr sz="800" b="1" i="0">
-                <a:solidFill>
-                  <a:srgbClr val="FFFFFF"/>
-                </a:solidFill>
-                <a:latin typeface="Arial"/>
-              </a:rPr>
-              <a:t>new this month (v5)</a:t>
-            </a:r>
-          </a:p>
-        </p:txBody>
-      </p:sp>
-      <p:sp>
-        <p:nvSpPr>
-          <p:cNvPr id="12" name="Right Arrow 11"/>
+            <a:endParaRPr/>
+          </a:p>
+        </p:txBody>
+      </p:sp>
+      <p:sp>
+        <p:nvSpPr>
+          <p:cNvPr id="13" name="Rounded Rectangle 12"/>
           <p:cNvSpPr/>
           <p:nvPr/>
         </p:nvSpPr>
         <p:spPr>
           <a:xfrm>
-            <a:off x="2505456" y="2569463"/>
-            <a:ext cx="182880" cy="219456"/>
-          </a:xfrm>
-          <a:prstGeom prst="rightArrow">
+            <a:off x="2660903" y="1536192"/>
+            <a:ext cx="2157984" cy="2286000"/>
+          </a:xfrm>
+          <a:prstGeom prst="roundRect">
+            <a:avLst>
+              <a:gd name="adj" fmla="val 8000"/>
+            </a:avLst>
+          </a:prstGeom>
+          <a:solidFill>
+            <a:srgbClr val="F8F1F1"/>
+          </a:solidFill>
+          <a:ln>
+            <a:noFill/>
+          </a:ln>
+          <a:effectLst/>
+        </p:spPr>
+        <p:style>
+          <a:lnRef idx="1">
+            <a:schemeClr val="accent1"/>
+          </a:lnRef>
+          <a:fillRef idx="3">
+            <a:schemeClr val="accent1"/>
+          </a:fillRef>
+          <a:effectRef idx="2">
+            <a:schemeClr val="accent1"/>
+          </a:effectRef>
+          <a:fontRef idx="minor">
+            <a:schemeClr val="lt1"/>
+          </a:fontRef>
+        </p:style>
+        <p:txBody>
+          <a:bodyPr rtlCol="0" anchor="ctr"/>
+          <a:lstStyle/>
+          <a:p>
+            <a:endParaRPr/>
+          </a:p>
+        </p:txBody>
+      </p:sp>
+      <p:sp>
+        <p:nvSpPr>
+          <p:cNvPr id="14" name="Oval 13"/>
+          <p:cNvSpPr/>
+          <p:nvPr/>
+        </p:nvSpPr>
+        <p:spPr>
+          <a:xfrm>
+            <a:off x="2770632" y="1645919"/>
+            <a:ext cx="329184" cy="329184"/>
+          </a:xfrm>
+          <a:prstGeom prst="ellipse">
             <a:avLst/>
           </a:prstGeom>
           <a:solidFill>
@@ -14196,95 +14330,7 @@
           </a:fontRef>
         </p:style>
         <p:txBody>
-          <a:bodyPr rtlCol="0" anchor="ctr"/>
-          <a:lstStyle/>
-          <a:p>
-            <a:pPr algn="ctr"/>
-          </a:p>
-        </p:txBody>
-      </p:sp>
-      <p:sp>
-        <p:nvSpPr>
-          <p:cNvPr id="13" name="Rounded Rectangle 12"/>
-          <p:cNvSpPr/>
-          <p:nvPr/>
-        </p:nvSpPr>
-        <p:spPr>
-          <a:xfrm>
-            <a:off x="2660903" y="1536192"/>
-            <a:ext cx="2157984" cy="2286000"/>
-          </a:xfrm>
-          <a:prstGeom prst="roundRect">
-            <a:avLst>
-              <a:gd name="adj" fmla="val 8000"/>
-            </a:avLst>
-          </a:prstGeom>
-          <a:solidFill>
-            <a:srgbClr val="F8F1F1"/>
-          </a:solidFill>
-          <a:ln>
-            <a:noFill/>
-          </a:ln>
-          <a:effectLst/>
-        </p:spPr>
-        <p:style>
-          <a:lnRef idx="1">
-            <a:schemeClr val="accent1"/>
-          </a:lnRef>
-          <a:fillRef idx="3">
-            <a:schemeClr val="accent1"/>
-          </a:fillRef>
-          <a:effectRef idx="2">
-            <a:schemeClr val="accent1"/>
-          </a:effectRef>
-          <a:fontRef idx="minor">
-            <a:schemeClr val="lt1"/>
-          </a:fontRef>
-        </p:style>
-        <p:txBody>
-          <a:bodyPr rtlCol="0" anchor="ctr"/>
-          <a:lstStyle/>
-          <a:p/>
-        </p:txBody>
-      </p:sp>
-      <p:sp>
-        <p:nvSpPr>
-          <p:cNvPr id="14" name="Oval 13"/>
-          <p:cNvSpPr/>
-          <p:nvPr/>
-        </p:nvSpPr>
-        <p:spPr>
-          <a:xfrm>
-            <a:off x="2770632" y="1645919"/>
-            <a:ext cx="329184" cy="329184"/>
-          </a:xfrm>
-          <a:prstGeom prst="ellipse">
-            <a:avLst/>
-          </a:prstGeom>
-          <a:solidFill>
-            <a:srgbClr val="8B2327"/>
-          </a:solidFill>
-          <a:ln>
-            <a:noFill/>
-          </a:ln>
-          <a:effectLst/>
-        </p:spPr>
-        <p:style>
-          <a:lnRef idx="1">
-            <a:schemeClr val="accent1"/>
-          </a:lnRef>
-          <a:fillRef idx="3">
-            <a:schemeClr val="accent1"/>
-          </a:fillRef>
-          <a:effectRef idx="2">
-            <a:schemeClr val="accent1"/>
-          </a:effectRef>
-          <a:fontRef idx="minor">
-            <a:schemeClr val="lt1"/>
-          </a:fontRef>
-        </p:style>
-        <p:txBody>
-          <a:bodyPr rtlCol="0" anchor="ctr" lIns="0" rIns="0" tIns="0" bIns="0"/>
+          <a:bodyPr lIns="0" tIns="0" rIns="0" bIns="0" rtlCol="0" anchor="ctr"/>
           <a:lstStyle/>
           <a:p>
             <a:pPr algn="ctr"/>
@@ -14317,7 +14363,7 @@
           <a:noFill/>
         </p:spPr>
         <p:txBody>
-          <a:bodyPr wrap="square" lIns="45720" rIns="45720" tIns="27432" bIns="27432" anchor="t"/>
+          <a:bodyPr wrap="square" lIns="45720" tIns="27432" rIns="45720" bIns="27432" anchor="t"/>
           <a:lstStyle/>
           <a:p>
             <a:pPr algn="l">
@@ -14357,7 +14403,7 @@
           <a:noFill/>
         </p:spPr>
         <p:txBody>
-          <a:bodyPr wrap="square" lIns="45720" rIns="45720" tIns="27432" bIns="27432" anchor="t"/>
+          <a:bodyPr wrap="square" lIns="45720" tIns="27432" rIns="45720" bIns="27432" anchor="t"/>
           <a:lstStyle/>
           <a:p>
             <a:pPr algn="l">
@@ -14421,6 +14467,7 @@
           <a:lstStyle/>
           <a:p>
             <a:pPr algn="ctr"/>
+            <a:endParaRPr/>
           </a:p>
         </p:txBody>
       </p:sp>
@@ -14465,7 +14512,9 @@
         <p:txBody>
           <a:bodyPr rtlCol="0" anchor="ctr"/>
           <a:lstStyle/>
-          <a:p/>
+          <a:p>
+            <a:endParaRPr/>
+          </a:p>
         </p:txBody>
       </p:sp>
       <p:sp>
@@ -14505,7 +14554,7 @@
           </a:fontRef>
         </p:style>
         <p:txBody>
-          <a:bodyPr rtlCol="0" anchor="ctr" lIns="0" rIns="0" tIns="0" bIns="0"/>
+          <a:bodyPr lIns="0" tIns="0" rIns="0" bIns="0" rtlCol="0" anchor="ctr"/>
           <a:lstStyle/>
           <a:p>
             <a:pPr algn="ctr"/>
@@ -14538,7 +14587,7 @@
           <a:noFill/>
         </p:spPr>
         <p:txBody>
-          <a:bodyPr wrap="square" lIns="45720" rIns="45720" tIns="27432" bIns="27432" anchor="t"/>
+          <a:bodyPr wrap="square" lIns="45720" tIns="27432" rIns="45720" bIns="27432" anchor="t"/>
           <a:lstStyle/>
           <a:p>
             <a:pPr algn="l">
@@ -14578,7 +14627,7 @@
           <a:noFill/>
         </p:spPr>
         <p:txBody>
-          <a:bodyPr wrap="square" lIns="45720" rIns="45720" tIns="27432" bIns="27432" anchor="t"/>
+          <a:bodyPr wrap="square" lIns="45720" tIns="27432" rIns="45720" bIns="27432" anchor="t"/>
           <a:lstStyle/>
           <a:p>
             <a:pPr algn="l">
@@ -14642,6 +14691,7 @@
           <a:lstStyle/>
           <a:p>
             <a:pPr algn="ctr"/>
+            <a:endParaRPr/>
           </a:p>
         </p:txBody>
       </p:sp>
@@ -14686,7 +14736,9 @@
         <p:txBody>
           <a:bodyPr rtlCol="0" anchor="ctr"/>
           <a:lstStyle/>
-          <a:p/>
+          <a:p>
+            <a:endParaRPr/>
+          </a:p>
         </p:txBody>
       </p:sp>
       <p:sp>
@@ -14726,7 +14778,7 @@
           </a:fontRef>
         </p:style>
         <p:txBody>
-          <a:bodyPr rtlCol="0" anchor="ctr" lIns="0" rIns="0" tIns="0" bIns="0"/>
+          <a:bodyPr lIns="0" tIns="0" rIns="0" bIns="0" rtlCol="0" anchor="ctr"/>
           <a:lstStyle/>
           <a:p>
             <a:pPr algn="ctr"/>
@@ -14759,7 +14811,7 @@
           <a:noFill/>
         </p:spPr>
         <p:txBody>
-          <a:bodyPr wrap="square" lIns="45720" rIns="45720" tIns="27432" bIns="27432" anchor="t"/>
+          <a:bodyPr wrap="square" lIns="45720" tIns="27432" rIns="45720" bIns="27432" anchor="t"/>
           <a:lstStyle/>
           <a:p>
             <a:pPr algn="l">
@@ -14799,7 +14851,7 @@
           <a:noFill/>
         </p:spPr>
         <p:txBody>
-          <a:bodyPr wrap="square" lIns="45720" rIns="45720" tIns="27432" bIns="27432" anchor="t"/>
+          <a:bodyPr wrap="square" lIns="45720" tIns="27432" rIns="45720" bIns="27432" anchor="t"/>
           <a:lstStyle/>
           <a:p>
             <a:pPr algn="l">
@@ -14863,6 +14915,7 @@
           <a:lstStyle/>
           <a:p>
             <a:pPr algn="ctr"/>
+            <a:endParaRPr/>
           </a:p>
         </p:txBody>
       </p:sp>
@@ -14907,7 +14960,9 @@
         <p:txBody>
           <a:bodyPr rtlCol="0" anchor="ctr"/>
           <a:lstStyle/>
-          <a:p/>
+          <a:p>
+            <a:endParaRPr/>
+          </a:p>
         </p:txBody>
       </p:sp>
       <p:sp>
@@ -14947,7 +15002,7 @@
           </a:fontRef>
         </p:style>
         <p:txBody>
-          <a:bodyPr rtlCol="0" anchor="ctr" lIns="0" rIns="0" tIns="0" bIns="0"/>
+          <a:bodyPr lIns="0" tIns="0" rIns="0" bIns="0" rtlCol="0" anchor="ctr"/>
           <a:lstStyle/>
           <a:p>
             <a:pPr algn="ctr"/>
@@ -14980,7 +15035,7 @@
           <a:noFill/>
         </p:spPr>
         <p:txBody>
-          <a:bodyPr wrap="square" lIns="45720" rIns="45720" tIns="27432" bIns="27432" anchor="t"/>
+          <a:bodyPr wrap="square" lIns="45720" tIns="27432" rIns="45720" bIns="27432" anchor="t"/>
           <a:lstStyle/>
           <a:p>
             <a:pPr algn="l">
@@ -15020,7 +15075,7 @@
           <a:noFill/>
         </p:spPr>
         <p:txBody>
-          <a:bodyPr wrap="square" lIns="45720" rIns="45720" tIns="27432" bIns="27432" anchor="t"/>
+          <a:bodyPr wrap="square" lIns="45720" tIns="27432" rIns="45720" bIns="27432" anchor="t"/>
           <a:lstStyle/>
           <a:p>
             <a:pPr algn="l">
@@ -15045,61 +15100,6 @@
       </p:sp>
       <p:sp>
         <p:nvSpPr>
-          <p:cNvPr id="32" name="Rounded Rectangle 31"/>
-          <p:cNvSpPr/>
-          <p:nvPr/>
-        </p:nvSpPr>
-        <p:spPr>
-          <a:xfrm>
-            <a:off x="9656063" y="3493008"/>
-            <a:ext cx="1325880" cy="219456"/>
-          </a:xfrm>
-          <a:prstGeom prst="roundRect">
-            <a:avLst>
-              <a:gd name="adj" fmla="val 50000"/>
-            </a:avLst>
-          </a:prstGeom>
-          <a:solidFill>
-            <a:srgbClr val="8B2327"/>
-          </a:solidFill>
-          <a:ln>
-            <a:noFill/>
-          </a:ln>
-          <a:effectLst/>
-        </p:spPr>
-        <p:style>
-          <a:lnRef idx="1">
-            <a:schemeClr val="accent1"/>
-          </a:lnRef>
-          <a:fillRef idx="3">
-            <a:schemeClr val="accent1"/>
-          </a:fillRef>
-          <a:effectRef idx="2">
-            <a:schemeClr val="accent1"/>
-          </a:effectRef>
-          <a:fontRef idx="minor">
-            <a:schemeClr val="lt1"/>
-          </a:fontRef>
-        </p:style>
-        <p:txBody>
-          <a:bodyPr rtlCol="0" anchor="ctr" lIns="36576" rIns="36576" tIns="0" bIns="0"/>
-          <a:lstStyle/>
-          <a:p>
-            <a:pPr algn="ctr"/>
-            <a:r>
-              <a:rPr sz="800" b="1" i="0">
-                <a:solidFill>
-                  <a:srgbClr val="FFFFFF"/>
-                </a:solidFill>
-                <a:latin typeface="Arial"/>
-              </a:rPr>
-              <a:t>new this month (v5)</a:t>
-            </a:r>
-          </a:p>
-        </p:txBody>
-      </p:sp>
-      <p:sp>
-        <p:nvSpPr>
           <p:cNvPr id="33" name="Rounded Rectangle 32"/>
           <p:cNvSpPr/>
           <p:nvPr/>
@@ -15139,7 +15139,9 @@
         <p:txBody>
           <a:bodyPr rtlCol="0" anchor="ctr"/>
           <a:lstStyle/>
-          <a:p/>
+          <a:p>
+            <a:endParaRPr/>
+          </a:p>
         </p:txBody>
       </p:sp>
       <p:sp>
@@ -15159,7 +15161,7 @@
           <a:noFill/>
         </p:spPr>
         <p:txBody>
-          <a:bodyPr wrap="square" lIns="45720" rIns="45720" tIns="27432" bIns="27432" anchor="t"/>
+          <a:bodyPr wrap="square" lIns="45720" tIns="27432" rIns="45720" bIns="27432" anchor="t"/>
           <a:lstStyle/>
           <a:p>
             <a:pPr algn="l">
@@ -15199,7 +15201,7 @@
           <a:noFill/>
         </p:spPr>
         <p:txBody>
-          <a:bodyPr wrap="square" lIns="45720" rIns="45720" tIns="27432" bIns="27432" anchor="t"/>
+          <a:bodyPr wrap="square" lIns="45720" tIns="27432" rIns="45720" bIns="27432" anchor="t"/>
           <a:lstStyle/>
           <a:p>
             <a:pPr algn="l">
@@ -15334,7 +15336,7 @@
           <a:noFill/>
         </p:spPr>
         <p:txBody>
-          <a:bodyPr wrap="square" lIns="45720" rIns="45720" tIns="27432" bIns="27432" anchor="t"/>
+          <a:bodyPr wrap="square" lIns="45720" tIns="27432" rIns="45720" bIns="27432" anchor="t"/>
           <a:lstStyle/>
           <a:p>
             <a:pPr algn="l">
@@ -15474,7 +15476,9 @@
         <p:txBody>
           <a:bodyPr rtlCol="0" anchor="ctr"/>
           <a:lstStyle/>
-          <a:p/>
+          <a:p>
+            <a:endParaRPr/>
+          </a:p>
         </p:txBody>
       </p:sp>
       <p:sp>
@@ -15494,7 +15498,7 @@
           <a:noFill/>
         </p:spPr>
         <p:txBody>
-          <a:bodyPr wrap="square" lIns="45720" rIns="45720" tIns="27432" bIns="27432" anchor="t"/>
+          <a:bodyPr wrap="square" lIns="45720" tIns="27432" rIns="45720" bIns="27432" anchor="t"/>
           <a:lstStyle/>
           <a:p>
             <a:pPr algn="l">
@@ -15534,10 +15538,10 @@
           <a:noFill/>
         </p:spPr>
         <p:txBody>
-          <a:bodyPr wrap="square" lIns="45720" rIns="45720" tIns="27432" bIns="27432" anchor="t"/>
-          <a:lstStyle/>
-          <a:p>
-            <a:pPr algn="l" marL="155448" indent="-155448">
+          <a:bodyPr wrap="square" lIns="45720" tIns="27432" rIns="45720" bIns="27432" anchor="t"/>
+          <a:lstStyle/>
+          <a:p>
+            <a:pPr marL="155448" indent="-155448" algn="l">
               <a:lnSpc>
                 <a:spcPct val="105000"/>
               </a:lnSpc>
@@ -15566,7 +15570,7 @@
             </a:r>
           </a:p>
           <a:p>
-            <a:pPr algn="l" marL="155448" indent="-155448">
+            <a:pPr marL="155448" indent="-155448" algn="l">
               <a:lnSpc>
                 <a:spcPct val="105000"/>
               </a:lnSpc>
@@ -15595,7 +15599,7 @@
             </a:r>
           </a:p>
           <a:p>
-            <a:pPr algn="l" marL="155448" indent="-155448">
+            <a:pPr marL="155448" indent="-155448" algn="l">
               <a:lnSpc>
                 <a:spcPct val="105000"/>
               </a:lnSpc>
@@ -15634,7 +15638,7 @@
 </file>
 
 <file path=ppt/slides/slide7.xml><?xml version="1.0" encoding="utf-8"?>
-<p:sld xmlns:a="http://schemas.openxmlformats.org/drawingml/2006/main" xmlns:p="http://schemas.openxmlformats.org/presentationml/2006/main" xmlns:r="http://schemas.openxmlformats.org/officeDocument/2006/relationships">
+<p:sld xmlns:a="http://schemas.openxmlformats.org/drawingml/2006/main" xmlns:r="http://schemas.openxmlformats.org/officeDocument/2006/relationships" xmlns:p="http://schemas.openxmlformats.org/presentationml/2006/main">
   <p:cSld>
     <p:spTree>
       <p:nvGrpSpPr>
@@ -15642,7 +15646,14 @@
         <p:cNvGrpSpPr/>
         <p:nvPr/>
       </p:nvGrpSpPr>
-      <p:grpSpPr/>
+      <p:grpSpPr>
+        <a:xfrm>
+          <a:off x="0" y="0"/>
+          <a:ext cx="0" cy="0"/>
+          <a:chOff x="0" y="0"/>
+          <a:chExt cx="0" cy="0"/>
+        </a:xfrm>
+      </p:grpSpPr>
       <p:sp>
         <p:nvSpPr>
           <p:cNvPr id="2" name="Title 1"/>
@@ -15660,7 +15671,7 @@
           </a:xfrm>
         </p:spPr>
         <p:txBody>
-          <a:bodyPr anchor="ctr" lIns="45720"/>
+          <a:bodyPr lIns="45720" anchor="ctr"/>
           <a:lstStyle/>
           <a:p>
             <a:pPr algn="l"/>
@@ -15693,7 +15704,7 @@
           <a:noFill/>
         </p:spPr>
         <p:txBody>
-          <a:bodyPr wrap="square" lIns="45720" rIns="45720" tIns="27432" bIns="27432" anchor="t"/>
+          <a:bodyPr wrap="square" lIns="45720" tIns="27432" rIns="45720" bIns="27432" anchor="t"/>
           <a:lstStyle/>
           <a:p>
             <a:pPr algn="l">
@@ -15768,7 +15779,7 @@
           <a:noFill/>
         </p:spPr>
         <p:txBody>
-          <a:bodyPr wrap="square" lIns="45720" rIns="45720" tIns="27432" bIns="27432" anchor="t"/>
+          <a:bodyPr wrap="square" lIns="45720" tIns="27432" rIns="45720" bIns="27432" anchor="t"/>
           <a:lstStyle/>
           <a:p>
             <a:pPr algn="l">
@@ -15780,13 +15791,31 @@
               </a:spcAft>
             </a:pPr>
             <a:r>
-              <a:rPr sz="850" b="0" i="0">
+              <a:rPr sz="850" b="0" i="0" dirty="0">
                 <a:solidFill>
                   <a:srgbClr val="808080"/>
                 </a:solidFill>
                 <a:latin typeface="Arial"/>
               </a:rPr>
-              <a:t>ACOD310 mid-term  ·  17 October 2026  ·  Sumant Varanasi &amp; Parva Chaudhary</a:t>
+              <a:t>ACOD310 mid-term  ·  1</a:t>
+            </a:r>
+            <a:r>
+              <a:rPr lang="en-IN" sz="850" b="0" i="0" dirty="0">
+                <a:solidFill>
+                  <a:srgbClr val="808080"/>
+                </a:solidFill>
+                <a:latin typeface="Arial"/>
+              </a:rPr>
+              <a:t>6</a:t>
+            </a:r>
+            <a:r>
+              <a:rPr sz="850" b="0" i="0" dirty="0">
+                <a:solidFill>
+                  <a:srgbClr val="808080"/>
+                </a:solidFill>
+                <a:latin typeface="Arial"/>
+              </a:rPr>
+              <a:t> October 2026  ·  Sumant Varanasi &amp; Parva Chaudhary</a:t>
             </a:r>
           </a:p>
         </p:txBody>
@@ -15808,7 +15837,7 @@
           <a:noFill/>
         </p:spPr>
         <p:txBody>
-          <a:bodyPr wrap="square" lIns="45720" rIns="45720" tIns="27432" bIns="27432" anchor="t"/>
+          <a:bodyPr wrap="square" lIns="45720" tIns="27432" rIns="45720" bIns="27432" anchor="t"/>
           <a:lstStyle/>
           <a:p>
             <a:pPr algn="r">
@@ -15894,7 +15923,9 @@
         <p:txBody>
           <a:bodyPr rtlCol="0" anchor="ctr"/>
           <a:lstStyle/>
-          <a:p/>
+          <a:p>
+            <a:endParaRPr/>
+          </a:p>
         </p:txBody>
       </p:sp>
       <p:sp>
@@ -15914,7 +15945,7 @@
           <a:noFill/>
         </p:spPr>
         <p:txBody>
-          <a:bodyPr wrap="square" lIns="45720" rIns="45720" tIns="27432" bIns="27432" anchor="t"/>
+          <a:bodyPr wrap="square" lIns="45720" tIns="27432" rIns="45720" bIns="27432" anchor="t"/>
           <a:lstStyle/>
           <a:p>
             <a:pPr algn="l">
@@ -15976,7 +16007,9 @@
         <p:txBody>
           <a:bodyPr rtlCol="0" anchor="ctr"/>
           <a:lstStyle/>
-          <a:p/>
+          <a:p>
+            <a:endParaRPr/>
+          </a:p>
         </p:txBody>
       </p:sp>
       <p:sp>
@@ -15996,7 +16029,7 @@
           <a:noFill/>
         </p:spPr>
         <p:txBody>
-          <a:bodyPr wrap="square" lIns="45720" rIns="45720" tIns="27432" bIns="27432" anchor="t"/>
+          <a:bodyPr wrap="square" lIns="45720" tIns="27432" rIns="45720" bIns="27432" anchor="t"/>
           <a:lstStyle/>
           <a:p>
             <a:pPr algn="l">
@@ -16058,7 +16091,9 @@
         <p:txBody>
           <a:bodyPr rtlCol="0" anchor="ctr"/>
           <a:lstStyle/>
-          <a:p/>
+          <a:p>
+            <a:endParaRPr/>
+          </a:p>
         </p:txBody>
       </p:sp>
       <p:sp>
@@ -16078,7 +16113,7 @@
           <a:noFill/>
         </p:spPr>
         <p:txBody>
-          <a:bodyPr wrap="square" lIns="45720" rIns="45720" tIns="27432" bIns="27432" anchor="t"/>
+          <a:bodyPr wrap="square" lIns="45720" tIns="27432" rIns="45720" bIns="27432" anchor="t"/>
           <a:lstStyle/>
           <a:p>
             <a:pPr algn="l">
@@ -16140,7 +16175,9 @@
         <p:txBody>
           <a:bodyPr rtlCol="0" anchor="ctr"/>
           <a:lstStyle/>
-          <a:p/>
+          <a:p>
+            <a:endParaRPr/>
+          </a:p>
         </p:txBody>
       </p:sp>
       <p:sp>
@@ -16160,7 +16197,7 @@
           <a:noFill/>
         </p:spPr>
         <p:txBody>
-          <a:bodyPr wrap="square" lIns="45720" rIns="45720" tIns="27432" bIns="27432" anchor="t"/>
+          <a:bodyPr wrap="square" lIns="45720" tIns="27432" rIns="45720" bIns="27432" anchor="t"/>
           <a:lstStyle/>
           <a:p>
             <a:pPr algn="l">
@@ -16193,7 +16230,7 @@
         </p:nvGraphicFramePr>
         <p:xfrm>
           <a:off x="365760" y="4892040"/>
-          <a:ext cx="8046720" cy="1234440"/>
+          <a:ext cx="8046720" cy="1289304"/>
         </p:xfrm>
         <a:graphic>
           <a:graphicData uri="http://schemas.openxmlformats.org/drawingml/2006/table">
@@ -16202,16 +16239,36 @@
                 <a:tableStyleId>{5C22544A-7EE6-4342-B048-85BDC9FD1C3A}</a:tableStyleId>
               </a:tblPr>
               <a:tblGrid>
-                <a:gridCol w="2377440"/>
-                <a:gridCol w="2834640"/>
-                <a:gridCol w="2834640"/>
+                <a:gridCol w="2377440">
+                  <a:extLst>
+                    <a:ext uri="{9D8B030D-6E8A-4147-A177-3AD203B41FA5}">
+                      <a16:colId xmlns:a16="http://schemas.microsoft.com/office/drawing/2014/main" val="20000"/>
+                    </a:ext>
+                  </a:extLst>
+                </a:gridCol>
+                <a:gridCol w="2834640">
+                  <a:extLst>
+                    <a:ext uri="{9D8B030D-6E8A-4147-A177-3AD203B41FA5}">
+                      <a16:colId xmlns:a16="http://schemas.microsoft.com/office/drawing/2014/main" val="20001"/>
+                    </a:ext>
+                  </a:extLst>
+                </a:gridCol>
+                <a:gridCol w="2834640">
+                  <a:extLst>
+                    <a:ext uri="{9D8B030D-6E8A-4147-A177-3AD203B41FA5}">
+                      <a16:colId xmlns:a16="http://schemas.microsoft.com/office/drawing/2014/main" val="20002"/>
+                    </a:ext>
+                  </a:extLst>
+                </a:gridCol>
               </a:tblGrid>
               <a:tr h="246888">
                 <a:tc>
                   <a:txBody>
                     <a:bodyPr/>
                     <a:lstStyle/>
-                    <a:p/>
+                    <a:p>
+                      <a:endParaRPr/>
+                    </a:p>
                   </a:txBody>
                   <a:tcPr marL="54864" marR="54864" marT="13716" marB="13716">
                     <a:solidFill>
@@ -16263,6 +16320,11 @@
                     </a:solidFill>
                   </a:tcPr>
                 </a:tc>
+                <a:extLst>
+                  <a:ext uri="{0D108BD9-81ED-4DB2-BD59-A6C34878D82A}">
+                    <a16:rowId xmlns:a16="http://schemas.microsoft.com/office/drawing/2014/main" val="10000"/>
+                  </a:ext>
+                </a:extLst>
               </a:tr>
               <a:tr h="246888">
                 <a:tc>
@@ -16331,6 +16393,11 @@
                     </a:solidFill>
                   </a:tcPr>
                 </a:tc>
+                <a:extLst>
+                  <a:ext uri="{0D108BD9-81ED-4DB2-BD59-A6C34878D82A}">
+                    <a16:rowId xmlns:a16="http://schemas.microsoft.com/office/drawing/2014/main" val="10001"/>
+                  </a:ext>
+                </a:extLst>
               </a:tr>
               <a:tr h="246888">
                 <a:tc>
@@ -16399,6 +16466,11 @@
                     </a:solidFill>
                   </a:tcPr>
                 </a:tc>
+                <a:extLst>
+                  <a:ext uri="{0D108BD9-81ED-4DB2-BD59-A6C34878D82A}">
+                    <a16:rowId xmlns:a16="http://schemas.microsoft.com/office/drawing/2014/main" val="10002"/>
+                  </a:ext>
+                </a:extLst>
               </a:tr>
               <a:tr h="246888">
                 <a:tc>
@@ -16467,6 +16539,11 @@
                     </a:solidFill>
                   </a:tcPr>
                 </a:tc>
+                <a:extLst>
+                  <a:ext uri="{0D108BD9-81ED-4DB2-BD59-A6C34878D82A}">
+                    <a16:rowId xmlns:a16="http://schemas.microsoft.com/office/drawing/2014/main" val="10003"/>
+                  </a:ext>
+                </a:extLst>
               </a:tr>
               <a:tr h="246888">
                 <a:tc>
@@ -16535,6 +16612,11 @@
                     </a:solidFill>
                   </a:tcPr>
                 </a:tc>
+                <a:extLst>
+                  <a:ext uri="{0D108BD9-81ED-4DB2-BD59-A6C34878D82A}">
+                    <a16:rowId xmlns:a16="http://schemas.microsoft.com/office/drawing/2014/main" val="10004"/>
+                  </a:ext>
+                </a:extLst>
               </a:tr>
             </a:tbl>
           </a:graphicData>
@@ -16557,7 +16639,7 @@
           <a:noFill/>
         </p:spPr>
         <p:txBody>
-          <a:bodyPr wrap="square" lIns="45720" rIns="45720" tIns="27432" bIns="27432" anchor="t"/>
+          <a:bodyPr wrap="square" lIns="45720" tIns="27432" rIns="45720" bIns="27432" anchor="t"/>
           <a:lstStyle/>
           <a:p>
             <a:pPr algn="l">
@@ -16582,99 +16664,6 @@
       </p:sp>
       <p:sp>
         <p:nvSpPr>
-          <p:cNvPr id="18" name="Rounded Rectangle 17"/>
-          <p:cNvSpPr/>
-          <p:nvPr/>
-        </p:nvSpPr>
-        <p:spPr>
-          <a:xfrm>
-            <a:off x="8641080" y="1463040"/>
-            <a:ext cx="3063240" cy="868680"/>
-          </a:xfrm>
-          <a:prstGeom prst="roundRect">
-            <a:avLst>
-              <a:gd name="adj" fmla="val 8000"/>
-            </a:avLst>
-          </a:prstGeom>
-          <a:solidFill>
-            <a:srgbClr val="F3F3F3"/>
-          </a:solidFill>
-          <a:ln>
-            <a:noFill/>
-          </a:ln>
-          <a:effectLst/>
-        </p:spPr>
-        <p:style>
-          <a:lnRef idx="1">
-            <a:schemeClr val="accent1"/>
-          </a:lnRef>
-          <a:fillRef idx="3">
-            <a:schemeClr val="accent1"/>
-          </a:fillRef>
-          <a:effectRef idx="2">
-            <a:schemeClr val="accent1"/>
-          </a:effectRef>
-          <a:fontRef idx="minor">
-            <a:schemeClr val="lt1"/>
-          </a:fontRef>
-        </p:style>
-        <p:txBody>
-          <a:bodyPr rtlCol="0" anchor="ctr"/>
-          <a:lstStyle/>
-          <a:p/>
-        </p:txBody>
-      </p:sp>
-      <p:sp>
-        <p:nvSpPr>
-          <p:cNvPr id="19" name="TextBox 18"/>
-          <p:cNvSpPr txBox="1"/>
-          <p:nvPr/>
-        </p:nvSpPr>
-        <p:spPr>
-          <a:xfrm>
-            <a:off x="8732520" y="1490472"/>
-            <a:ext cx="2880360" cy="822960"/>
-          </a:xfrm>
-          <a:prstGeom prst="rect">
-            <a:avLst/>
-          </a:prstGeom>
-          <a:noFill/>
-        </p:spPr>
-        <p:txBody>
-          <a:bodyPr wrap="square" lIns="45720" rIns="45720" tIns="27432" bIns="27432" anchor="t"/>
-          <a:lstStyle/>
-          <a:p>
-            <a:pPr algn="l">
-              <a:lnSpc>
-                <a:spcPct val="104000"/>
-              </a:lnSpc>
-              <a:spcAft>
-                <a:spcPts val="300"/>
-              </a:spcAft>
-            </a:pPr>
-            <a:r>
-              <a:rPr sz="950" b="1" i="0">
-                <a:solidFill>
-                  <a:srgbClr val="6E1A1D"/>
-                </a:solidFill>
-                <a:latin typeface="Arial"/>
-              </a:rPr>
-              <a:t>Benchmark of the v4 advisor </a:t>
-            </a:r>
-            <a:r>
-              <a:rPr sz="950" b="0" i="0">
-                <a:solidFill>
-                  <a:srgbClr val="555555"/>
-                </a:solidFill>
-                <a:latin typeface="Arial"/>
-              </a:rPr>
-              <a:t>(plain kinetics, one-step look-ahead) on the simulated reactor. The v5 planner's 170-campaign benchmark has just finished; first look on slide 8.</a:t>
-            </a:r>
-          </a:p>
-        </p:txBody>
-      </p:sp>
-      <p:sp>
-        <p:nvSpPr>
           <p:cNvPr id="20" name="Rounded Rectangle 19"/>
           <p:cNvSpPr/>
           <p:nvPr/>
@@ -16714,7 +16703,9 @@
         <p:txBody>
           <a:bodyPr rtlCol="0" anchor="ctr"/>
           <a:lstStyle/>
-          <a:p/>
+          <a:p>
+            <a:endParaRPr/>
+          </a:p>
         </p:txBody>
       </p:sp>
       <p:sp>
@@ -16734,7 +16725,7 @@
           <a:noFill/>
         </p:spPr>
         <p:txBody>
-          <a:bodyPr wrap="square" lIns="45720" rIns="45720" tIns="27432" bIns="27432" anchor="t"/>
+          <a:bodyPr wrap="square" lIns="45720" tIns="27432" rIns="45720" bIns="27432" anchor="t"/>
           <a:lstStyle/>
           <a:p>
             <a:pPr algn="l">
@@ -16774,7 +16765,7 @@
           <a:noFill/>
         </p:spPr>
         <p:txBody>
-          <a:bodyPr wrap="square" lIns="45720" rIns="45720" tIns="27432" bIns="27432" anchor="t"/>
+          <a:bodyPr wrap="square" lIns="45720" tIns="27432" rIns="45720" bIns="27432" anchor="t"/>
           <a:lstStyle/>
           <a:p>
             <a:pPr algn="l">
@@ -16786,7 +16777,7 @@
               </a:spcAft>
             </a:pPr>
             <a:r>
-              <a:rPr sz="1000" b="0" i="0">
+              <a:rPr sz="1000" b="0" i="0" dirty="0">
                 <a:solidFill>
                   <a:srgbClr val="555555"/>
                 </a:solidFill>
@@ -16838,7 +16829,9 @@
         <p:txBody>
           <a:bodyPr rtlCol="0" anchor="ctr"/>
           <a:lstStyle/>
-          <a:p/>
+          <a:p>
+            <a:endParaRPr/>
+          </a:p>
         </p:txBody>
       </p:sp>
       <p:sp>
@@ -16858,7 +16851,7 @@
           <a:noFill/>
         </p:spPr>
         <p:txBody>
-          <a:bodyPr wrap="square" lIns="45720" rIns="45720" tIns="27432" bIns="27432" anchor="t"/>
+          <a:bodyPr wrap="square" lIns="45720" tIns="27432" rIns="45720" bIns="27432" anchor="t"/>
           <a:lstStyle/>
           <a:p>
             <a:pPr algn="l">
@@ -16937,7 +16930,7 @@
 </file>
 
 <file path=ppt/slides/slide8.xml><?xml version="1.0" encoding="utf-8"?>
-<p:sld xmlns:a="http://schemas.openxmlformats.org/drawingml/2006/main" xmlns:p="http://schemas.openxmlformats.org/presentationml/2006/main" xmlns:r="http://schemas.openxmlformats.org/officeDocument/2006/relationships">
+<p:sld xmlns:a="http://schemas.openxmlformats.org/drawingml/2006/main" xmlns:r="http://schemas.openxmlformats.org/officeDocument/2006/relationships" xmlns:p="http://schemas.openxmlformats.org/presentationml/2006/main">
   <p:cSld>
     <p:spTree>
       <p:nvGrpSpPr>
@@ -16945,7 +16938,14 @@
         <p:cNvGrpSpPr/>
         <p:nvPr/>
       </p:nvGrpSpPr>
-      <p:grpSpPr/>
+      <p:grpSpPr>
+        <a:xfrm>
+          <a:off x="0" y="0"/>
+          <a:ext cx="0" cy="0"/>
+          <a:chOff x="0" y="0"/>
+          <a:chExt cx="0" cy="0"/>
+        </a:xfrm>
+      </p:grpSpPr>
       <p:sp>
         <p:nvSpPr>
           <p:cNvPr id="2" name="Title 1"/>
@@ -16963,7 +16963,7 @@
           </a:xfrm>
         </p:spPr>
         <p:txBody>
-          <a:bodyPr anchor="ctr" lIns="45720"/>
+          <a:bodyPr lIns="45720" anchor="ctr"/>
           <a:lstStyle/>
           <a:p>
             <a:pPr algn="l"/>
@@ -16996,7 +16996,7 @@
           <a:noFill/>
         </p:spPr>
         <p:txBody>
-          <a:bodyPr wrap="square" lIns="45720" rIns="45720" tIns="27432" bIns="27432" anchor="t"/>
+          <a:bodyPr wrap="square" lIns="45720" tIns="27432" rIns="45720" bIns="27432" anchor="t"/>
           <a:lstStyle/>
           <a:p>
             <a:pPr algn="l">
@@ -17071,7 +17071,7 @@
           <a:noFill/>
         </p:spPr>
         <p:txBody>
-          <a:bodyPr wrap="square" lIns="45720" rIns="45720" tIns="27432" bIns="27432" anchor="t"/>
+          <a:bodyPr wrap="square" lIns="45720" tIns="27432" rIns="45720" bIns="27432" anchor="t"/>
           <a:lstStyle/>
           <a:p>
             <a:pPr algn="l">
@@ -17083,13 +17083,31 @@
               </a:spcAft>
             </a:pPr>
             <a:r>
-              <a:rPr sz="850" b="0" i="0">
+              <a:rPr sz="850" b="0" i="0" dirty="0">
                 <a:solidFill>
                   <a:srgbClr val="808080"/>
                 </a:solidFill>
                 <a:latin typeface="Arial"/>
               </a:rPr>
-              <a:t>ACOD310 mid-term  ·  17 October 2026  ·  Sumant Varanasi &amp; Parva Chaudhary</a:t>
+              <a:t>ACOD310 mid-term  ·  1</a:t>
+            </a:r>
+            <a:r>
+              <a:rPr lang="en-IN" sz="850" b="0" i="0" dirty="0">
+                <a:solidFill>
+                  <a:srgbClr val="808080"/>
+                </a:solidFill>
+                <a:latin typeface="Arial"/>
+              </a:rPr>
+              <a:t>6</a:t>
+            </a:r>
+            <a:r>
+              <a:rPr sz="850" b="0" i="0" dirty="0">
+                <a:solidFill>
+                  <a:srgbClr val="808080"/>
+                </a:solidFill>
+                <a:latin typeface="Arial"/>
+              </a:rPr>
+              <a:t> October 2026  ·  Sumant Varanasi &amp; Parva Chaudhary</a:t>
             </a:r>
           </a:p>
         </p:txBody>
@@ -17111,7 +17129,7 @@
           <a:noFill/>
         </p:spPr>
         <p:txBody>
-          <a:bodyPr wrap="square" lIns="45720" rIns="45720" tIns="27432" bIns="27432" anchor="t"/>
+          <a:bodyPr wrap="square" lIns="45720" tIns="27432" rIns="45720" bIns="27432" anchor="t"/>
           <a:lstStyle/>
           <a:p>
             <a:pPr algn="r">
@@ -17175,7 +17193,7 @@
           <a:noFill/>
         </p:spPr>
         <p:txBody>
-          <a:bodyPr wrap="square" lIns="45720" rIns="45720" tIns="27432" bIns="27432" anchor="t"/>
+          <a:bodyPr wrap="square" lIns="45720" tIns="27432" rIns="45720" bIns="27432" anchor="t"/>
           <a:lstStyle/>
           <a:p>
             <a:pPr algn="l">
@@ -17187,7 +17205,7 @@
               </a:spcAft>
             </a:pPr>
             <a:r>
-              <a:rPr sz="900" b="0" i="0">
+              <a:rPr sz="900" b="0" i="0" dirty="0">
                 <a:solidFill>
                   <a:srgbClr val="555555"/>
                 </a:solidFill>
@@ -17239,7 +17257,9 @@
         <p:txBody>
           <a:bodyPr rtlCol="0" anchor="ctr"/>
           <a:lstStyle/>
-          <a:p/>
+          <a:p>
+            <a:endParaRPr/>
+          </a:p>
         </p:txBody>
       </p:sp>
       <p:sp>
@@ -17259,7 +17279,7 @@
           <a:noFill/>
         </p:spPr>
         <p:txBody>
-          <a:bodyPr wrap="square" lIns="45720" rIns="45720" tIns="27432" bIns="27432" anchor="t"/>
+          <a:bodyPr wrap="square" lIns="45720" tIns="27432" rIns="45720" bIns="27432" anchor="t"/>
           <a:lstStyle/>
           <a:p>
             <a:pPr algn="l">
@@ -17299,10 +17319,10 @@
           <a:noFill/>
         </p:spPr>
         <p:txBody>
-          <a:bodyPr wrap="square" lIns="45720" rIns="45720" tIns="27432" bIns="27432" anchor="t"/>
-          <a:lstStyle/>
-          <a:p>
-            <a:pPr algn="l" marL="155448" indent="-155448">
+          <a:bodyPr wrap="square" lIns="45720" tIns="27432" rIns="45720" bIns="27432" anchor="t"/>
+          <a:lstStyle/>
+          <a:p>
+            <a:pPr marL="155448" indent="-155448" algn="l">
               <a:lnSpc>
                 <a:spcPct val="106000"/>
               </a:lnSpc>
@@ -17312,17 +17332,35 @@
               <a:buChar char="•"/>
             </a:pPr>
             <a:r>
-              <a:rPr sz="950" b="0" i="0">
+              <a:rPr sz="950" b="0" i="0" dirty="0">
                 <a:solidFill>
                   <a:srgbClr val="222222"/>
                 </a:solidFill>
                 <a:latin typeface="Arial"/>
               </a:rPr>
-              <a:t>How strongly each reaction speeds up with heat (its activation energy) comes out in the right order — and that order decides the best temperature</a:t>
-            </a:r>
-          </a:p>
-          <a:p>
-            <a:pPr algn="l" marL="155448" indent="-155448">
+              <a:t>How strongly each reaction speeds up with heat (its activation energy) comes out in the right order </a:t>
+            </a:r>
+            <a:r>
+              <a:rPr lang="en-IN" sz="950" b="0" i="0" dirty="0">
+                <a:solidFill>
+                  <a:srgbClr val="222222"/>
+                </a:solidFill>
+                <a:latin typeface="Arial"/>
+              </a:rPr>
+              <a:t>-</a:t>
+            </a:r>
+            <a:r>
+              <a:rPr sz="950" b="0" i="0" dirty="0">
+                <a:solidFill>
+                  <a:srgbClr val="222222"/>
+                </a:solidFill>
+                <a:latin typeface="Arial"/>
+              </a:rPr>
+              <a:t> and that order decides the best temperature</a:t>
+            </a:r>
+          </a:p>
+          <a:p>
+            <a:pPr marL="155448" indent="-155448" algn="l">
               <a:lnSpc>
                 <a:spcPct val="106000"/>
               </a:lnSpc>
@@ -17332,7 +17370,7 @@
               <a:buChar char="•"/>
             </a:pPr>
             <a:r>
-              <a:rPr sz="950" b="0" i="0">
+              <a:rPr sz="950" b="0" i="0" dirty="0">
                 <a:solidFill>
                   <a:srgbClr val="222222"/>
                 </a:solidFill>
@@ -17384,7 +17422,9 @@
         <p:txBody>
           <a:bodyPr rtlCol="0" anchor="ctr"/>
           <a:lstStyle/>
-          <a:p/>
+          <a:p>
+            <a:endParaRPr/>
+          </a:p>
         </p:txBody>
       </p:sp>
       <p:sp>
@@ -17404,7 +17444,7 @@
           <a:noFill/>
         </p:spPr>
         <p:txBody>
-          <a:bodyPr wrap="square" lIns="45720" rIns="45720" tIns="27432" bIns="27432" anchor="t"/>
+          <a:bodyPr wrap="square" lIns="45720" tIns="27432" rIns="45720" bIns="27432" anchor="t"/>
           <a:lstStyle/>
           <a:p>
             <a:pPr algn="l">
@@ -17416,13 +17456,13 @@
               </a:spcAft>
             </a:pPr>
             <a:r>
-              <a:rPr sz="1300" b="1" i="0">
+              <a:rPr sz="1300" b="1" i="0" dirty="0">
                 <a:solidFill>
                   <a:srgbClr val="6E1A1D"/>
                 </a:solidFill>
                 <a:latin typeface="Arial"/>
               </a:rPr>
-              <a:t>Added this month (v5)</a:t>
+              <a:t> </a:t>
             </a:r>
           </a:p>
         </p:txBody>
@@ -17444,10 +17484,10 @@
           <a:noFill/>
         </p:spPr>
         <p:txBody>
-          <a:bodyPr wrap="square" lIns="45720" rIns="45720" tIns="27432" bIns="27432" anchor="t"/>
-          <a:lstStyle/>
-          <a:p>
-            <a:pPr algn="l" marL="155448" indent="-155448">
+          <a:bodyPr wrap="square" lIns="45720" tIns="27432" rIns="45720" bIns="27432" anchor="t"/>
+          <a:lstStyle/>
+          <a:p>
+            <a:pPr marL="155448" indent="-155448" algn="l">
               <a:lnSpc>
                 <a:spcPct val="106000"/>
               </a:lnSpc>
@@ -17457,7 +17497,7 @@
               <a:buChar char="•"/>
             </a:pPr>
             <a:r>
-              <a:rPr sz="950" b="0" i="0">
+              <a:rPr sz="950" b="0" i="0" dirty="0">
                 <a:solidFill>
                   <a:srgbClr val="222222"/>
                 </a:solidFill>
@@ -17467,7 +17507,7 @@
             </a:r>
           </a:p>
           <a:p>
-            <a:pPr algn="l" marL="155448" indent="-155448">
+            <a:pPr marL="155448" indent="-155448" algn="l">
               <a:lnSpc>
                 <a:spcPct val="106000"/>
               </a:lnSpc>
@@ -17477,7 +17517,7 @@
               <a:buChar char="•"/>
             </a:pPr>
             <a:r>
-              <a:rPr sz="950" b="0" i="0">
+              <a:rPr sz="950" b="0" i="0" dirty="0">
                 <a:solidFill>
                   <a:srgbClr val="222222"/>
                 </a:solidFill>
@@ -17487,7 +17527,7 @@
             </a:r>
           </a:p>
           <a:p>
-            <a:pPr algn="l" marL="155448" indent="-155448">
+            <a:pPr marL="155448" indent="-155448" algn="l">
               <a:lnSpc>
                 <a:spcPct val="106000"/>
               </a:lnSpc>
@@ -17497,13 +17537,49 @@
               <a:buChar char="•"/>
             </a:pPr>
             <a:r>
-              <a:rPr sz="950" b="0" i="0">
+              <a:rPr sz="950" b="0" i="0" dirty="0">
                 <a:solidFill>
                   <a:srgbClr val="222222"/>
                 </a:solidFill>
                 <a:latin typeface="Arial"/>
               </a:rPr>
-              <a:t>First look at the just-finished benchmark (170 campaigns, full analysis next): on the complex reactor v5 ends at the best point in 10 of 10 campaigns and earns more on the way than v4 in 8 of 10; on a catalyst losing 2 %/day every method ends at 41–73 % of the fresh-catalyst best — ageing is detected and reported, not solved — and v5 earned more than v4 in 8 of 10</a:t>
+              <a:t>: on the complex reactor v5 ends at the best point in 10 of 10 campaigns and earns more on the way than v4 in 8 of 10; on a catalyst losing 2 %/day every method ends at 41–73 % of the fresh-catalyst best </a:t>
+            </a:r>
+            <a:r>
+              <a:rPr lang="en-IN" sz="950" b="0" i="0" dirty="0">
+                <a:solidFill>
+                  <a:srgbClr val="222222"/>
+                </a:solidFill>
+                <a:latin typeface="Arial"/>
+              </a:rPr>
+              <a:t>-</a:t>
+            </a:r>
+            <a:r>
+              <a:rPr sz="950" b="0" i="0" dirty="0">
+                <a:solidFill>
+                  <a:srgbClr val="222222"/>
+                </a:solidFill>
+                <a:latin typeface="Arial"/>
+              </a:rPr>
+              <a:t> ageing is detected and reported, not solved </a:t>
+            </a:r>
+            <a:r>
+              <a:rPr lang="en-IN" sz="950" b="0" i="0" dirty="0">
+                <a:solidFill>
+                  <a:srgbClr val="222222"/>
+                </a:solidFill>
+                <a:latin typeface="Arial"/>
+              </a:rPr>
+              <a:t>-</a:t>
+            </a:r>
+            <a:r>
+              <a:rPr sz="950" b="0" i="0" dirty="0">
+                <a:solidFill>
+                  <a:srgbClr val="222222"/>
+                </a:solidFill>
+                <a:latin typeface="Arial"/>
+              </a:rPr>
+              <a:t> and v5 earned more than v4 in 8 of 10</a:t>
             </a:r>
           </a:p>
         </p:txBody>
@@ -17549,7 +17625,9 @@
         <p:txBody>
           <a:bodyPr rtlCol="0" anchor="ctr"/>
           <a:lstStyle/>
-          <a:p/>
+          <a:p>
+            <a:endParaRPr/>
+          </a:p>
         </p:txBody>
       </p:sp>
       <p:sp>
@@ -17569,7 +17647,7 @@
           <a:noFill/>
         </p:spPr>
         <p:txBody>
-          <a:bodyPr wrap="square" lIns="45720" rIns="45720" tIns="27432" bIns="27432" anchor="t"/>
+          <a:bodyPr wrap="square" lIns="45720" tIns="27432" rIns="45720" bIns="27432" anchor="t"/>
           <a:lstStyle/>
           <a:p>
             <a:pPr algn="l">
@@ -17609,10 +17687,10 @@
           <a:noFill/>
         </p:spPr>
         <p:txBody>
-          <a:bodyPr wrap="square" lIns="45720" rIns="45720" tIns="27432" bIns="27432" anchor="t"/>
-          <a:lstStyle/>
-          <a:p>
-            <a:pPr algn="l" marL="155448" indent="-155448">
+          <a:bodyPr wrap="square" lIns="45720" tIns="27432" rIns="45720" bIns="27432" anchor="t"/>
+          <a:lstStyle/>
+          <a:p>
+            <a:pPr marL="155448" indent="-155448" algn="l">
               <a:lnSpc>
                 <a:spcPct val="106000"/>
               </a:lnSpc>
@@ -17622,7 +17700,7 @@
               <a:buChar char="•"/>
             </a:pPr>
             <a:r>
-              <a:rPr sz="900" b="0" i="0">
+              <a:rPr sz="900" b="0" i="0" dirty="0">
                 <a:solidFill>
                   <a:srgbClr val="222222"/>
                 </a:solidFill>
@@ -17632,7 +17710,7 @@
             </a:r>
           </a:p>
           <a:p>
-            <a:pPr algn="l" marL="155448" indent="-155448">
+            <a:pPr marL="155448" indent="-155448" algn="l">
               <a:lnSpc>
                 <a:spcPct val="106000"/>
               </a:lnSpc>
@@ -17642,17 +17720,35 @@
               <a:buChar char="•"/>
             </a:pPr>
             <a:r>
-              <a:rPr sz="900" b="0" i="0">
+              <a:rPr sz="900" b="0" i="0" dirty="0">
                 <a:solidFill>
                   <a:srgbClr val="222222"/>
                 </a:solidFill>
                 <a:latin typeface="Arial"/>
               </a:rPr>
-              <a:t>The advisor must be told which reactions happen (two schemes built in today); with one missing it still works, more slowly</a:t>
-            </a:r>
-          </a:p>
-          <a:p>
-            <a:pPr algn="l" marL="155448" indent="-155448">
+              <a:t>The advisor must be told which reactions happen (two schemes built in</a:t>
+            </a:r>
+            <a:r>
+              <a:rPr lang="en-IN" sz="900" b="0" i="0" dirty="0">
+                <a:solidFill>
+                  <a:srgbClr val="222222"/>
+                </a:solidFill>
+                <a:latin typeface="Arial"/>
+              </a:rPr>
+              <a:t> </a:t>
+            </a:r>
+            <a:r>
+              <a:rPr sz="900" b="0" i="0" dirty="0">
+                <a:solidFill>
+                  <a:srgbClr val="222222"/>
+                </a:solidFill>
+                <a:latin typeface="Arial"/>
+              </a:rPr>
+              <a:t>); with one missing it still works, more slowly</a:t>
+            </a:r>
+          </a:p>
+          <a:p>
+            <a:pPr marL="155448" indent="-155448" algn="l">
               <a:lnSpc>
                 <a:spcPct val="106000"/>
               </a:lnSpc>
@@ -17662,7 +17758,7 @@
               <a:buChar char="•"/>
             </a:pPr>
             <a:r>
-              <a:rPr sz="900" b="0" i="0">
+              <a:rPr sz="900" b="0" i="0" dirty="0">
                 <a:solidFill>
                   <a:srgbClr val="222222"/>
                 </a:solidFill>
@@ -17682,7 +17778,7 @@
 </file>
 
 <file path=ppt/slides/slide9.xml><?xml version="1.0" encoding="utf-8"?>
-<p:sld xmlns:a="http://schemas.openxmlformats.org/drawingml/2006/main" xmlns:p="http://schemas.openxmlformats.org/presentationml/2006/main" xmlns:r="http://schemas.openxmlformats.org/officeDocument/2006/relationships">
+<p:sld xmlns:a="http://schemas.openxmlformats.org/drawingml/2006/main" xmlns:r="http://schemas.openxmlformats.org/officeDocument/2006/relationships" xmlns:p="http://schemas.openxmlformats.org/presentationml/2006/main">
   <p:cSld>
     <p:spTree>
       <p:nvGrpSpPr>
@@ -17690,7 +17786,14 @@
         <p:cNvGrpSpPr/>
         <p:nvPr/>
       </p:nvGrpSpPr>
-      <p:grpSpPr/>
+      <p:grpSpPr>
+        <a:xfrm>
+          <a:off x="0" y="0"/>
+          <a:ext cx="0" cy="0"/>
+          <a:chOff x="0" y="0"/>
+          <a:chExt cx="0" cy="0"/>
+        </a:xfrm>
+      </p:grpSpPr>
       <p:sp>
         <p:nvSpPr>
           <p:cNvPr id="2" name="Title 1"/>
@@ -17708,7 +17811,7 @@
           </a:xfrm>
         </p:spPr>
         <p:txBody>
-          <a:bodyPr anchor="ctr" lIns="45720"/>
+          <a:bodyPr lIns="45720" anchor="ctr"/>
           <a:lstStyle/>
           <a:p>
             <a:pPr algn="l"/>
@@ -17741,7 +17844,7 @@
           <a:noFill/>
         </p:spPr>
         <p:txBody>
-          <a:bodyPr wrap="square" lIns="45720" rIns="45720" tIns="27432" bIns="27432" anchor="t"/>
+          <a:bodyPr wrap="square" lIns="45720" tIns="27432" rIns="45720" bIns="27432" anchor="t"/>
           <a:lstStyle/>
           <a:p>
             <a:pPr algn="l">
@@ -17816,7 +17919,7 @@
           <a:noFill/>
         </p:spPr>
         <p:txBody>
-          <a:bodyPr wrap="square" lIns="45720" rIns="45720" tIns="27432" bIns="27432" anchor="t"/>
+          <a:bodyPr wrap="square" lIns="45720" tIns="27432" rIns="45720" bIns="27432" anchor="t"/>
           <a:lstStyle/>
           <a:p>
             <a:pPr algn="l">
@@ -17828,13 +17931,31 @@
               </a:spcAft>
             </a:pPr>
             <a:r>
-              <a:rPr sz="850" b="0" i="0">
+              <a:rPr sz="850" b="0" i="0" dirty="0">
                 <a:solidFill>
                   <a:srgbClr val="808080"/>
                 </a:solidFill>
                 <a:latin typeface="Arial"/>
               </a:rPr>
-              <a:t>ACOD310 mid-term  ·  17 October 2026  ·  Sumant Varanasi &amp; Parva Chaudhary</a:t>
+              <a:t>ACOD310 mid-term  ·  1</a:t>
+            </a:r>
+            <a:r>
+              <a:rPr lang="en-IN" sz="850" b="0" i="0" dirty="0">
+                <a:solidFill>
+                  <a:srgbClr val="808080"/>
+                </a:solidFill>
+                <a:latin typeface="Arial"/>
+              </a:rPr>
+              <a:t>6</a:t>
+            </a:r>
+            <a:r>
+              <a:rPr sz="850" b="0" i="0" dirty="0">
+                <a:solidFill>
+                  <a:srgbClr val="808080"/>
+                </a:solidFill>
+                <a:latin typeface="Arial"/>
+              </a:rPr>
+              <a:t> October 2026  ·  Sumant Varanasi &amp; Parva Chaudhary</a:t>
             </a:r>
           </a:p>
         </p:txBody>
@@ -17856,7 +17977,7 @@
           <a:noFill/>
         </p:spPr>
         <p:txBody>
-          <a:bodyPr wrap="square" lIns="45720" rIns="45720" tIns="27432" bIns="27432" anchor="t"/>
+          <a:bodyPr wrap="square" lIns="45720" tIns="27432" rIns="45720" bIns="27432" anchor="t"/>
           <a:lstStyle/>
           <a:p>
             <a:pPr algn="r">
@@ -17920,7 +18041,7 @@
           <a:noFill/>
         </p:spPr>
         <p:txBody>
-          <a:bodyPr wrap="square" lIns="45720" rIns="45720" tIns="27432" bIns="27432" anchor="t"/>
+          <a:bodyPr wrap="square" lIns="45720" tIns="27432" rIns="45720" bIns="27432" anchor="t"/>
           <a:lstStyle/>
           <a:p>
             <a:pPr algn="l">
@@ -17984,7 +18105,9 @@
         <p:txBody>
           <a:bodyPr rtlCol="0" anchor="ctr"/>
           <a:lstStyle/>
-          <a:p/>
+          <a:p>
+            <a:endParaRPr/>
+          </a:p>
         </p:txBody>
       </p:sp>
       <p:sp>
@@ -18004,7 +18127,7 @@
           <a:noFill/>
         </p:spPr>
         <p:txBody>
-          <a:bodyPr wrap="square" lIns="45720" rIns="45720" tIns="27432" bIns="27432" anchor="t"/>
+          <a:bodyPr wrap="square" lIns="45720" tIns="27432" rIns="45720" bIns="27432" anchor="t"/>
           <a:lstStyle/>
           <a:p>
             <a:pPr algn="l">
@@ -18064,7 +18187,7 @@
           </a:fontRef>
         </p:style>
         <p:txBody>
-          <a:bodyPr rtlCol="0" anchor="ctr" lIns="0" rIns="0" tIns="0" bIns="0"/>
+          <a:bodyPr lIns="0" tIns="0" rIns="0" bIns="0" rtlCol="0" anchor="ctr"/>
           <a:lstStyle/>
           <a:p>
             <a:pPr algn="ctr"/>
@@ -18097,7 +18220,7 @@
           <a:noFill/>
         </p:spPr>
         <p:txBody>
-          <a:bodyPr wrap="square" lIns="45720" rIns="45720" tIns="27432" bIns="27432" anchor="t"/>
+          <a:bodyPr wrap="square" lIns="45720" tIns="27432" rIns="45720" bIns="27432" anchor="t"/>
           <a:lstStyle/>
           <a:p>
             <a:pPr algn="l">
@@ -18137,7 +18260,7 @@
           <a:noFill/>
         </p:spPr>
         <p:txBody>
-          <a:bodyPr wrap="square" lIns="45720" rIns="45720" tIns="27432" bIns="27432" anchor="t"/>
+          <a:bodyPr wrap="square" lIns="45720" tIns="27432" rIns="45720" bIns="27432" anchor="t"/>
           <a:lstStyle/>
           <a:p>
             <a:pPr algn="l">
@@ -18149,13 +18272,31 @@
               </a:spcAft>
             </a:pPr>
             <a:r>
-              <a:rPr sz="1000" b="0" i="0">
+              <a:rPr sz="1000" b="0" i="0" dirty="0">
                 <a:solidFill>
                   <a:srgbClr val="555555"/>
                 </a:solidFill>
                 <a:latin typeface="Arial"/>
               </a:rPr>
-              <a:t>set points and the GC printout — or import the CSV log you already keep</a:t>
+              <a:t>set points and the GC printout </a:t>
+            </a:r>
+            <a:r>
+              <a:rPr lang="en-IN" sz="1000" b="0" i="0" dirty="0">
+                <a:solidFill>
+                  <a:srgbClr val="555555"/>
+                </a:solidFill>
+                <a:latin typeface="Arial"/>
+              </a:rPr>
+              <a:t>-</a:t>
+            </a:r>
+            <a:r>
+              <a:rPr sz="1000" b="0" i="0" dirty="0">
+                <a:solidFill>
+                  <a:srgbClr val="555555"/>
+                </a:solidFill>
+                <a:latin typeface="Arial"/>
+              </a:rPr>
+              <a:t> or import the CSV log you already keep</a:t>
             </a:r>
           </a:p>
         </p:txBody>
@@ -18197,7 +18338,7 @@
           </a:fontRef>
         </p:style>
         <p:txBody>
-          <a:bodyPr rtlCol="0" anchor="ctr" lIns="0" rIns="0" tIns="0" bIns="0"/>
+          <a:bodyPr lIns="0" tIns="0" rIns="0" bIns="0" rtlCol="0" anchor="ctr"/>
           <a:lstStyle/>
           <a:p>
             <a:pPr algn="ctr"/>
@@ -18230,7 +18371,7 @@
           <a:noFill/>
         </p:spPr>
         <p:txBody>
-          <a:bodyPr wrap="square" lIns="45720" rIns="45720" tIns="27432" bIns="27432" anchor="t"/>
+          <a:bodyPr wrap="square" lIns="45720" tIns="27432" rIns="45720" bIns="27432" anchor="t"/>
           <a:lstStyle/>
           <a:p>
             <a:pPr algn="l">
@@ -18270,7 +18411,7 @@
           <a:noFill/>
         </p:spPr>
         <p:txBody>
-          <a:bodyPr wrap="square" lIns="45720" rIns="45720" tIns="27432" bIns="27432" anchor="t"/>
+          <a:bodyPr wrap="square" lIns="45720" tIns="27432" rIns="45720" bIns="27432" anchor="t"/>
           <a:lstStyle/>
           <a:p>
             <a:pPr algn="l">
@@ -18330,7 +18471,7 @@
           </a:fontRef>
         </p:style>
         <p:txBody>
-          <a:bodyPr rtlCol="0" anchor="ctr" lIns="0" rIns="0" tIns="0" bIns="0"/>
+          <a:bodyPr lIns="0" tIns="0" rIns="0" bIns="0" rtlCol="0" anchor="ctr"/>
           <a:lstStyle/>
           <a:p>
             <a:pPr algn="ctr"/>
@@ -18363,7 +18504,7 @@
           <a:noFill/>
         </p:spPr>
         <p:txBody>
-          <a:bodyPr wrap="square" lIns="45720" rIns="45720" tIns="27432" bIns="27432" anchor="t"/>
+          <a:bodyPr wrap="square" lIns="45720" tIns="27432" rIns="45720" bIns="27432" anchor="t"/>
           <a:lstStyle/>
           <a:p>
             <a:pPr algn="l">
@@ -18403,7 +18544,7 @@
           <a:noFill/>
         </p:spPr>
         <p:txBody>
-          <a:bodyPr wrap="square" lIns="45720" rIns="45720" tIns="27432" bIns="27432" anchor="t"/>
+          <a:bodyPr wrap="square" lIns="45720" tIns="27432" rIns="45720" bIns="27432" anchor="t"/>
           <a:lstStyle/>
           <a:p>
             <a:pPr algn="l">
@@ -18463,7 +18604,7 @@
           </a:fontRef>
         </p:style>
         <p:txBody>
-          <a:bodyPr rtlCol="0" anchor="ctr" lIns="0" rIns="0" tIns="0" bIns="0"/>
+          <a:bodyPr lIns="0" tIns="0" rIns="0" bIns="0" rtlCol="0" anchor="ctr"/>
           <a:lstStyle/>
           <a:p>
             <a:pPr algn="ctr"/>
@@ -18496,7 +18637,7 @@
           <a:noFill/>
         </p:spPr>
         <p:txBody>
-          <a:bodyPr wrap="square" lIns="45720" rIns="45720" tIns="27432" bIns="27432" anchor="t"/>
+          <a:bodyPr wrap="square" lIns="45720" tIns="27432" rIns="45720" bIns="27432" anchor="t"/>
           <a:lstStyle/>
           <a:p>
             <a:pPr algn="l">
@@ -18536,7 +18677,7 @@
           <a:noFill/>
         </p:spPr>
         <p:txBody>
-          <a:bodyPr wrap="square" lIns="45720" rIns="45720" tIns="27432" bIns="27432" anchor="t"/>
+          <a:bodyPr wrap="square" lIns="45720" tIns="27432" rIns="45720" bIns="27432" anchor="t"/>
           <a:lstStyle/>
           <a:p>
             <a:pPr algn="l">
@@ -18600,7 +18741,9 @@
         <p:txBody>
           <a:bodyPr rtlCol="0" anchor="ctr"/>
           <a:lstStyle/>
-          <a:p/>
+          <a:p>
+            <a:endParaRPr/>
+          </a:p>
         </p:txBody>
       </p:sp>
       <p:sp>
@@ -18620,7 +18763,7 @@
           <a:noFill/>
         </p:spPr>
         <p:txBody>
-          <a:bodyPr wrap="square" lIns="45720" rIns="45720" tIns="27432" bIns="27432" anchor="t"/>
+          <a:bodyPr wrap="square" lIns="45720" tIns="27432" rIns="45720" bIns="27432" anchor="t"/>
           <a:lstStyle/>
           <a:p>
             <a:pPr algn="l">
@@ -18660,7 +18803,7 @@
           <a:noFill/>
         </p:spPr>
         <p:txBody>
-          <a:bodyPr wrap="square" lIns="45720" rIns="45720" tIns="27432" bIns="27432" anchor="t"/>
+          <a:bodyPr wrap="square" lIns="45720" tIns="27432" rIns="45720" bIns="27432" anchor="t"/>
           <a:lstStyle/>
           <a:p>
             <a:pPr algn="l">
@@ -18724,7 +18867,9 @@
         <p:txBody>
           <a:bodyPr rtlCol="0" anchor="ctr"/>
           <a:lstStyle/>
-          <a:p/>
+          <a:p>
+            <a:endParaRPr/>
+          </a:p>
         </p:txBody>
       </p:sp>
       <p:sp>
@@ -18744,7 +18889,7 @@
           <a:noFill/>
         </p:spPr>
         <p:txBody>
-          <a:bodyPr wrap="square" lIns="45720" rIns="45720" tIns="27432" bIns="27432" anchor="t"/>
+          <a:bodyPr wrap="square" lIns="45720" tIns="27432" rIns="45720" bIns="27432" anchor="t"/>
           <a:lstStyle/>
           <a:p>
             <a:pPr algn="l">
@@ -18784,7 +18929,7 @@
           <a:noFill/>
         </p:spPr>
         <p:txBody>
-          <a:bodyPr wrap="square" lIns="45720" rIns="45720" tIns="27432" bIns="27432" anchor="t"/>
+          <a:bodyPr wrap="square" lIns="45720" tIns="27432" rIns="45720" bIns="27432" anchor="t"/>
           <a:lstStyle/>
           <a:p>
             <a:pPr algn="l">
@@ -18848,7 +18993,9 @@
         <p:txBody>
           <a:bodyPr rtlCol="0" anchor="ctr"/>
           <a:lstStyle/>
-          <a:p/>
+          <a:p>
+            <a:endParaRPr/>
+          </a:p>
         </p:txBody>
       </p:sp>
       <p:sp>
@@ -18868,7 +19015,7 @@
           <a:noFill/>
         </p:spPr>
         <p:txBody>
-          <a:bodyPr wrap="square" lIns="45720" rIns="45720" tIns="27432" bIns="27432" anchor="t"/>
+          <a:bodyPr wrap="square" lIns="45720" tIns="27432" rIns="45720" bIns="27432" anchor="t"/>
           <a:lstStyle/>
           <a:p>
             <a:pPr algn="l">
@@ -18908,7 +19055,7 @@
           <a:noFill/>
         </p:spPr>
         <p:txBody>
-          <a:bodyPr wrap="square" lIns="45720" rIns="45720" tIns="27432" bIns="27432" anchor="t"/>
+          <a:bodyPr wrap="square" lIns="45720" tIns="27432" rIns="45720" bIns="27432" anchor="t"/>
           <a:lstStyle/>
           <a:p>
             <a:pPr algn="l">
@@ -18972,7 +19119,9 @@
         <p:txBody>
           <a:bodyPr rtlCol="0" anchor="ctr"/>
           <a:lstStyle/>
-          <a:p/>
+          <a:p>
+            <a:endParaRPr/>
+          </a:p>
         </p:txBody>
       </p:sp>
       <p:sp>
@@ -18992,7 +19141,7 @@
           <a:noFill/>
         </p:spPr>
         <p:txBody>
-          <a:bodyPr wrap="square" lIns="45720" rIns="45720" tIns="27432" bIns="27432" anchor="t"/>
+          <a:bodyPr wrap="square" lIns="45720" tIns="27432" rIns="45720" bIns="27432" anchor="t"/>
           <a:lstStyle/>
           <a:p>
             <a:pPr algn="l">
@@ -19032,7 +19181,7 @@
           <a:noFill/>
         </p:spPr>
         <p:txBody>
-          <a:bodyPr wrap="square" lIns="45720" rIns="45720" tIns="27432" bIns="27432" anchor="t"/>
+          <a:bodyPr wrap="square" lIns="45720" tIns="27432" rIns="45720" bIns="27432" anchor="t"/>
           <a:lstStyle/>
           <a:p>
             <a:pPr algn="l">
@@ -19072,7 +19221,7 @@
           <a:noFill/>
         </p:spPr>
         <p:txBody>
-          <a:bodyPr wrap="square" lIns="45720" rIns="45720" tIns="27432" bIns="27432" anchor="t"/>
+          <a:bodyPr wrap="square" lIns="45720" tIns="27432" rIns="45720" bIns="27432" anchor="t"/>
           <a:lstStyle/>
           <a:p>
             <a:pPr algn="ctr">
